--- a/docs/go-to-market/CONSTRUX-Overview.pptx
+++ b/docs/go-to-market/CONSTRUX-Overview.pptx
@@ -15,9 +15,10 @@
     <p:sldId id="263" r:id="rId9"/>
     <p:sldId id="264" r:id="rId10"/>
     <p:sldId id="265" r:id="rId11"/>
+    <p:sldId id="266" r:id="rId12"/>
   </p:sldIdLst>
   <p:notesMasterIdLst>
-    <p:notesMasterId r:id="rId12"/>
+    <p:notesMasterId r:id="rId13"/>
   </p:notesMasterIdLst>
   <p:sldSz cx="12192000" cy="6858000"/>
   <p:notesSz cx="6858000" cy="12192000"/>
@@ -511,7 +512,7 @@
           <a:p>
             <a:r>
               <a:rPr lang="en-US" dirty="0"/>
-              <a:t>Open on the thesis, not the feature list. The product is the record; everything else follows from it.</a:t>
+              <a:t>Open on their money, not our software. Say the headline, then stop talking.</a:t>
             </a:r>
             <a:endParaRPr lang="en-US" dirty="0"/>
           </a:p>
@@ -599,7 +600,7 @@
           <a:p>
             <a:r>
               <a:rPr lang="en-US" dirty="0"/>
-              <a:t>Close on the walkthrough. It is free, needs no login, and it is the thing that converts.</a:t>
+              <a:t>Do not skip this. It makes the other nine slides believable, and buyers remember it.</a:t>
             </a:r>
             <a:endParaRPr lang="en-US" dirty="0"/>
           </a:p>
@@ -623,6 +624,94 @@
             <a:fld id="{F7021451-1387-4CA6-816F-3879F97B5CBC}" type="slidenum">
               <a:rPr lang="en-US"/>
               <a:t>10</a:t>
+            </a:fld>
+            <a:endParaRPr lang="en-US"/>
+          </a:p>
+        </p:txBody>
+      </p:sp>
+    </p:spTree>
+    <p:extLst>
+      <p:ext uri="{BB962C8B-B14F-4D97-AF65-F5344CB8AC3E}">
+        <p14:creationId xmlns:p14="http://schemas.microsoft.com/office/powerpoint/2010/main" val="1024086991"/>
+      </p:ext>
+    </p:extLst>
+  </p:cSld>
+  <p:clrMapOvr>
+    <a:masterClrMapping/>
+  </p:clrMapOvr>
+</p:notes>
+</file>
+
+<file path=ppt/notesSlides/notesSlide11.xml><?xml version="1.0" encoding="utf-8"?>
+<p:notes xmlns:a="http://schemas.openxmlformats.org/drawingml/2006/main" xmlns:r="http://schemas.openxmlformats.org/officeDocument/2006/relationships" xmlns:p="http://schemas.openxmlformats.org/presentationml/2006/main">
+  <p:cSld>
+    <p:spTree>
+      <p:nvGrpSpPr>
+        <p:cNvPr id="1" name=""/>
+        <p:cNvGrpSpPr/>
+        <p:nvPr/>
+      </p:nvGrpSpPr>
+      <p:grpSpPr>
+        <a:xfrm>
+          <a:off x="0" y="0"/>
+          <a:ext cx="0" cy="0"/>
+          <a:chOff x="0" y="0"/>
+          <a:chExt cx="0" cy="0"/>
+        </a:xfrm>
+      </p:grpSpPr>
+      <p:sp>
+        <p:nvSpPr>
+          <p:cNvPr id="2" name="Slide Image Placeholder 1"/>
+          <p:cNvSpPr>
+            <a:spLocks noGrp="1" noRot="1" noChangeAspect="1"/>
+          </p:cNvSpPr>
+          <p:nvPr>
+            <p:ph type="sldImg"/>
+          </p:nvPr>
+        </p:nvSpPr>
+        <p:spPr/>
+      </p:sp>
+      <p:sp>
+        <p:nvSpPr>
+          <p:cNvPr id="3" name="Notes Placeholder 2"/>
+          <p:cNvSpPr>
+            <a:spLocks noGrp="1"/>
+          </p:cNvSpPr>
+          <p:nvPr>
+            <p:ph type="body" idx="1"/>
+          </p:nvPr>
+        </p:nvSpPr>
+        <p:spPr/>
+        <p:txBody>
+          <a:bodyPr/>
+          <a:lstStyle/>
+          <a:p>
+            <a:r>
+              <a:rPr lang="en-US" dirty="0"/>
+              <a:t>Close on the walkthrough. Free, no login, and it converts better than any call.</a:t>
+            </a:r>
+            <a:endParaRPr lang="en-US" dirty="0"/>
+          </a:p>
+        </p:txBody>
+      </p:sp>
+      <p:sp>
+        <p:nvSpPr>
+          <p:cNvPr id="4" name="Slide Number Placeholder 3"/>
+          <p:cNvSpPr>
+            <a:spLocks noGrp="1"/>
+          </p:cNvSpPr>
+          <p:nvPr>
+            <p:ph type="sldNum" sz="quarter" idx="10"/>
+          </p:nvPr>
+        </p:nvSpPr>
+        <p:spPr/>
+        <p:txBody>
+          <a:bodyPr/>
+          <a:lstStyle/>
+          <a:p>
+            <a:fld id="{F7021451-1387-4CA6-816F-3879F97B5CBC}" type="slidenum">
+              <a:rPr lang="en-US"/>
+              <a:t>11</a:t>
             </a:fld>
             <a:endParaRPr lang="en-US"/>
           </a:p>
@@ -687,7 +776,7 @@
           <a:p>
             <a:r>
               <a:rPr lang="en-US" dirty="0"/>
-              <a:t>These are the three every commercial manager has felt. Lead with the loss, not the software.</a:t>
+              <a:t>Let them nod at all three. Everyone commercial in the room has lost one of these.</a:t>
             </a:r>
             <a:endParaRPr lang="en-US" dirty="0"/>
           </a:p>
@@ -775,7 +864,7 @@
           <a:p>
             <a:r>
               <a:rPr lang="en-US" dirty="0"/>
-              <a:t>Say plainly that this is the demo project. Offer the walkthrough — it is the strongest asset and needs no login.</a:t>
+              <a:t>Hold on the number. Then say: that is one notice, on one application, on one job.</a:t>
             </a:r>
             <a:endParaRPr lang="en-US" dirty="0"/>
           </a:p>
@@ -863,7 +952,7 @@
           <a:p>
             <a:r>
               <a:rPr lang="en-US" dirty="0"/>
-              <a:t>The differentiator. Competitors integrate systems; this one never had separate systems to integrate.</a:t>
+              <a:t>The line that lands is "nothing to reconcile". Everyone else integrates systems; we never had two.</a:t>
             </a:r>
             <a:endParaRPr lang="en-US" dirty="0"/>
           </a:p>
@@ -951,7 +1040,7 @@
           <a:p>
             <a:r>
               <a:rPr lang="en-US" dirty="0"/>
-              <a:t>The handover cliff is the industry norm and the reason asset owners lose provenance. This is the answer to it.</a:t>
+              <a:t>Ask the client-side people who holds the provenance of their last building. Nobody does.</a:t>
             </a:r>
             <a:endParaRPr lang="en-US" dirty="0"/>
           </a:p>
@@ -1039,7 +1128,7 @@
           <a:p>
             <a:r>
               <a:rPr lang="en-US" dirty="0"/>
-              <a:t>For SMEs this is the single biggest pitch: they lose money to the Act because nobody is counting days.</a:t>
+              <a:t>For SMEs this is the whole pitch. They lose to the Act because nobody is counting days.</a:t>
             </a:r>
             <a:endParaRPr lang="en-US" dirty="0"/>
           </a:p>
@@ -1127,7 +1216,7 @@
           <a:p>
             <a:r>
               <a:rPr lang="en-US" dirty="0"/>
-              <a:t>This is the objection-handler for anyone nervous about AI in a contractual setting.</a:t>
+              <a:t>This closes the AI objection. The adjudicator line lands with anyone commercial.</a:t>
             </a:r>
             <a:endParaRPr lang="en-US" dirty="0"/>
           </a:p>
@@ -1215,7 +1304,7 @@
           <a:p>
             <a:r>
               <a:rPr lang="en-US" dirty="0"/>
-              <a:t>The seat model is the commercial differentiator: rivals charge per head, which stops people putting the whole supply chain on.</a:t>
+              <a:t>Hand this slide to their IT person and keep talking to the commercial lead.</a:t>
             </a:r>
             <a:endParaRPr lang="en-US" dirty="0"/>
           </a:p>
@@ -1303,7 +1392,7 @@
           <a:p>
             <a:r>
               <a:rPr lang="en-US" dirty="0"/>
-              <a:t>Counter-intuitive but this slide wins technical buyers. Do not skip it — it is the credibility of every other slide.</a:t>
+              <a:t>The seat model is the commercial weapon. Rivals charge per head, so nobody puts their subbies on.</a:t>
             </a:r>
             <a:endParaRPr lang="en-US" dirty="0"/>
           </a:p>
@@ -1684,8 +1773,8 @@
         </p:nvSpPr>
         <p:spPr>
           <a:xfrm>
-            <a:off x="9509760" y="-1554480"/>
-            <a:ext cx="4754880" cy="4754880"/>
+            <a:off x="9326880" y="-1737360"/>
+            <a:ext cx="5120640" cy="5120640"/>
           </a:xfrm>
           <a:prstGeom prst="ellipse">
             <a:avLst/>
@@ -1704,8 +1793,8 @@
         </p:nvSpPr>
         <p:spPr>
           <a:xfrm>
-            <a:off x="10607040" y="-457200"/>
-            <a:ext cx="1371600" cy="1371600"/>
+            <a:off x="10881360" y="-365760"/>
+            <a:ext cx="1188720" cy="1188720"/>
           </a:xfrm>
           <a:prstGeom prst="ellipse">
             <a:avLst/>
@@ -1724,7 +1813,7 @@
         </p:nvSpPr>
         <p:spPr>
           <a:xfrm>
-            <a:off x="685800" y="1371600"/>
+            <a:off x="685800" y="1188720"/>
             <a:ext cx="7315200" cy="457200"/>
           </a:xfrm>
           <a:prstGeom prst="rect">
@@ -1763,8 +1852,8 @@
         </p:nvSpPr>
         <p:spPr>
           <a:xfrm>
-            <a:off x="685800" y="1920240"/>
-            <a:ext cx="8412480" cy="1920240"/>
+            <a:off x="685800" y="1737360"/>
+            <a:ext cx="8961120" cy="2194560"/>
           </a:xfrm>
           <a:prstGeom prst="rect">
             <a:avLst/>
@@ -1778,12 +1867,12 @@
           <a:p>
             <a:pPr indent="0" marL="0">
               <a:lnSpc>
-                <a:spcPts val="4600"/>
+                <a:spcPts val="5200"/>
               </a:lnSpc>
               <a:buNone/>
             </a:pPr>
             <a:r>
-              <a:rPr lang="en-US" sz="4000" b="1" dirty="0">
+              <a:rPr lang="en-US" sz="4400" b="1" dirty="0">
                 <a:solidFill>
                   <a:srgbClr val="FFFFFF"/>
                 </a:solidFill>
@@ -1791,19 +1880,19 @@
                 <a:ea typeface="Cambria" pitchFamily="34" charset="-122"/>
                 <a:cs typeface="Cambria" pitchFamily="34" charset="-120"/>
               </a:rPr>
-              <a:t>The record of how your</a:t>
-            </a:r>
-            <a:endParaRPr lang="en-US" sz="4000" dirty="0"/>
+              <a:t>Stop losing money</a:t>
+            </a:r>
+            <a:endParaRPr lang="en-US" sz="4400" dirty="0"/>
           </a:p>
           <a:p>
             <a:pPr indent="0" marL="0">
               <a:lnSpc>
-                <a:spcPts val="4600"/>
+                <a:spcPts val="5200"/>
               </a:lnSpc>
               <a:buNone/>
             </a:pPr>
             <a:r>
-              <a:rPr lang="en-US" sz="4000" b="1" dirty="0">
+              <a:rPr lang="en-US" sz="4400" b="1" dirty="0">
                 <a:solidFill>
                   <a:srgbClr val="FFFFFF"/>
                 </a:solidFill>
@@ -1811,9 +1900,9 @@
                 <a:ea typeface="Cambria" pitchFamily="34" charset="-122"/>
                 <a:cs typeface="Cambria" pitchFamily="34" charset="-120"/>
               </a:rPr>
-              <a:t>asset came to exist.</a:t>
-            </a:r>
-            <a:endParaRPr lang="en-US" sz="4000" dirty="0"/>
+              <a:t>you have already earned.</a:t>
+            </a:r>
+            <a:endParaRPr lang="en-US" sz="4400" dirty="0"/>
           </a:p>
         </p:txBody>
       </p:sp>
@@ -1825,24 +1914,24 @@
         </p:nvSpPr>
         <p:spPr>
           <a:xfrm>
-            <a:off x="685800" y="3977640"/>
-            <a:ext cx="7863840" cy="822960"/>
-          </a:xfrm>
-          <a:prstGeom prst="rect">
-            <a:avLst/>
-          </a:prstGeom>
-          <a:noFill/>
-          <a:ln/>
-        </p:spPr>
-        <p:txBody>
-          <a:bodyPr wrap="square" lIns="0" tIns="0" rIns="0" bIns="0" rtlCol="0" anchor="ctr"/>
-          <a:lstStyle/>
-          <a:p>
-            <a:pPr indent="0" marL="0">
-              <a:buNone/>
-            </a:pPr>
-            <a:r>
-              <a:rPr lang="en-US" sz="1500" dirty="0">
+            <a:off x="685800" y="4114800"/>
+            <a:ext cx="8046720" cy="822960"/>
+          </a:xfrm>
+          <a:prstGeom prst="rect">
+            <a:avLst/>
+          </a:prstGeom>
+          <a:noFill/>
+          <a:ln/>
+        </p:spPr>
+        <p:txBody>
+          <a:bodyPr wrap="square" lIns="0" tIns="0" rIns="0" bIns="0" rtlCol="0" anchor="ctr"/>
+          <a:lstStyle/>
+          <a:p>
+            <a:pPr indent="0" marL="0">
+              <a:buNone/>
+            </a:pPr>
+            <a:r>
+              <a:rPr lang="en-US" sz="1550" dirty="0">
                 <a:solidFill>
                   <a:srgbClr val="A8B2BD"/>
                 </a:solidFill>
@@ -1850,9 +1939,9 @@
                 <a:ea typeface="Calibri" pitchFamily="34" charset="-122"/>
                 <a:cs typeface="Calibri" pitchFamily="34" charset="-120"/>
               </a:rPr>
-              <a:t>One governed record from concept to the thirtieth year of operation — and every figure on it computed from that record rather than typed into it.</a:t>
-            </a:r>
-            <a:endParaRPr lang="en-US" sz="1500" dirty="0"/>
+              <a:t>The AI construction operating system that computes your contract on the day it moves — not four weeks later, when the money has already gone.</a:t>
+            </a:r>
+            <a:endParaRPr lang="en-US" sz="1550" dirty="0"/>
           </a:p>
         </p:txBody>
       </p:sp>
@@ -1864,24 +1953,24 @@
         </p:nvSpPr>
         <p:spPr>
           <a:xfrm>
-            <a:off x="685800" y="5029200"/>
-            <a:ext cx="7863840" cy="365760"/>
-          </a:xfrm>
-          <a:prstGeom prst="rect">
-            <a:avLst/>
-          </a:prstGeom>
-          <a:noFill/>
-          <a:ln/>
-        </p:spPr>
-        <p:txBody>
-          <a:bodyPr wrap="square" lIns="0" tIns="0" rIns="0" bIns="0" rtlCol="0" anchor="ctr"/>
-          <a:lstStyle/>
-          <a:p>
-            <a:pPr indent="0" marL="0">
-              <a:buNone/>
-            </a:pPr>
-            <a:r>
-              <a:rPr lang="en-US" sz="1300" b="1" dirty="0">
+            <a:off x="685800" y="5074920"/>
+            <a:ext cx="8046720" cy="365760"/>
+          </a:xfrm>
+          <a:prstGeom prst="rect">
+            <a:avLst/>
+          </a:prstGeom>
+          <a:noFill/>
+          <a:ln/>
+        </p:spPr>
+        <p:txBody>
+          <a:bodyPr wrap="square" lIns="0" tIns="0" rIns="0" bIns="0" rtlCol="0" anchor="ctr"/>
+          <a:lstStyle/>
+          <a:p>
+            <a:pPr indent="0" marL="0">
+              <a:buNone/>
+            </a:pPr>
+            <a:r>
+              <a:rPr lang="en-US" sz="1400" b="1" dirty="0">
                 <a:solidFill>
                   <a:srgbClr val="FFFFFF"/>
                 </a:solidFill>
@@ -1889,9 +1978,9 @@
                 <a:ea typeface="Calibri" pitchFamily="34" charset="-122"/>
                 <a:cs typeface="Calibri" pitchFamily="34" charset="-120"/>
               </a:rPr>
-              <a:t>An AI-agent construction operating system, for businesses of every size.</a:t>
-            </a:r>
-            <a:endParaRPr lang="en-US" sz="1300" dirty="0"/>
+              <a:t>Sole trader to Tier 1. One record. Concept to year thirty.</a:t>
+            </a:r>
+            <a:endParaRPr lang="en-US" sz="1400" dirty="0"/>
           </a:p>
         </p:txBody>
       </p:sp>
@@ -1945,6 +2034,476 @@
 <file path=ppt/slides/slide10.xml><?xml version="1.0" encoding="utf-8"?>
 <p:sld xmlns:a="http://schemas.openxmlformats.org/drawingml/2006/main" xmlns:r="http://schemas.openxmlformats.org/officeDocument/2006/relationships" xmlns:p="http://schemas.openxmlformats.org/presentationml/2006/main">
   <p:cSld name="Slide 10">
+    <p:bg>
+      <p:bgPr>
+        <a:solidFill>
+          <a:srgbClr val="1A1F26"/>
+        </a:solidFill>
+      </p:bgPr>
+    </p:bg>
+    <p:spTree>
+      <p:nvGrpSpPr>
+        <p:cNvPr id="1" name=""/>
+        <p:cNvGrpSpPr/>
+        <p:nvPr/>
+      </p:nvGrpSpPr>
+      <p:grpSpPr>
+        <a:xfrm>
+          <a:off x="0" y="0"/>
+          <a:ext cx="0" cy="0"/>
+          <a:chOff x="0" y="0"/>
+          <a:chExt cx="0" cy="0"/>
+        </a:xfrm>
+      </p:grpSpPr>
+      <p:sp>
+        <p:nvSpPr>
+          <p:cNvPr id="2" name="Text 0"/>
+          <p:cNvSpPr txBox="1"/>
+          <p:nvPr/>
+        </p:nvSpPr>
+        <p:spPr>
+          <a:xfrm>
+            <a:off x="685800" y="384048"/>
+            <a:ext cx="10789920" cy="274320"/>
+          </a:xfrm>
+          <a:prstGeom prst="rect">
+            <a:avLst/>
+          </a:prstGeom>
+          <a:noFill/>
+          <a:ln/>
+        </p:spPr>
+        <p:txBody>
+          <a:bodyPr wrap="square" lIns="0" tIns="0" rIns="0" bIns="0" rtlCol="0" anchor="ctr"/>
+          <a:lstStyle/>
+          <a:p>
+            <a:pPr indent="0" marL="0">
+              <a:buNone/>
+            </a:pPr>
+            <a:r>
+              <a:rPr lang="en-US" sz="1100" b="1" spc="200" kern="0" dirty="0">
+                <a:solidFill>
+                  <a:srgbClr val="F2A81D"/>
+                </a:solidFill>
+                <a:latin typeface="Calibri" pitchFamily="34" charset="0"/>
+                <a:ea typeface="Calibri" pitchFamily="34" charset="-122"/>
+                <a:cs typeface="Calibri" pitchFamily="34" charset="-120"/>
+              </a:rPr>
+              <a:t>BEFORE YOU ASK, AND BEFORE YOU SIGN</a:t>
+            </a:r>
+            <a:endParaRPr lang="en-US" sz="1100" dirty="0"/>
+          </a:p>
+        </p:txBody>
+      </p:sp>
+      <p:sp>
+        <p:nvSpPr>
+          <p:cNvPr id="3" name="Text 1"/>
+          <p:cNvSpPr txBox="1"/>
+          <p:nvPr/>
+        </p:nvSpPr>
+        <p:spPr>
+          <a:xfrm>
+            <a:off x="685800" y="713232"/>
+            <a:ext cx="10789920" cy="1005840"/>
+          </a:xfrm>
+          <a:prstGeom prst="rect">
+            <a:avLst/>
+          </a:prstGeom>
+          <a:noFill/>
+          <a:ln/>
+        </p:spPr>
+        <p:txBody>
+          <a:bodyPr wrap="square" lIns="0" tIns="0" rIns="0" bIns="0" rtlCol="0" anchor="ctr"/>
+          <a:lstStyle/>
+          <a:p>
+            <a:pPr indent="0" marL="0">
+              <a:buNone/>
+            </a:pPr>
+            <a:r>
+              <a:rPr lang="en-US" sz="4000" b="1" dirty="0">
+                <a:solidFill>
+                  <a:srgbClr val="FFFFFF"/>
+                </a:solidFill>
+                <a:latin typeface="Cambria" pitchFamily="34" charset="0"/>
+                <a:ea typeface="Cambria" pitchFamily="34" charset="-122"/>
+                <a:cs typeface="Cambria" pitchFamily="34" charset="-120"/>
+              </a:rPr>
+              <a:t>What we will not pretend.</a:t>
+            </a:r>
+            <a:endParaRPr lang="en-US" sz="4000" dirty="0"/>
+          </a:p>
+        </p:txBody>
+      </p:sp>
+      <p:sp>
+        <p:nvSpPr>
+          <p:cNvPr id="4" name="Shape 2"/>
+          <p:cNvSpPr/>
+          <p:nvPr/>
+        </p:nvSpPr>
+        <p:spPr>
+          <a:xfrm>
+            <a:off x="685800" y="2148840"/>
+            <a:ext cx="10789920" cy="1024128"/>
+          </a:xfrm>
+          <a:prstGeom prst="roundRect">
+            <a:avLst>
+              <a:gd name="adj" fmla="val 7143"/>
+            </a:avLst>
+          </a:prstGeom>
+          <a:solidFill>
+            <a:srgbClr val="2E3944"/>
+          </a:solidFill>
+          <a:ln/>
+          <a:effectLst>
+            <a:outerShdw sx="100000" sy="100000" kx="0" ky="0" algn="bl" rotWithShape="0" blurRad="127000" dist="25400" dir="5400000">
+              <a:srgbClr val="000000">
+                <a:alpha val="12000"/>
+              </a:srgbClr>
+            </a:outerShdw>
+          </a:effectLst>
+        </p:spPr>
+      </p:sp>
+      <p:sp>
+        <p:nvSpPr>
+          <p:cNvPr id="5" name="Text 3"/>
+          <p:cNvSpPr txBox="1"/>
+          <p:nvPr/>
+        </p:nvSpPr>
+        <p:spPr>
+          <a:xfrm>
+            <a:off x="1051560" y="2295144"/>
+            <a:ext cx="3931920" cy="731520"/>
+          </a:xfrm>
+          <a:prstGeom prst="rect">
+            <a:avLst/>
+          </a:prstGeom>
+          <a:noFill/>
+          <a:ln/>
+        </p:spPr>
+        <p:txBody>
+          <a:bodyPr wrap="square" lIns="0" tIns="0" rIns="0" bIns="0" rtlCol="0" anchor="ctr"/>
+          <a:lstStyle/>
+          <a:p>
+            <a:pPr indent="0" marL="0">
+              <a:buNone/>
+            </a:pPr>
+            <a:r>
+              <a:rPr lang="en-US" sz="1400" b="1" dirty="0">
+                <a:solidFill>
+                  <a:srgbClr val="F2A81D"/>
+                </a:solidFill>
+                <a:latin typeface="Calibri" pitchFamily="34" charset="0"/>
+                <a:ea typeface="Calibri" pitchFamily="34" charset="-122"/>
+                <a:cs typeface="Calibri" pitchFamily="34" charset="-120"/>
+              </a:rPr>
+              <a:t>No independent penetration test yet</a:t>
+            </a:r>
+            <a:endParaRPr lang="en-US" sz="1400" dirty="0"/>
+          </a:p>
+        </p:txBody>
+      </p:sp>
+      <p:sp>
+        <p:nvSpPr>
+          <p:cNvPr id="6" name="Text 4"/>
+          <p:cNvSpPr txBox="1"/>
+          <p:nvPr/>
+        </p:nvSpPr>
+        <p:spPr>
+          <a:xfrm>
+            <a:off x="5212080" y="2295144"/>
+            <a:ext cx="5989320" cy="777240"/>
+          </a:xfrm>
+          <a:prstGeom prst="rect">
+            <a:avLst/>
+          </a:prstGeom>
+          <a:noFill/>
+          <a:ln/>
+        </p:spPr>
+        <p:txBody>
+          <a:bodyPr wrap="square" lIns="0" tIns="0" rIns="0" bIns="0" rtlCol="0" anchor="ctr"/>
+          <a:lstStyle/>
+          <a:p>
+            <a:pPr indent="0" marL="0">
+              <a:buNone/>
+            </a:pPr>
+            <a:r>
+              <a:rPr lang="en-US" sz="1200" dirty="0">
+                <a:solidFill>
+                  <a:srgbClr val="FFFFFF"/>
+                </a:solidFill>
+                <a:latin typeface="Calibri" pitchFamily="34" charset="0"/>
+                <a:ea typeface="Calibri" pitchFamily="34" charset="-122"/>
+                <a:cs typeface="Calibri" pitchFamily="34" charset="-120"/>
+              </a:rPr>
+              <a:t>Encryption at rest, second factor, device binding and tenant isolation are built and tested. An outside test is not done, and we will not imply it is.</a:t>
+            </a:r>
+            <a:endParaRPr lang="en-US" sz="1200" dirty="0"/>
+          </a:p>
+        </p:txBody>
+      </p:sp>
+      <p:sp>
+        <p:nvSpPr>
+          <p:cNvPr id="7" name="Shape 5"/>
+          <p:cNvSpPr/>
+          <p:nvPr/>
+        </p:nvSpPr>
+        <p:spPr>
+          <a:xfrm>
+            <a:off x="685800" y="3319272"/>
+            <a:ext cx="10789920" cy="1024128"/>
+          </a:xfrm>
+          <a:prstGeom prst="roundRect">
+            <a:avLst>
+              <a:gd name="adj" fmla="val 7143"/>
+            </a:avLst>
+          </a:prstGeom>
+          <a:solidFill>
+            <a:srgbClr val="2E3944"/>
+          </a:solidFill>
+          <a:ln/>
+          <a:effectLst>
+            <a:outerShdw sx="100000" sy="100000" kx="0" ky="0" algn="bl" rotWithShape="0" blurRad="127000" dist="25400" dir="5400000">
+              <a:srgbClr val="000000">
+                <a:alpha val="12000"/>
+              </a:srgbClr>
+            </a:outerShdw>
+          </a:effectLst>
+        </p:spPr>
+      </p:sp>
+      <p:sp>
+        <p:nvSpPr>
+          <p:cNvPr id="8" name="Text 6"/>
+          <p:cNvSpPr txBox="1"/>
+          <p:nvPr/>
+        </p:nvSpPr>
+        <p:spPr>
+          <a:xfrm>
+            <a:off x="1051560" y="3465576"/>
+            <a:ext cx="3931920" cy="731520"/>
+          </a:xfrm>
+          <a:prstGeom prst="rect">
+            <a:avLst/>
+          </a:prstGeom>
+          <a:noFill/>
+          <a:ln/>
+        </p:spPr>
+        <p:txBody>
+          <a:bodyPr wrap="square" lIns="0" tIns="0" rIns="0" bIns="0" rtlCol="0" anchor="ctr"/>
+          <a:lstStyle/>
+          <a:p>
+            <a:pPr indent="0" marL="0">
+              <a:buNone/>
+            </a:pPr>
+            <a:r>
+              <a:rPr lang="en-US" sz="1400" b="1" dirty="0">
+                <a:solidFill>
+                  <a:srgbClr val="F2A81D"/>
+                </a:solidFill>
+                <a:latin typeface="Calibri" pitchFamily="34" charset="0"/>
+                <a:ea typeface="Calibri" pitchFamily="34" charset="-122"/>
+                <a:cs typeface="Calibri" pitchFamily="34" charset="-120"/>
+              </a:rPr>
+              <a:t>Single region, manual failover</a:t>
+            </a:r>
+            <a:endParaRPr lang="en-US" sz="1400" dirty="0"/>
+          </a:p>
+        </p:txBody>
+      </p:sp>
+      <p:sp>
+        <p:nvSpPr>
+          <p:cNvPr id="9" name="Text 7"/>
+          <p:cNvSpPr txBox="1"/>
+          <p:nvPr/>
+        </p:nvSpPr>
+        <p:spPr>
+          <a:xfrm>
+            <a:off x="5212080" y="3465576"/>
+            <a:ext cx="5989320" cy="777240"/>
+          </a:xfrm>
+          <a:prstGeom prst="rect">
+            <a:avLst/>
+          </a:prstGeom>
+          <a:noFill/>
+          <a:ln/>
+        </p:spPr>
+        <p:txBody>
+          <a:bodyPr wrap="square" lIns="0" tIns="0" rIns="0" bIns="0" rtlCol="0" anchor="ctr"/>
+          <a:lstStyle/>
+          <a:p>
+            <a:pPr indent="0" marL="0">
+              <a:buNone/>
+            </a:pPr>
+            <a:r>
+              <a:rPr lang="en-US" sz="1200" dirty="0">
+                <a:solidFill>
+                  <a:srgbClr val="FFFFFF"/>
+                </a:solidFill>
+                <a:latin typeface="Calibri" pitchFamily="34" charset="0"/>
+                <a:ea typeface="Calibri" pitchFamily="34" charset="-122"/>
+                <a:cs typeface="Calibri" pitchFamily="34" charset="-120"/>
+              </a:rPr>
+              <a:t>Your record is backed up off the host and a new host comes up from it — but a person starts it. So we sell you no uptime guarantee.</a:t>
+            </a:r>
+            <a:endParaRPr lang="en-US" sz="1200" dirty="0"/>
+          </a:p>
+        </p:txBody>
+      </p:sp>
+      <p:sp>
+        <p:nvSpPr>
+          <p:cNvPr id="10" name="Shape 8"/>
+          <p:cNvSpPr/>
+          <p:nvPr/>
+        </p:nvSpPr>
+        <p:spPr>
+          <a:xfrm>
+            <a:off x="685800" y="4489704"/>
+            <a:ext cx="10789920" cy="1024128"/>
+          </a:xfrm>
+          <a:prstGeom prst="roundRect">
+            <a:avLst>
+              <a:gd name="adj" fmla="val 7143"/>
+            </a:avLst>
+          </a:prstGeom>
+          <a:solidFill>
+            <a:srgbClr val="2E3944"/>
+          </a:solidFill>
+          <a:ln/>
+          <a:effectLst>
+            <a:outerShdw sx="100000" sy="100000" kx="0" ky="0" algn="bl" rotWithShape="0" blurRad="127000" dist="25400" dir="5400000">
+              <a:srgbClr val="000000">
+                <a:alpha val="12000"/>
+              </a:srgbClr>
+            </a:outerShdw>
+          </a:effectLst>
+        </p:spPr>
+      </p:sp>
+      <p:sp>
+        <p:nvSpPr>
+          <p:cNvPr id="11" name="Text 9"/>
+          <p:cNvSpPr txBox="1"/>
+          <p:nvPr/>
+        </p:nvSpPr>
+        <p:spPr>
+          <a:xfrm>
+            <a:off x="1051560" y="4636008"/>
+            <a:ext cx="3931920" cy="731520"/>
+          </a:xfrm>
+          <a:prstGeom prst="rect">
+            <a:avLst/>
+          </a:prstGeom>
+          <a:noFill/>
+          <a:ln/>
+        </p:spPr>
+        <p:txBody>
+          <a:bodyPr wrap="square" lIns="0" tIns="0" rIns="0" bIns="0" rtlCol="0" anchor="ctr"/>
+          <a:lstStyle/>
+          <a:p>
+            <a:pPr indent="0" marL="0">
+              <a:buNone/>
+            </a:pPr>
+            <a:r>
+              <a:rPr lang="en-US" sz="1400" b="1" dirty="0">
+                <a:solidFill>
+                  <a:srgbClr val="F2A81D"/>
+                </a:solidFill>
+                <a:latin typeface="Calibri" pitchFamily="34" charset="0"/>
+                <a:ea typeface="Calibri" pitchFamily="34" charset="-122"/>
+                <a:cs typeface="Calibri" pitchFamily="34" charset="-120"/>
+              </a:rPr>
+              <a:t>No native mobile app</a:t>
+            </a:r>
+            <a:endParaRPr lang="en-US" sz="1400" dirty="0"/>
+          </a:p>
+        </p:txBody>
+      </p:sp>
+      <p:sp>
+        <p:nvSpPr>
+          <p:cNvPr id="12" name="Text 10"/>
+          <p:cNvSpPr txBox="1"/>
+          <p:nvPr/>
+        </p:nvSpPr>
+        <p:spPr>
+          <a:xfrm>
+            <a:off x="5212080" y="4636008"/>
+            <a:ext cx="5989320" cy="777240"/>
+          </a:xfrm>
+          <a:prstGeom prst="rect">
+            <a:avLst/>
+          </a:prstGeom>
+          <a:noFill/>
+          <a:ln/>
+        </p:spPr>
+        <p:txBody>
+          <a:bodyPr wrap="square" lIns="0" tIns="0" rIns="0" bIns="0" rtlCol="0" anchor="ctr"/>
+          <a:lstStyle/>
+          <a:p>
+            <a:pPr indent="0" marL="0">
+              <a:buNone/>
+            </a:pPr>
+            <a:r>
+              <a:rPr lang="en-US" sz="1200" dirty="0">
+                <a:solidFill>
+                  <a:srgbClr val="FFFFFF"/>
+                </a:solidFill>
+                <a:latin typeface="Calibri" pitchFamily="34" charset="0"/>
+                <a:ea typeface="Calibri" pitchFamily="34" charset="-122"/>
+                <a:cs typeface="Calibri" pitchFamily="34" charset="-120"/>
+              </a:rPr>
+              <a:t>The site app installs on a phone, works offline and syncs. There is no App Store build, and we do not claim one.</a:t>
+            </a:r>
+            <a:endParaRPr lang="en-US" sz="1200" dirty="0"/>
+          </a:p>
+        </p:txBody>
+      </p:sp>
+      <p:sp>
+        <p:nvSpPr>
+          <p:cNvPr id="13" name="Text 11"/>
+          <p:cNvSpPr txBox="1"/>
+          <p:nvPr/>
+        </p:nvSpPr>
+        <p:spPr>
+          <a:xfrm>
+            <a:off x="685800" y="5806440"/>
+            <a:ext cx="10789920" cy="365760"/>
+          </a:xfrm>
+          <a:prstGeom prst="rect">
+            <a:avLst/>
+          </a:prstGeom>
+          <a:noFill/>
+          <a:ln/>
+        </p:spPr>
+        <p:txBody>
+          <a:bodyPr wrap="square" lIns="0" tIns="0" rIns="0" bIns="0" rtlCol="0" anchor="ctr"/>
+          <a:lstStyle/>
+          <a:p>
+            <a:pPr indent="0" marL="0">
+              <a:buNone/>
+            </a:pPr>
+            <a:r>
+              <a:rPr lang="en-US" sz="1700" b="1" i="1" dirty="0">
+                <a:solidFill>
+                  <a:srgbClr val="A8B2BD"/>
+                </a:solidFill>
+                <a:latin typeface="Cambria" pitchFamily="34" charset="0"/>
+                <a:ea typeface="Cambria" pitchFamily="34" charset="-122"/>
+                <a:cs typeface="Cambria" pitchFamily="34" charset="-120"/>
+              </a:rPr>
+              <a:t>Anyone who names the limits before you sign will name the problem when it happens.</a:t>
+            </a:r>
+            <a:endParaRPr lang="en-US" sz="1700" dirty="0"/>
+          </a:p>
+        </p:txBody>
+      </p:sp>
+    </p:spTree>
+  </p:cSld>
+  <p:clrMapOvr>
+    <a:masterClrMapping/>
+  </p:clrMapOvr>
+</p:sld>
+</file>
+
+<file path=ppt/slides/slide11.xml><?xml version="1.0" encoding="utf-8"?>
+<p:sld xmlns:a="http://schemas.openxmlformats.org/drawingml/2006/main" xmlns:r="http://schemas.openxmlformats.org/officeDocument/2006/relationships" xmlns:p="http://schemas.openxmlformats.org/presentationml/2006/main">
+  <p:cSld name="Slide 11">
     <p:bg>
       <p:bgPr>
         <a:solidFill>
@@ -1999,7 +2558,7 @@
                 <a:ea typeface="Calibri" pitchFamily="34" charset="-122"/>
                 <a:cs typeface="Calibri" pitchFamily="34" charset="-120"/>
               </a:rPr>
-              <a:t>THREE WAYS TO START</a:t>
+              <a:t>NO FORM, NO DEMO BOOKING, NO SALES PROCESS</a:t>
             </a:r>
             <a:endParaRPr lang="en-US" sz="1100" dirty="0"/>
           </a:p>
@@ -2013,24 +2572,24 @@
         </p:nvSpPr>
         <p:spPr>
           <a:xfrm>
-            <a:off x="685800" y="731520"/>
-            <a:ext cx="10789920" cy="914400"/>
-          </a:xfrm>
-          <a:prstGeom prst="rect">
-            <a:avLst/>
-          </a:prstGeom>
-          <a:noFill/>
-          <a:ln/>
-        </p:spPr>
-        <p:txBody>
-          <a:bodyPr wrap="square" lIns="0" tIns="0" rIns="0" bIns="0" rtlCol="0" anchor="ctr"/>
-          <a:lstStyle/>
-          <a:p>
-            <a:pPr indent="0" marL="0">
-              <a:buNone/>
-            </a:pPr>
-            <a:r>
-              <a:rPr lang="en-US" sz="3800" b="1" dirty="0">
+            <a:off x="685800" y="713232"/>
+            <a:ext cx="10789920" cy="1005840"/>
+          </a:xfrm>
+          <a:prstGeom prst="rect">
+            <a:avLst/>
+          </a:prstGeom>
+          <a:noFill/>
+          <a:ln/>
+        </p:spPr>
+        <p:txBody>
+          <a:bodyPr wrap="square" lIns="0" tIns="0" rIns="0" bIns="0" rtlCol="0" anchor="ctr"/>
+          <a:lstStyle/>
+          <a:p>
+            <a:pPr indent="0" marL="0">
+              <a:buNone/>
+            </a:pPr>
+            <a:r>
+              <a:rPr lang="en-US" sz="4000" b="1" dirty="0">
                 <a:solidFill>
                   <a:srgbClr val="1A1F26"/>
                 </a:solidFill>
@@ -2038,9 +2597,9 @@
                 <a:ea typeface="Cambria" pitchFamily="34" charset="-122"/>
                 <a:cs typeface="Cambria" pitchFamily="34" charset="-120"/>
               </a:rPr>
-              <a:t>See it on a real job, today.</a:t>
-            </a:r>
-            <a:endParaRPr lang="en-US" sz="3800" dirty="0"/>
+              <a:t>Walk a live job before you talk to us.</a:t>
+            </a:r>
+            <a:endParaRPr lang="en-US" sz="4000" dirty="0"/>
           </a:p>
         </p:txBody>
       </p:sp>
@@ -2052,12 +2611,12 @@
         </p:nvSpPr>
         <p:spPr>
           <a:xfrm>
-            <a:off x="685800" y="2468880"/>
-            <a:ext cx="3429000" cy="2011680"/>
+            <a:off x="685800" y="2240280"/>
+            <a:ext cx="3429000" cy="2148840"/>
           </a:xfrm>
           <a:prstGeom prst="roundRect">
             <a:avLst>
-              <a:gd name="adj" fmla="val 3636"/>
+              <a:gd name="adj" fmla="val 3404"/>
             </a:avLst>
           </a:prstGeom>
           <a:solidFill>
@@ -2081,7 +2640,7 @@
         </p:nvSpPr>
         <p:spPr>
           <a:xfrm>
-            <a:off x="978408" y="2724912"/>
+            <a:off x="978408" y="2514600"/>
             <a:ext cx="384048" cy="384048"/>
           </a:xfrm>
           <a:prstGeom prst="ellipse">
@@ -2101,7 +2660,7 @@
         </p:nvSpPr>
         <p:spPr>
           <a:xfrm>
-            <a:off x="978408" y="2724912"/>
+            <a:off x="978408" y="2514600"/>
             <a:ext cx="384048" cy="384048"/>
           </a:xfrm>
           <a:prstGeom prst="rect">
@@ -2140,34 +2699,34 @@
         </p:nvSpPr>
         <p:spPr>
           <a:xfrm>
-            <a:off x="978408" y="3246120"/>
-            <a:ext cx="2843784" cy="365760"/>
-          </a:xfrm>
-          <a:prstGeom prst="rect">
-            <a:avLst/>
-          </a:prstGeom>
-          <a:noFill/>
-          <a:ln/>
-        </p:spPr>
-        <p:txBody>
-          <a:bodyPr wrap="square" lIns="0" tIns="0" rIns="0" bIns="0" rtlCol="0" anchor="ctr"/>
-          <a:lstStyle/>
-          <a:p>
-            <a:pPr indent="0" marL="0">
-              <a:buNone/>
-            </a:pPr>
-            <a:r>
-              <a:rPr lang="en-US" sz="1500" b="1" dirty="0">
+            <a:off x="978408" y="3063240"/>
+            <a:ext cx="2843784" cy="411480"/>
+          </a:xfrm>
+          <a:prstGeom prst="rect">
+            <a:avLst/>
+          </a:prstGeom>
+          <a:noFill/>
+          <a:ln/>
+        </p:spPr>
+        <p:txBody>
+          <a:bodyPr wrap="square" lIns="0" tIns="0" rIns="0" bIns="0" rtlCol="0" anchor="ctr"/>
+          <a:lstStyle/>
+          <a:p>
+            <a:pPr indent="0" marL="0">
+              <a:buNone/>
+            </a:pPr>
+            <a:r>
+              <a:rPr lang="en-US" sz="2100" b="1" dirty="0">
                 <a:solidFill>
                   <a:srgbClr val="1A1F26"/>
                 </a:solidFill>
-                <a:latin typeface="Calibri" pitchFamily="34" charset="0"/>
-                <a:ea typeface="Calibri" pitchFamily="34" charset="-122"/>
-                <a:cs typeface="Calibri" pitchFamily="34" charset="-120"/>
-              </a:rPr>
-              <a:t>Walk the live job</a:t>
-            </a:r>
-            <a:endParaRPr lang="en-US" sz="1500" dirty="0"/>
+                <a:latin typeface="Cambria" pitchFamily="34" charset="0"/>
+                <a:ea typeface="Cambria" pitchFamily="34" charset="-122"/>
+                <a:cs typeface="Cambria" pitchFamily="34" charset="-120"/>
+              </a:rPr>
+              <a:t>See it now</a:t>
+            </a:r>
+            <a:endParaRPr lang="en-US" sz="2100" dirty="0"/>
           </a:p>
         </p:txBody>
       </p:sp>
@@ -2179,8 +2738,8 @@
         </p:nvSpPr>
         <p:spPr>
           <a:xfrm>
-            <a:off x="978408" y="3639312"/>
-            <a:ext cx="2843784" cy="731520"/>
+            <a:off x="978408" y="3538728"/>
+            <a:ext cx="2843784" cy="777240"/>
           </a:xfrm>
           <a:prstGeom prst="rect">
             <a:avLst/>
@@ -2204,7 +2763,7 @@
                 <a:ea typeface="Calibri" pitchFamily="34" charset="-122"/>
                 <a:cs typeface="Calibri" pitchFamily="34" charset="-120"/>
               </a:rPr>
-              <a:t>A real programme, real notices, real money. No signup, no card, no sales qualification step.</a:t>
+              <a:t>A real programme, real notices, real money, in your browser. No signup and no card.</a:t>
             </a:r>
             <a:endParaRPr lang="en-US" sz="1250" dirty="0"/>
           </a:p>
@@ -2218,12 +2777,12 @@
         </p:nvSpPr>
         <p:spPr>
           <a:xfrm>
-            <a:off x="4507992" y="2468880"/>
-            <a:ext cx="3429000" cy="2011680"/>
+            <a:off x="4507992" y="2240280"/>
+            <a:ext cx="3429000" cy="2148840"/>
           </a:xfrm>
           <a:prstGeom prst="roundRect">
             <a:avLst>
-              <a:gd name="adj" fmla="val 3636"/>
+              <a:gd name="adj" fmla="val 3404"/>
             </a:avLst>
           </a:prstGeom>
           <a:solidFill>
@@ -2247,7 +2806,7 @@
         </p:nvSpPr>
         <p:spPr>
           <a:xfrm>
-            <a:off x="4800600" y="2724912"/>
+            <a:off x="4800600" y="2514600"/>
             <a:ext cx="384048" cy="384048"/>
           </a:xfrm>
           <a:prstGeom prst="ellipse">
@@ -2267,7 +2826,7 @@
         </p:nvSpPr>
         <p:spPr>
           <a:xfrm>
-            <a:off x="4800600" y="2724912"/>
+            <a:off x="4800600" y="2514600"/>
             <a:ext cx="384048" cy="384048"/>
           </a:xfrm>
           <a:prstGeom prst="rect">
@@ -2306,34 +2865,34 @@
         </p:nvSpPr>
         <p:spPr>
           <a:xfrm>
-            <a:off x="4800600" y="3246120"/>
-            <a:ext cx="2843784" cy="365760"/>
-          </a:xfrm>
-          <a:prstGeom prst="rect">
-            <a:avLst/>
-          </a:prstGeom>
-          <a:noFill/>
-          <a:ln/>
-        </p:spPr>
-        <p:txBody>
-          <a:bodyPr wrap="square" lIns="0" tIns="0" rIns="0" bIns="0" rtlCol="0" anchor="ctr"/>
-          <a:lstStyle/>
-          <a:p>
-            <a:pPr indent="0" marL="0">
-              <a:buNone/>
-            </a:pPr>
-            <a:r>
-              <a:rPr lang="en-US" sz="1500" b="1" dirty="0">
+            <a:off x="4800600" y="3063240"/>
+            <a:ext cx="2843784" cy="411480"/>
+          </a:xfrm>
+          <a:prstGeom prst="rect">
+            <a:avLst/>
+          </a:prstGeom>
+          <a:noFill/>
+          <a:ln/>
+        </p:spPr>
+        <p:txBody>
+          <a:bodyPr wrap="square" lIns="0" tIns="0" rIns="0" bIns="0" rtlCol="0" anchor="ctr"/>
+          <a:lstStyle/>
+          <a:p>
+            <a:pPr indent="0" marL="0">
+              <a:buNone/>
+            </a:pPr>
+            <a:r>
+              <a:rPr lang="en-US" sz="2100" b="1" dirty="0">
                 <a:solidFill>
                   <a:srgbClr val="1A1F26"/>
                 </a:solidFill>
-                <a:latin typeface="Calibri" pitchFamily="34" charset="0"/>
-                <a:ea typeface="Calibri" pitchFamily="34" charset="-122"/>
-                <a:cs typeface="Calibri" pitchFamily="34" charset="-120"/>
-              </a:rPr>
-              <a:t>Start free</a:t>
-            </a:r>
-            <a:endParaRPr lang="en-US" sz="1500" dirty="0"/>
+                <a:latin typeface="Cambria" pitchFamily="34" charset="0"/>
+                <a:ea typeface="Cambria" pitchFamily="34" charset="-122"/>
+                <a:cs typeface="Cambria" pitchFamily="34" charset="-120"/>
+              </a:rPr>
+              <a:t>Then start free</a:t>
+            </a:r>
+            <a:endParaRPr lang="en-US" sz="2100" dirty="0"/>
           </a:p>
         </p:txBody>
       </p:sp>
@@ -2345,8 +2904,8 @@
         </p:nvSpPr>
         <p:spPr>
           <a:xfrm>
-            <a:off x="4800600" y="3639312"/>
-            <a:ext cx="2843784" cy="731520"/>
+            <a:off x="4800600" y="3538728"/>
+            <a:ext cx="2843784" cy="777240"/>
           </a:xfrm>
           <a:prstGeom prst="rect">
             <a:avLst/>
@@ -2370,7 +2929,7 @@
                 <a:ea typeface="Calibri" pitchFamily="34" charset="-122"/>
                 <a:cs typeface="Calibri" pitchFamily="34" charset="-120"/>
               </a:rPr>
-              <a:t>One seat, a real tenancy, your own project. Upgrade when it has earned it.</a:t>
+              <a:t>One seat, your own tenancy, your own job. Upgrade only when it has earned it.</a:t>
             </a:r>
             <a:endParaRPr lang="en-US" sz="1250" dirty="0"/>
           </a:p>
@@ -2384,12 +2943,12 @@
         </p:nvSpPr>
         <p:spPr>
           <a:xfrm>
-            <a:off x="8330184" y="2468880"/>
-            <a:ext cx="3429000" cy="2011680"/>
+            <a:off x="8330184" y="2240280"/>
+            <a:ext cx="3429000" cy="2148840"/>
           </a:xfrm>
           <a:prstGeom prst="roundRect">
             <a:avLst>
-              <a:gd name="adj" fmla="val 3636"/>
+              <a:gd name="adj" fmla="val 3404"/>
             </a:avLst>
           </a:prstGeom>
           <a:solidFill>
@@ -2413,7 +2972,7 @@
         </p:nvSpPr>
         <p:spPr>
           <a:xfrm>
-            <a:off x="8622792" y="2724912"/>
+            <a:off x="8622792" y="2514600"/>
             <a:ext cx="384048" cy="384048"/>
           </a:xfrm>
           <a:prstGeom prst="ellipse">
@@ -2433,7 +2992,7 @@
         </p:nvSpPr>
         <p:spPr>
           <a:xfrm>
-            <a:off x="8622792" y="2724912"/>
+            <a:off x="8622792" y="2514600"/>
             <a:ext cx="384048" cy="384048"/>
           </a:xfrm>
           <a:prstGeom prst="rect">
@@ -2472,34 +3031,34 @@
         </p:nvSpPr>
         <p:spPr>
           <a:xfrm>
-            <a:off x="8622792" y="3246120"/>
-            <a:ext cx="2843784" cy="365760"/>
-          </a:xfrm>
-          <a:prstGeom prst="rect">
-            <a:avLst/>
-          </a:prstGeom>
-          <a:noFill/>
-          <a:ln/>
-        </p:spPr>
-        <p:txBody>
-          <a:bodyPr wrap="square" lIns="0" tIns="0" rIns="0" bIns="0" rtlCol="0" anchor="ctr"/>
-          <a:lstStyle/>
-          <a:p>
-            <a:pPr indent="0" marL="0">
-              <a:buNone/>
-            </a:pPr>
-            <a:r>
-              <a:rPr lang="en-US" sz="1500" b="1" dirty="0">
+            <a:off x="8622792" y="3063240"/>
+            <a:ext cx="2843784" cy="411480"/>
+          </a:xfrm>
+          <a:prstGeom prst="rect">
+            <a:avLst/>
+          </a:prstGeom>
+          <a:noFill/>
+          <a:ln/>
+        </p:spPr>
+        <p:txBody>
+          <a:bodyPr wrap="square" lIns="0" tIns="0" rIns="0" bIns="0" rtlCol="0" anchor="ctr"/>
+          <a:lstStyle/>
+          <a:p>
+            <a:pPr indent="0" marL="0">
+              <a:buNone/>
+            </a:pPr>
+            <a:r>
+              <a:rPr lang="en-US" sz="2100" b="1" dirty="0">
                 <a:solidFill>
                   <a:srgbClr val="1A1F26"/>
                 </a:solidFill>
-                <a:latin typeface="Calibri" pitchFamily="34" charset="0"/>
-                <a:ea typeface="Calibri" pitchFamily="34" charset="-122"/>
-                <a:cs typeface="Calibri" pitchFamily="34" charset="-120"/>
-              </a:rPr>
-              <a:t>Twenty minutes</a:t>
-            </a:r>
-            <a:endParaRPr lang="en-US" sz="1500" dirty="0"/>
+                <a:latin typeface="Cambria" pitchFamily="34" charset="0"/>
+                <a:ea typeface="Cambria" pitchFamily="34" charset="-122"/>
+                <a:cs typeface="Cambria" pitchFamily="34" charset="-120"/>
+              </a:rPr>
+              <a:t>Call us last</a:t>
+            </a:r>
+            <a:endParaRPr lang="en-US" sz="2100" dirty="0"/>
           </a:p>
         </p:txBody>
       </p:sp>
@@ -2511,8 +3070,8 @@
         </p:nvSpPr>
         <p:spPr>
           <a:xfrm>
-            <a:off x="8622792" y="3639312"/>
-            <a:ext cx="2843784" cy="731520"/>
+            <a:off x="8622792" y="3538728"/>
+            <a:ext cx="2843784" cy="777240"/>
           </a:xfrm>
           <a:prstGeom prst="rect">
             <a:avLst/>
@@ -2536,7 +3095,7 @@
                 <a:ea typeface="Calibri" pitchFamily="34" charset="-122"/>
                 <a:cs typeface="Calibri" pitchFamily="34" charset="-120"/>
               </a:rPr>
-              <a:t>Book a call when you want somebody on it. Not before.</a:t>
+              <a:t>Twenty minutes, once you already know whether you want it.</a:t>
             </a:r>
             <a:endParaRPr lang="en-US" sz="1250" dirty="0"/>
           </a:p>
@@ -2550,12 +3109,12 @@
         </p:nvSpPr>
         <p:spPr>
           <a:xfrm>
-            <a:off x="685800" y="4846320"/>
-            <a:ext cx="10789920" cy="1234440"/>
+            <a:off x="685800" y="4754880"/>
+            <a:ext cx="10789920" cy="1325880"/>
           </a:xfrm>
           <a:prstGeom prst="roundRect">
             <a:avLst>
-              <a:gd name="adj" fmla="val 5926"/>
+              <a:gd name="adj" fmla="val 5517"/>
             </a:avLst>
           </a:prstGeom>
           <a:solidFill>
@@ -2572,24 +3131,24 @@
         </p:nvSpPr>
         <p:spPr>
           <a:xfrm>
-            <a:off x="1143000" y="5120640"/>
-            <a:ext cx="5486400" cy="502920"/>
-          </a:xfrm>
-          <a:prstGeom prst="rect">
-            <a:avLst/>
-          </a:prstGeom>
-          <a:noFill/>
-          <a:ln/>
-        </p:spPr>
-        <p:txBody>
-          <a:bodyPr wrap="square" lIns="0" tIns="0" rIns="0" bIns="0" rtlCol="0" anchor="ctr"/>
-          <a:lstStyle/>
-          <a:p>
-            <a:pPr indent="0" marL="0">
-              <a:buNone/>
-            </a:pPr>
-            <a:r>
-              <a:rPr lang="en-US" sz="2600" b="1" dirty="0">
+            <a:off x="1143000" y="5056632"/>
+            <a:ext cx="5486400" cy="548640"/>
+          </a:xfrm>
+          <a:prstGeom prst="rect">
+            <a:avLst/>
+          </a:prstGeom>
+          <a:noFill/>
+          <a:ln/>
+        </p:spPr>
+        <p:txBody>
+          <a:bodyPr wrap="square" lIns="0" tIns="0" rIns="0" bIns="0" rtlCol="0" anchor="ctr"/>
+          <a:lstStyle/>
+          <a:p>
+            <a:pPr indent="0" marL="0">
+              <a:buNone/>
+            </a:pPr>
+            <a:r>
+              <a:rPr lang="en-US" sz="2800" b="1" dirty="0">
                 <a:solidFill>
                   <a:srgbClr val="F2A81D"/>
                 </a:solidFill>
@@ -2599,7 +3158,7 @@
               </a:rPr>
               <a:t>construxvg.com</a:t>
             </a:r>
-            <a:endParaRPr lang="en-US" sz="2600" dirty="0"/>
+            <a:endParaRPr lang="en-US" sz="2800" dirty="0"/>
           </a:p>
         </p:txBody>
       </p:sp>
@@ -2611,8 +3170,8 @@
         </p:nvSpPr>
         <p:spPr>
           <a:xfrm>
-            <a:off x="6035040" y="5230368"/>
-            <a:ext cx="5394960" cy="457200"/>
+            <a:off x="5852160" y="5193792"/>
+            <a:ext cx="5577840" cy="457200"/>
           </a:xfrm>
           <a:prstGeom prst="rect">
             <a:avLst/>
@@ -2628,7 +3187,7 @@
               <a:buNone/>
             </a:pPr>
             <a:r>
-              <a:rPr lang="en-US" sz="1400" dirty="0">
+              <a:rPr lang="en-US" sz="1500" b="1" dirty="0">
                 <a:solidFill>
                   <a:srgbClr val="FFFFFF"/>
                 </a:solidFill>
@@ -2636,9 +3195,9 @@
                 <a:ea typeface="Calibri" pitchFamily="34" charset="-122"/>
                 <a:cs typeface="Calibri" pitchFamily="34" charset="-120"/>
               </a:rPr>
-              <a:t>One governed record. Concept to the thirtieth year.</a:t>
-            </a:r>
-            <a:endParaRPr lang="en-US" sz="1400" dirty="0"/>
+              <a:t>Stop losing money you have already earned.</a:t>
+            </a:r>
+            <a:endParaRPr lang="en-US" sz="1500" dirty="0"/>
           </a:p>
         </p:txBody>
       </p:sp>
@@ -2707,7 +3266,7 @@
                 <a:ea typeface="Calibri" pitchFamily="34" charset="-122"/>
                 <a:cs typeface="Calibri" pitchFamily="34" charset="-120"/>
               </a:rPr>
-              <a:t>WHERE THE MONEY ACTUALLY GOES</a:t>
+              <a:t>EVERY JOB, EVERY MONTH</a:t>
             </a:r>
             <a:endParaRPr lang="en-US" sz="1100" dirty="0"/>
           </a:p>
@@ -2721,24 +3280,24 @@
         </p:nvSpPr>
         <p:spPr>
           <a:xfrm>
-            <a:off x="685800" y="731520"/>
-            <a:ext cx="10789920" cy="914400"/>
-          </a:xfrm>
-          <a:prstGeom prst="rect">
-            <a:avLst/>
-          </a:prstGeom>
-          <a:noFill/>
-          <a:ln/>
-        </p:spPr>
-        <p:txBody>
-          <a:bodyPr wrap="square" lIns="0" tIns="0" rIns="0" bIns="0" rtlCol="0" anchor="ctr"/>
-          <a:lstStyle/>
-          <a:p>
-            <a:pPr indent="0" marL="0">
-              <a:buNone/>
-            </a:pPr>
-            <a:r>
-              <a:rPr lang="en-US" sz="3800" b="1" dirty="0">
+            <a:off x="685800" y="713232"/>
+            <a:ext cx="10789920" cy="1005840"/>
+          </a:xfrm>
+          <a:prstGeom prst="rect">
+            <a:avLst/>
+          </a:prstGeom>
+          <a:noFill/>
+          <a:ln/>
+        </p:spPr>
+        <p:txBody>
+          <a:bodyPr wrap="square" lIns="0" tIns="0" rIns="0" bIns="0" rtlCol="0" anchor="ctr"/>
+          <a:lstStyle/>
+          <a:p>
+            <a:pPr indent="0" marL="0">
+              <a:buNone/>
+            </a:pPr>
+            <a:r>
+              <a:rPr lang="en-US" sz="4000" b="1" dirty="0">
                 <a:solidFill>
                   <a:srgbClr val="1A1F26"/>
                 </a:solidFill>
@@ -2746,26 +3305,9 @@
                 <a:ea typeface="Cambria" pitchFamily="34" charset="-122"/>
                 <a:cs typeface="Cambria" pitchFamily="34" charset="-120"/>
               </a:rPr>
-              <a:t>Three ways a job loses money</a:t>
-            </a:r>
-            <a:endParaRPr lang="en-US" sz="3800" dirty="0"/>
-          </a:p>
-          <a:p>
-            <a:pPr indent="0" marL="0">
-              <a:buNone/>
-            </a:pPr>
-            <a:r>
-              <a:rPr lang="en-US" sz="3800" b="1" dirty="0">
-                <a:solidFill>
-                  <a:srgbClr val="1A1F26"/>
-                </a:solidFill>
-                <a:latin typeface="Cambria" pitchFamily="34" charset="0"/>
-                <a:ea typeface="Cambria" pitchFamily="34" charset="-122"/>
-                <a:cs typeface="Cambria" pitchFamily="34" charset="-120"/>
-              </a:rPr>
-              <a:t>before anyone notices.</a:t>
-            </a:r>
-            <a:endParaRPr lang="en-US" sz="3800" dirty="0"/>
+              <a:t>Three ways the money walks out.</a:t>
+            </a:r>
+            <a:endParaRPr lang="en-US" sz="4000" dirty="0"/>
           </a:p>
         </p:txBody>
       </p:sp>
@@ -2777,12 +3319,12 @@
         </p:nvSpPr>
         <p:spPr>
           <a:xfrm>
-            <a:off x="685800" y="2697480"/>
-            <a:ext cx="3429000" cy="2286000"/>
+            <a:off x="685800" y="2331720"/>
+            <a:ext cx="3429000" cy="2331720"/>
           </a:xfrm>
           <a:prstGeom prst="roundRect">
             <a:avLst>
-              <a:gd name="adj" fmla="val 3200"/>
+              <a:gd name="adj" fmla="val 3137"/>
             </a:avLst>
           </a:prstGeom>
           <a:solidFill>
@@ -2806,7 +3348,7 @@
         </p:nvSpPr>
         <p:spPr>
           <a:xfrm>
-            <a:off x="978408" y="2944368"/>
+            <a:off x="978408" y="2606040"/>
             <a:ext cx="384048" cy="384048"/>
           </a:xfrm>
           <a:prstGeom prst="ellipse">
@@ -2826,7 +3368,7 @@
         </p:nvSpPr>
         <p:spPr>
           <a:xfrm>
-            <a:off x="978408" y="2944368"/>
+            <a:off x="978408" y="2606040"/>
             <a:ext cx="384048" cy="384048"/>
           </a:xfrm>
           <a:prstGeom prst="rect">
@@ -2865,34 +3407,34 @@
         </p:nvSpPr>
         <p:spPr>
           <a:xfrm>
-            <a:off x="978408" y="3474720"/>
-            <a:ext cx="2843784" cy="685800"/>
-          </a:xfrm>
-          <a:prstGeom prst="rect">
-            <a:avLst/>
-          </a:prstGeom>
-          <a:noFill/>
-          <a:ln/>
-        </p:spPr>
-        <p:txBody>
-          <a:bodyPr wrap="square" lIns="0" tIns="0" rIns="0" bIns="0" rtlCol="0" anchor="ctr"/>
-          <a:lstStyle/>
-          <a:p>
-            <a:pPr indent="0" marL="0">
-              <a:buNone/>
-            </a:pPr>
-            <a:r>
-              <a:rPr lang="en-US" sz="1500" b="1" dirty="0">
+            <a:off x="978408" y="3154680"/>
+            <a:ext cx="2843784" cy="457200"/>
+          </a:xfrm>
+          <a:prstGeom prst="rect">
+            <a:avLst/>
+          </a:prstGeom>
+          <a:noFill/>
+          <a:ln/>
+        </p:spPr>
+        <p:txBody>
+          <a:bodyPr wrap="square" lIns="0" tIns="0" rIns="0" bIns="0" rtlCol="0" anchor="ctr"/>
+          <a:lstStyle/>
+          <a:p>
+            <a:pPr indent="0" marL="0">
+              <a:buNone/>
+            </a:pPr>
+            <a:r>
+              <a:rPr lang="en-US" sz="2100" b="1" dirty="0">
                 <a:solidFill>
                   <a:srgbClr val="1A1F26"/>
                 </a:solidFill>
-                <a:latin typeface="Calibri" pitchFamily="34" charset="0"/>
-                <a:ea typeface="Calibri" pitchFamily="34" charset="-122"/>
-                <a:cs typeface="Calibri" pitchFamily="34" charset="-120"/>
-              </a:rPr>
-              <a:t>A missed pay less notice</a:t>
-            </a:r>
-            <a:endParaRPr lang="en-US" sz="1500" dirty="0"/>
+                <a:latin typeface="Cambria" pitchFamily="34" charset="0"/>
+                <a:ea typeface="Cambria" pitchFamily="34" charset="-122"/>
+                <a:cs typeface="Cambria" pitchFamily="34" charset="-120"/>
+              </a:rPr>
+              <a:t>Miss the notice</a:t>
+            </a:r>
+            <a:endParaRPr lang="en-US" sz="2100" dirty="0"/>
           </a:p>
         </p:txBody>
       </p:sp>
@@ -2904,24 +3446,24 @@
         </p:nvSpPr>
         <p:spPr>
           <a:xfrm>
-            <a:off x="978408" y="4160520"/>
-            <a:ext cx="2843784" cy="731520"/>
-          </a:xfrm>
-          <a:prstGeom prst="rect">
-            <a:avLst/>
-          </a:prstGeom>
-          <a:noFill/>
-          <a:ln/>
-        </p:spPr>
-        <p:txBody>
-          <a:bodyPr wrap="square" lIns="0" tIns="0" rIns="0" bIns="0" rtlCol="0" anchor="ctr"/>
-          <a:lstStyle/>
-          <a:p>
-            <a:pPr indent="0" marL="0">
-              <a:buNone/>
-            </a:pPr>
-            <a:r>
-              <a:rPr lang="en-US" sz="1250" dirty="0">
+            <a:off x="978408" y="3675888"/>
+            <a:ext cx="2843784" cy="914400"/>
+          </a:xfrm>
+          <a:prstGeom prst="rect">
+            <a:avLst/>
+          </a:prstGeom>
+          <a:noFill/>
+          <a:ln/>
+        </p:spPr>
+        <p:txBody>
+          <a:bodyPr wrap="square" lIns="0" tIns="0" rIns="0" bIns="0" rtlCol="0" anchor="ctr"/>
+          <a:lstStyle/>
+          <a:p>
+            <a:pPr indent="0" marL="0">
+              <a:buNone/>
+            </a:pPr>
+            <a:r>
+              <a:rPr lang="en-US" sz="1300" dirty="0">
                 <a:solidFill>
                   <a:srgbClr val="5A6572"/>
                 </a:solidFill>
@@ -2929,9 +3471,9 @@
                 <a:ea typeface="Calibri" pitchFamily="34" charset="-122"/>
                 <a:cs typeface="Calibri" pitchFamily="34" charset="-120"/>
               </a:rPr>
-              <a:t>Miss the window and the application becomes payable in full. Not disputed. Payable.</a:t>
-            </a:r>
-            <a:endParaRPr lang="en-US" sz="1250" dirty="0"/>
+              <a:t>Miss the pay less window and the application is payable in full. Not argued. Payable.</a:t>
+            </a:r>
+            <a:endParaRPr lang="en-US" sz="1300" dirty="0"/>
           </a:p>
         </p:txBody>
       </p:sp>
@@ -2943,12 +3485,12 @@
         </p:nvSpPr>
         <p:spPr>
           <a:xfrm>
-            <a:off x="4507992" y="2697480"/>
-            <a:ext cx="3429000" cy="2286000"/>
+            <a:off x="4507992" y="2331720"/>
+            <a:ext cx="3429000" cy="2331720"/>
           </a:xfrm>
           <a:prstGeom prst="roundRect">
             <a:avLst>
-              <a:gd name="adj" fmla="val 3200"/>
+              <a:gd name="adj" fmla="val 3137"/>
             </a:avLst>
           </a:prstGeom>
           <a:solidFill>
@@ -2972,7 +3514,7 @@
         </p:nvSpPr>
         <p:spPr>
           <a:xfrm>
-            <a:off x="4800600" y="2944368"/>
+            <a:off x="4800600" y="2606040"/>
             <a:ext cx="384048" cy="384048"/>
           </a:xfrm>
           <a:prstGeom prst="ellipse">
@@ -2992,7 +3534,7 @@
         </p:nvSpPr>
         <p:spPr>
           <a:xfrm>
-            <a:off x="4800600" y="2944368"/>
+            <a:off x="4800600" y="2606040"/>
             <a:ext cx="384048" cy="384048"/>
           </a:xfrm>
           <a:prstGeom prst="rect">
@@ -3031,34 +3573,34 @@
         </p:nvSpPr>
         <p:spPr>
           <a:xfrm>
-            <a:off x="4800600" y="3474720"/>
-            <a:ext cx="2843784" cy="685800"/>
-          </a:xfrm>
-          <a:prstGeom prst="rect">
-            <a:avLst/>
-          </a:prstGeom>
-          <a:noFill/>
-          <a:ln/>
-        </p:spPr>
-        <p:txBody>
-          <a:bodyPr wrap="square" lIns="0" tIns="0" rIns="0" bIns="0" rtlCol="0" anchor="ctr"/>
-          <a:lstStyle/>
-          <a:p>
-            <a:pPr indent="0" marL="0">
-              <a:buNone/>
-            </a:pPr>
-            <a:r>
-              <a:rPr lang="en-US" sz="1500" b="1" dirty="0">
+            <a:off x="4800600" y="3154680"/>
+            <a:ext cx="2843784" cy="457200"/>
+          </a:xfrm>
+          <a:prstGeom prst="rect">
+            <a:avLst/>
+          </a:prstGeom>
+          <a:noFill/>
+          <a:ln/>
+        </p:spPr>
+        <p:txBody>
+          <a:bodyPr wrap="square" lIns="0" tIns="0" rIns="0" bIns="0" rtlCol="0" anchor="ctr"/>
+          <a:lstStyle/>
+          <a:p>
+            <a:pPr indent="0" marL="0">
+              <a:buNone/>
+            </a:pPr>
+            <a:r>
+              <a:rPr lang="en-US" sz="2100" b="1" dirty="0">
                 <a:solidFill>
                   <a:srgbClr val="1A1F26"/>
                 </a:solidFill>
-                <a:latin typeface="Calibri" pitchFamily="34" charset="0"/>
-                <a:ea typeface="Calibri" pitchFamily="34" charset="-122"/>
-                <a:cs typeface="Calibri" pitchFamily="34" charset="-120"/>
-              </a:rPr>
-              <a:t>An extension you cannot substantiate</a:t>
-            </a:r>
-            <a:endParaRPr lang="en-US" sz="1500" dirty="0"/>
+                <a:latin typeface="Cambria" pitchFamily="34" charset="0"/>
+                <a:ea typeface="Cambria" pitchFamily="34" charset="-122"/>
+                <a:cs typeface="Cambria" pitchFamily="34" charset="-120"/>
+              </a:rPr>
+              <a:t>Lose the claim</a:t>
+            </a:r>
+            <a:endParaRPr lang="en-US" sz="2100" dirty="0"/>
           </a:p>
         </p:txBody>
       </p:sp>
@@ -3070,24 +3612,24 @@
         </p:nvSpPr>
         <p:spPr>
           <a:xfrm>
-            <a:off x="4800600" y="4160520"/>
-            <a:ext cx="2843784" cy="731520"/>
-          </a:xfrm>
-          <a:prstGeom prst="rect">
-            <a:avLst/>
-          </a:prstGeom>
-          <a:noFill/>
-          <a:ln/>
-        </p:spPr>
-        <p:txBody>
-          <a:bodyPr wrap="square" lIns="0" tIns="0" rIns="0" bIns="0" rtlCol="0" anchor="ctr"/>
-          <a:lstStyle/>
-          <a:p>
-            <a:pPr indent="0" marL="0">
-              <a:buNone/>
-            </a:pPr>
-            <a:r>
-              <a:rPr lang="en-US" sz="1250" dirty="0">
+            <a:off x="4800600" y="3675888"/>
+            <a:ext cx="2843784" cy="914400"/>
+          </a:xfrm>
+          <a:prstGeom prst="rect">
+            <a:avLst/>
+          </a:prstGeom>
+          <a:noFill/>
+          <a:ln/>
+        </p:spPr>
+        <p:txBody>
+          <a:bodyPr wrap="square" lIns="0" tIns="0" rIns="0" bIns="0" rtlCol="0" anchor="ctr"/>
+          <a:lstStyle/>
+          <a:p>
+            <a:pPr indent="0" marL="0">
+              <a:buNone/>
+            </a:pPr>
+            <a:r>
+              <a:rPr lang="en-US" sz="1300" dirty="0">
                 <a:solidFill>
                   <a:srgbClr val="5A6572"/>
                 </a:solidFill>
@@ -3095,9 +3637,9 @@
                 <a:ea typeface="Calibri" pitchFamily="34" charset="-122"/>
                 <a:cs typeface="Calibri" pitchFamily="34" charset="-120"/>
               </a:rPr>
-              <a:t>Entitlement you cannot evidence on the day is entitlement you do not get.</a:t>
-            </a:r>
-            <a:endParaRPr lang="en-US" sz="1250" dirty="0"/>
+              <a:t>Delay you cannot evidence on the day is delay you absorb. Nobody pays for it later.</a:t>
+            </a:r>
+            <a:endParaRPr lang="en-US" sz="1300" dirty="0"/>
           </a:p>
         </p:txBody>
       </p:sp>
@@ -3109,12 +3651,12 @@
         </p:nvSpPr>
         <p:spPr>
           <a:xfrm>
-            <a:off x="8330184" y="2697480"/>
-            <a:ext cx="3429000" cy="2286000"/>
+            <a:off x="8330184" y="2331720"/>
+            <a:ext cx="3429000" cy="2331720"/>
           </a:xfrm>
           <a:prstGeom prst="roundRect">
             <a:avLst>
-              <a:gd name="adj" fmla="val 3200"/>
+              <a:gd name="adj" fmla="val 3137"/>
             </a:avLst>
           </a:prstGeom>
           <a:solidFill>
@@ -3138,7 +3680,7 @@
         </p:nvSpPr>
         <p:spPr>
           <a:xfrm>
-            <a:off x="8622792" y="2944368"/>
+            <a:off x="8622792" y="2606040"/>
             <a:ext cx="384048" cy="384048"/>
           </a:xfrm>
           <a:prstGeom prst="ellipse">
@@ -3158,7 +3700,7 @@
         </p:nvSpPr>
         <p:spPr>
           <a:xfrm>
-            <a:off x="8622792" y="2944368"/>
+            <a:off x="8622792" y="2606040"/>
             <a:ext cx="384048" cy="384048"/>
           </a:xfrm>
           <a:prstGeom prst="rect">
@@ -3197,102 +3739,24 @@
         </p:nvSpPr>
         <p:spPr>
           <a:xfrm>
-            <a:off x="8622792" y="3474720"/>
-            <a:ext cx="2843784" cy="685800"/>
-          </a:xfrm>
-          <a:prstGeom prst="rect">
-            <a:avLst/>
-          </a:prstGeom>
-          <a:noFill/>
-          <a:ln/>
-        </p:spPr>
-        <p:txBody>
-          <a:bodyPr wrap="square" lIns="0" tIns="0" rIns="0" bIns="0" rtlCol="0" anchor="ctr"/>
-          <a:lstStyle/>
-          <a:p>
-            <a:pPr indent="0" marL="0">
-              <a:buNone/>
-            </a:pPr>
-            <a:r>
-              <a:rPr lang="en-US" sz="1500" b="1" dirty="0">
-                <a:solidFill>
-                  <a:srgbClr val="1A1F26"/>
-                </a:solidFill>
-                <a:latin typeface="Calibri" pitchFamily="34" charset="0"/>
-                <a:ea typeface="Calibri" pitchFamily="34" charset="-122"/>
-                <a:cs typeface="Calibri" pitchFamily="34" charset="-120"/>
-              </a:rPr>
-              <a:t>The four-week lag</a:t>
-            </a:r>
-            <a:endParaRPr lang="en-US" sz="1500" dirty="0"/>
-          </a:p>
-        </p:txBody>
-      </p:sp>
-      <p:sp>
-        <p:nvSpPr>
-          <p:cNvPr id="18" name="Text 16"/>
-          <p:cNvSpPr txBox="1"/>
-          <p:nvPr/>
-        </p:nvSpPr>
-        <p:spPr>
-          <a:xfrm>
-            <a:off x="8622792" y="4160520"/>
-            <a:ext cx="2843784" cy="731520"/>
-          </a:xfrm>
-          <a:prstGeom prst="rect">
-            <a:avLst/>
-          </a:prstGeom>
-          <a:noFill/>
-          <a:ln/>
-        </p:spPr>
-        <p:txBody>
-          <a:bodyPr wrap="square" lIns="0" tIns="0" rIns="0" bIns="0" rtlCol="0" anchor="ctr"/>
-          <a:lstStyle/>
-          <a:p>
-            <a:pPr indent="0" marL="0">
-              <a:buNone/>
-            </a:pPr>
-            <a:r>
-              <a:rPr lang="en-US" sz="1250" dirty="0">
-                <a:solidFill>
-                  <a:srgbClr val="5A6572"/>
-                </a:solidFill>
-                <a:latin typeface="Calibri" pitchFamily="34" charset="0"/>
-                <a:ea typeface="Calibri" pitchFamily="34" charset="-122"/>
-                <a:cs typeface="Calibri" pitchFamily="34" charset="-120"/>
-              </a:rPr>
-              <a:t>Margin erodes between the thing happening and the review that finds it.</a:t>
-            </a:r>
-            <a:endParaRPr lang="en-US" sz="1250" dirty="0"/>
-          </a:p>
-        </p:txBody>
-      </p:sp>
-      <p:sp>
-        <p:nvSpPr>
-          <p:cNvPr id="19" name="Text 17"/>
-          <p:cNvSpPr txBox="1"/>
-          <p:nvPr/>
-        </p:nvSpPr>
-        <p:spPr>
-          <a:xfrm>
-            <a:off x="685800" y="5349240"/>
-            <a:ext cx="10789920" cy="411480"/>
-          </a:xfrm>
-          <a:prstGeom prst="rect">
-            <a:avLst/>
-          </a:prstGeom>
-          <a:noFill/>
-          <a:ln/>
-        </p:spPr>
-        <p:txBody>
-          <a:bodyPr wrap="square" lIns="0" tIns="0" rIns="0" bIns="0" rtlCol="0" anchor="ctr"/>
-          <a:lstStyle/>
-          <a:p>
-            <a:pPr indent="0" marL="0">
-              <a:buNone/>
-            </a:pPr>
-            <a:r>
-              <a:rPr lang="en-US" sz="1800" b="1" i="1" dirty="0">
+            <a:off x="8622792" y="3154680"/>
+            <a:ext cx="2843784" cy="457200"/>
+          </a:xfrm>
+          <a:prstGeom prst="rect">
+            <a:avLst/>
+          </a:prstGeom>
+          <a:noFill/>
+          <a:ln/>
+        </p:spPr>
+        <p:txBody>
+          <a:bodyPr wrap="square" lIns="0" tIns="0" rIns="0" bIns="0" rtlCol="0" anchor="ctr"/>
+          <a:lstStyle/>
+          <a:p>
+            <a:pPr indent="0" marL="0">
+              <a:buNone/>
+            </a:pPr>
+            <a:r>
+              <a:rPr lang="en-US" sz="2100" b="1" dirty="0">
                 <a:solidFill>
                   <a:srgbClr val="1A1F26"/>
                 </a:solidFill>
@@ -3300,9 +3764,109 @@
                 <a:ea typeface="Cambria" pitchFamily="34" charset="-122"/>
                 <a:cs typeface="Cambria" pitchFamily="34" charset="-120"/>
               </a:rPr>
-              <a:t>CONSTRUX computes all three on the day they happen, not at the month end.</a:t>
-            </a:r>
-            <a:endParaRPr lang="en-US" sz="1800" dirty="0"/>
+              <a:t>Find out late</a:t>
+            </a:r>
+            <a:endParaRPr lang="en-US" sz="2100" dirty="0"/>
+          </a:p>
+        </p:txBody>
+      </p:sp>
+      <p:sp>
+        <p:nvSpPr>
+          <p:cNvPr id="18" name="Text 16"/>
+          <p:cNvSpPr txBox="1"/>
+          <p:nvPr/>
+        </p:nvSpPr>
+        <p:spPr>
+          <a:xfrm>
+            <a:off x="8622792" y="3675888"/>
+            <a:ext cx="2843784" cy="914400"/>
+          </a:xfrm>
+          <a:prstGeom prst="rect">
+            <a:avLst/>
+          </a:prstGeom>
+          <a:noFill/>
+          <a:ln/>
+        </p:spPr>
+        <p:txBody>
+          <a:bodyPr wrap="square" lIns="0" tIns="0" rIns="0" bIns="0" rtlCol="0" anchor="ctr"/>
+          <a:lstStyle/>
+          <a:p>
+            <a:pPr indent="0" marL="0">
+              <a:buNone/>
+            </a:pPr>
+            <a:r>
+              <a:rPr lang="en-US" sz="1300" dirty="0">
+                <a:solidFill>
+                  <a:srgbClr val="5A6572"/>
+                </a:solidFill>
+                <a:latin typeface="Calibri" pitchFamily="34" charset="0"/>
+                <a:ea typeface="Calibri" pitchFamily="34" charset="-122"/>
+                <a:cs typeface="Calibri" pitchFamily="34" charset="-120"/>
+              </a:rPr>
+              <a:t>Four weeks between the event and the review. The margin is gone before the meeting.</a:t>
+            </a:r>
+            <a:endParaRPr lang="en-US" sz="1300" dirty="0"/>
+          </a:p>
+        </p:txBody>
+      </p:sp>
+      <p:sp>
+        <p:nvSpPr>
+          <p:cNvPr id="19" name="Shape 17"/>
+          <p:cNvSpPr/>
+          <p:nvPr/>
+        </p:nvSpPr>
+        <p:spPr>
+          <a:xfrm>
+            <a:off x="685800" y="5029200"/>
+            <a:ext cx="10789920" cy="1005840"/>
+          </a:xfrm>
+          <a:prstGeom prst="roundRect">
+            <a:avLst>
+              <a:gd name="adj" fmla="val 7273"/>
+            </a:avLst>
+          </a:prstGeom>
+          <a:solidFill>
+            <a:srgbClr val="1A1F26"/>
+          </a:solidFill>
+          <a:ln/>
+        </p:spPr>
+      </p:sp>
+      <p:sp>
+        <p:nvSpPr>
+          <p:cNvPr id="20" name="Text 18"/>
+          <p:cNvSpPr txBox="1"/>
+          <p:nvPr/>
+        </p:nvSpPr>
+        <p:spPr>
+          <a:xfrm>
+            <a:off x="1143000" y="5285232"/>
+            <a:ext cx="9875520" cy="502920"/>
+          </a:xfrm>
+          <a:prstGeom prst="rect">
+            <a:avLst/>
+          </a:prstGeom>
+          <a:noFill/>
+          <a:ln/>
+        </p:spPr>
+        <p:txBody>
+          <a:bodyPr wrap="square" lIns="0" tIns="0" rIns="0" bIns="0" rtlCol="0" anchor="ctr"/>
+          <a:lstStyle/>
+          <a:p>
+            <a:pPr indent="0" marL="0">
+              <a:buNone/>
+            </a:pPr>
+            <a:r>
+              <a:rPr lang="en-US" sz="2000" b="1" dirty="0">
+                <a:solidFill>
+                  <a:srgbClr val="FFFFFF"/>
+                </a:solidFill>
+                <a:latin typeface="Cambria" pitchFamily="34" charset="0"/>
+                <a:ea typeface="Cambria" pitchFamily="34" charset="-122"/>
+                <a:cs typeface="Cambria" pitchFamily="34" charset="-120"/>
+              </a:rPr>
+              <a:t>These are not software problems. They are counting problems.</a:t>
+            </a:r>
+            <a:endParaRPr lang="en-US" sz="2000" dirty="0"/>
           </a:p>
         </p:txBody>
       </p:sp>
@@ -3371,7 +3935,7 @@
                 <a:ea typeface="Calibri" pitchFamily="34" charset="-122"/>
                 <a:cs typeface="Calibri" pitchFamily="34" charset="-120"/>
               </a:rPr>
-              <a:t>HGCRA 1996 · S.111</a:t>
+              <a:t>ONE APPLICATION. ONE NOTICE. ONE DAY.</a:t>
             </a:r>
             <a:endParaRPr lang="en-US" sz="1100" dirty="0"/>
           </a:p>
@@ -3385,51 +3949,152 @@
         </p:nvSpPr>
         <p:spPr>
           <a:xfrm>
-            <a:off x="685800" y="731520"/>
-            <a:ext cx="10789920" cy="914400"/>
-          </a:xfrm>
-          <a:prstGeom prst="rect">
-            <a:avLst/>
-          </a:prstGeom>
-          <a:noFill/>
-          <a:ln/>
-        </p:spPr>
-        <p:txBody>
-          <a:bodyPr wrap="square" lIns="0" tIns="0" rIns="0" bIns="0" rtlCol="0" anchor="ctr"/>
-          <a:lstStyle/>
-          <a:p>
-            <a:pPr indent="0" marL="0">
-              <a:buNone/>
-            </a:pPr>
-            <a:r>
-              <a:rPr lang="en-US" sz="3800" b="1" dirty="0">
-                <a:solidFill>
-                  <a:srgbClr val="FFFFFF"/>
+            <a:off x="685800" y="1051560"/>
+            <a:ext cx="6766560" cy="1737360"/>
+          </a:xfrm>
+          <a:prstGeom prst="rect">
+            <a:avLst/>
+          </a:prstGeom>
+          <a:noFill/>
+          <a:ln/>
+        </p:spPr>
+        <p:txBody>
+          <a:bodyPr wrap="square" lIns="0" tIns="0" rIns="0" bIns="0" rtlCol="0" anchor="ctr"/>
+          <a:lstStyle/>
+          <a:p>
+            <a:pPr indent="0" marL="0">
+              <a:buNone/>
+            </a:pPr>
+            <a:r>
+              <a:rPr lang="en-US" sz="9000" b="1" dirty="0">
+                <a:solidFill>
+                  <a:srgbClr val="F2A81D"/>
                 </a:solidFill>
                 <a:latin typeface="Cambria" pitchFamily="34" charset="0"/>
                 <a:ea typeface="Cambria" pitchFamily="34" charset="-122"/>
                 <a:cs typeface="Cambria" pitchFamily="34" charset="-120"/>
               </a:rPr>
-              <a:t>The notice nobody was counting.</a:t>
-            </a:r>
-            <a:endParaRPr lang="en-US" sz="3800" dirty="0"/>
-          </a:p>
-        </p:txBody>
-      </p:sp>
-      <p:sp>
-        <p:nvSpPr>
-          <p:cNvPr id="4" name="Shape 2"/>
+              <a:t>£119,650</a:t>
+            </a:r>
+            <a:endParaRPr lang="en-US" sz="9000" dirty="0"/>
+          </a:p>
+        </p:txBody>
+      </p:sp>
+      <p:sp>
+        <p:nvSpPr>
+          <p:cNvPr id="4" name="Text 2"/>
+          <p:cNvSpPr txBox="1"/>
+          <p:nvPr/>
+        </p:nvSpPr>
+        <p:spPr>
+          <a:xfrm>
+            <a:off x="685800" y="2834640"/>
+            <a:ext cx="6400800" cy="1097280"/>
+          </a:xfrm>
+          <a:prstGeom prst="rect">
+            <a:avLst/>
+          </a:prstGeom>
+          <a:noFill/>
+          <a:ln/>
+        </p:spPr>
+        <p:txBody>
+          <a:bodyPr wrap="square" lIns="0" tIns="0" rIns="0" bIns="0" rtlCol="0" anchor="ctr"/>
+          <a:lstStyle/>
+          <a:p>
+            <a:pPr indent="0" marL="0">
+              <a:lnSpc>
+                <a:spcPts val="3000"/>
+              </a:lnSpc>
+              <a:buNone/>
+            </a:pPr>
+            <a:r>
+              <a:rPr lang="en-US" sz="2200" b="1" dirty="0">
+                <a:solidFill>
+                  <a:srgbClr val="FFFFFF"/>
+                </a:solidFill>
+                <a:latin typeface="Cambria" pitchFamily="34" charset="0"/>
+                <a:ea typeface="Cambria" pitchFamily="34" charset="-122"/>
+                <a:cs typeface="Cambria" pitchFamily="34" charset="-120"/>
+              </a:rPr>
+              <a:t>protected on a single valuation,</a:t>
+            </a:r>
+            <a:endParaRPr lang="en-US" sz="2200" dirty="0"/>
+          </a:p>
+          <a:p>
+            <a:pPr indent="0" marL="0">
+              <a:lnSpc>
+                <a:spcPts val="3000"/>
+              </a:lnSpc>
+              <a:buNone/>
+            </a:pPr>
+            <a:r>
+              <a:rPr lang="en-US" sz="2200" b="1" dirty="0">
+                <a:solidFill>
+                  <a:srgbClr val="FFFFFF"/>
+                </a:solidFill>
+                <a:latin typeface="Cambria" pitchFamily="34" charset="0"/>
+                <a:ea typeface="Cambria" pitchFamily="34" charset="-122"/>
+                <a:cs typeface="Cambria" pitchFamily="34" charset="-120"/>
+              </a:rPr>
+              <a:t>because something was counting the window.</a:t>
+            </a:r>
+            <a:endParaRPr lang="en-US" sz="2200" dirty="0"/>
+          </a:p>
+        </p:txBody>
+      </p:sp>
+      <p:sp>
+        <p:nvSpPr>
+          <p:cNvPr id="5" name="Text 3"/>
+          <p:cNvSpPr txBox="1"/>
+          <p:nvPr/>
+        </p:nvSpPr>
+        <p:spPr>
+          <a:xfrm>
+            <a:off x="685800" y="4114800"/>
+            <a:ext cx="6400800" cy="1371600"/>
+          </a:xfrm>
+          <a:prstGeom prst="rect">
+            <a:avLst/>
+          </a:prstGeom>
+          <a:noFill/>
+          <a:ln/>
+        </p:spPr>
+        <p:txBody>
+          <a:bodyPr wrap="square" lIns="0" tIns="0" rIns="0" bIns="0" rtlCol="0" anchor="ctr"/>
+          <a:lstStyle/>
+          <a:p>
+            <a:pPr indent="0" marL="0">
+              <a:buNone/>
+            </a:pPr>
+            <a:r>
+              <a:rPr lang="en-US" sz="1400" dirty="0">
+                <a:solidFill>
+                  <a:srgbClr val="A8B2BD"/>
+                </a:solidFill>
+                <a:latin typeface="Calibri" pitchFamily="34" charset="0"/>
+                <a:ea typeface="Calibri" pitchFamily="34" charset="-122"/>
+                <a:cs typeface="Calibri" pitchFamily="34" charset="-120"/>
+              </a:rPr>
+              <a:t>Handrail terminations not to detail. Dewatering rates not agreed. Both were already on the record from site — so the platform priced the withholding, drafted the notice and served it inside the window, on the day.</a:t>
+            </a:r>
+            <a:endParaRPr lang="en-US" sz="1400" dirty="0"/>
+          </a:p>
+        </p:txBody>
+      </p:sp>
+      <p:sp>
+        <p:nvSpPr>
+          <p:cNvPr id="6" name="Shape 4"/>
           <p:cNvSpPr/>
           <p:nvPr/>
         </p:nvSpPr>
         <p:spPr>
           <a:xfrm>
-            <a:off x="685800" y="2011680"/>
-            <a:ext cx="5577840" cy="3200400"/>
+            <a:off x="7635240" y="1188720"/>
+            <a:ext cx="3840480" cy="4206240"/>
           </a:xfrm>
           <a:prstGeom prst="roundRect">
             <a:avLst>
-              <a:gd name="adj" fmla="val 2286"/>
+              <a:gd name="adj" fmla="val 1905"/>
             </a:avLst>
           </a:prstGeom>
           <a:solidFill>
@@ -3447,30 +4112,30 @@
       </p:sp>
       <p:sp>
         <p:nvSpPr>
-          <p:cNvPr id="5" name="Text 3"/>
-          <p:cNvSpPr txBox="1"/>
-          <p:nvPr/>
-        </p:nvSpPr>
-        <p:spPr>
-          <a:xfrm>
-            <a:off x="1051560" y="2331720"/>
-            <a:ext cx="3017520" cy="411480"/>
-          </a:xfrm>
-          <a:prstGeom prst="rect">
-            <a:avLst/>
-          </a:prstGeom>
-          <a:noFill/>
-          <a:ln/>
-        </p:spPr>
-        <p:txBody>
-          <a:bodyPr wrap="square" lIns="0" tIns="0" rIns="0" bIns="0" rtlCol="0" anchor="ctr"/>
-          <a:lstStyle/>
-          <a:p>
-            <a:pPr indent="0" marL="0">
-              <a:buNone/>
-            </a:pPr>
-            <a:r>
-              <a:rPr lang="en-US" sz="1300" dirty="0">
+          <p:cNvPr id="7" name="Text 5"/>
+          <p:cNvSpPr txBox="1"/>
+          <p:nvPr/>
+        </p:nvSpPr>
+        <p:spPr>
+          <a:xfrm>
+            <a:off x="7955280" y="1536192"/>
+            <a:ext cx="3200400" cy="274320"/>
+          </a:xfrm>
+          <a:prstGeom prst="rect">
+            <a:avLst/>
+          </a:prstGeom>
+          <a:noFill/>
+          <a:ln/>
+        </p:spPr>
+        <p:txBody>
+          <a:bodyPr wrap="square" lIns="0" tIns="0" rIns="0" bIns="0" rtlCol="0" anchor="ctr"/>
+          <a:lstStyle/>
+          <a:p>
+            <a:pPr indent="0" marL="0">
+              <a:buNone/>
+            </a:pPr>
+            <a:r>
+              <a:rPr lang="en-US" sz="1050" b="1" spc="150" kern="0" dirty="0">
                 <a:solidFill>
                   <a:srgbClr val="A8B2BD"/>
                 </a:solidFill>
@@ -3478,321 +4143,243 @@
                 <a:ea typeface="Calibri" pitchFamily="34" charset="-122"/>
                 <a:cs typeface="Calibri" pitchFamily="34" charset="-120"/>
               </a:rPr>
-              <a:t>Application 3 submitted</a:t>
-            </a:r>
-            <a:endParaRPr lang="en-US" sz="1300" dirty="0"/>
-          </a:p>
-        </p:txBody>
-      </p:sp>
-      <p:sp>
-        <p:nvSpPr>
-          <p:cNvPr id="6" name="Text 4"/>
-          <p:cNvSpPr txBox="1"/>
-          <p:nvPr/>
-        </p:nvSpPr>
-        <p:spPr>
-          <a:xfrm>
-            <a:off x="3977640" y="2286000"/>
-            <a:ext cx="1920240" cy="502920"/>
-          </a:xfrm>
-          <a:prstGeom prst="rect">
-            <a:avLst/>
-          </a:prstGeom>
-          <a:noFill/>
-          <a:ln/>
-        </p:spPr>
-        <p:txBody>
-          <a:bodyPr wrap="square" lIns="0" tIns="0" rIns="0" bIns="0" rtlCol="0" anchor="ctr"/>
-          <a:lstStyle/>
-          <a:p>
-            <a:pPr algn="r" indent="0" marL="0">
-              <a:buNone/>
-            </a:pPr>
-            <a:r>
-              <a:rPr lang="en-US" sz="1900" b="1" dirty="0">
+              <a:t>APPLIED</a:t>
+            </a:r>
+            <a:endParaRPr lang="en-US" sz="1050" dirty="0"/>
+          </a:p>
+        </p:txBody>
+      </p:sp>
+      <p:sp>
+        <p:nvSpPr>
+          <p:cNvPr id="8" name="Text 6"/>
+          <p:cNvSpPr txBox="1"/>
+          <p:nvPr/>
+        </p:nvSpPr>
+        <p:spPr>
+          <a:xfrm>
+            <a:off x="7955280" y="1810512"/>
+            <a:ext cx="3200400" cy="475488"/>
+          </a:xfrm>
+          <a:prstGeom prst="rect">
+            <a:avLst/>
+          </a:prstGeom>
+          <a:noFill/>
+          <a:ln/>
+        </p:spPr>
+        <p:txBody>
+          <a:bodyPr wrap="square" lIns="0" tIns="0" rIns="0" bIns="0" rtlCol="0" anchor="ctr"/>
+          <a:lstStyle/>
+          <a:p>
+            <a:pPr indent="0" marL="0">
+              <a:buNone/>
+            </a:pPr>
+            <a:r>
+              <a:rPr lang="en-US" sz="2400" b="1" dirty="0">
                 <a:solidFill>
                   <a:srgbClr val="A8B2BD"/>
-                </a:solidFill>
-                <a:latin typeface="Calibri" pitchFamily="34" charset="0"/>
-                <a:ea typeface="Calibri" pitchFamily="34" charset="-122"/>
-                <a:cs typeface="Calibri" pitchFamily="34" charset="-120"/>
-              </a:rPr>
-              <a:t>£2,248,650</a:t>
-            </a:r>
-            <a:endParaRPr lang="en-US" sz="1900" dirty="0"/>
-          </a:p>
-        </p:txBody>
-      </p:sp>
-      <p:sp>
-        <p:nvSpPr>
-          <p:cNvPr id="7" name="Text 5"/>
-          <p:cNvSpPr txBox="1"/>
-          <p:nvPr/>
-        </p:nvSpPr>
-        <p:spPr>
-          <a:xfrm>
-            <a:off x="1051560" y="3044952"/>
-            <a:ext cx="3017520" cy="411480"/>
-          </a:xfrm>
-          <a:prstGeom prst="rect">
-            <a:avLst/>
-          </a:prstGeom>
-          <a:noFill/>
-          <a:ln/>
-        </p:spPr>
-        <p:txBody>
-          <a:bodyPr wrap="square" lIns="0" tIns="0" rIns="0" bIns="0" rtlCol="0" anchor="ctr"/>
-          <a:lstStyle/>
-          <a:p>
-            <a:pPr indent="0" marL="0">
-              <a:buNone/>
-            </a:pPr>
-            <a:r>
-              <a:rPr lang="en-US" sz="1300" dirty="0">
-                <a:solidFill>
-                  <a:srgbClr val="A8B2BD"/>
-                </a:solidFill>
-                <a:latin typeface="Calibri" pitchFamily="34" charset="0"/>
-                <a:ea typeface="Calibri" pitchFamily="34" charset="-122"/>
-                <a:cs typeface="Calibri" pitchFamily="34" charset="-120"/>
-              </a:rPr>
-              <a:t>Withheld on the valuation</a:t>
-            </a:r>
-            <a:endParaRPr lang="en-US" sz="1300" dirty="0"/>
-          </a:p>
-        </p:txBody>
-      </p:sp>
-      <p:sp>
-        <p:nvSpPr>
-          <p:cNvPr id="8" name="Text 6"/>
-          <p:cNvSpPr txBox="1"/>
-          <p:nvPr/>
-        </p:nvSpPr>
-        <p:spPr>
-          <a:xfrm>
-            <a:off x="3977640" y="2999232"/>
-            <a:ext cx="1920240" cy="502920"/>
-          </a:xfrm>
-          <a:prstGeom prst="rect">
-            <a:avLst/>
-          </a:prstGeom>
-          <a:noFill/>
-          <a:ln/>
-        </p:spPr>
-        <p:txBody>
-          <a:bodyPr wrap="square" lIns="0" tIns="0" rIns="0" bIns="0" rtlCol="0" anchor="ctr"/>
-          <a:lstStyle/>
-          <a:p>
-            <a:pPr algn="r" indent="0" marL="0">
-              <a:buNone/>
-            </a:pPr>
-            <a:r>
-              <a:rPr lang="en-US" sz="1900" b="1" dirty="0">
-                <a:solidFill>
-                  <a:srgbClr val="F2A81D"/>
-                </a:solidFill>
-                <a:latin typeface="Calibri" pitchFamily="34" charset="0"/>
-                <a:ea typeface="Calibri" pitchFamily="34" charset="-122"/>
-                <a:cs typeface="Calibri" pitchFamily="34" charset="-120"/>
-              </a:rPr>
-              <a:t>−£119,650</a:t>
-            </a:r>
-            <a:endParaRPr lang="en-US" sz="1900" dirty="0"/>
-          </a:p>
-        </p:txBody>
-      </p:sp>
-      <p:sp>
-        <p:nvSpPr>
-          <p:cNvPr id="9" name="Text 7"/>
-          <p:cNvSpPr txBox="1"/>
-          <p:nvPr/>
-        </p:nvSpPr>
-        <p:spPr>
-          <a:xfrm>
-            <a:off x="1051560" y="3758184"/>
-            <a:ext cx="3017520" cy="411480"/>
-          </a:xfrm>
-          <a:prstGeom prst="rect">
-            <a:avLst/>
-          </a:prstGeom>
-          <a:noFill/>
-          <a:ln/>
-        </p:spPr>
-        <p:txBody>
-          <a:bodyPr wrap="square" lIns="0" tIns="0" rIns="0" bIns="0" rtlCol="0" anchor="ctr"/>
-          <a:lstStyle/>
-          <a:p>
-            <a:pPr indent="0" marL="0">
-              <a:buNone/>
-            </a:pPr>
-            <a:r>
-              <a:rPr lang="en-US" sz="1300" dirty="0">
-                <a:solidFill>
-                  <a:srgbClr val="A8B2BD"/>
-                </a:solidFill>
-                <a:latin typeface="Calibri" pitchFamily="34" charset="0"/>
-                <a:ea typeface="Calibri" pitchFamily="34" charset="-122"/>
-                <a:cs typeface="Calibri" pitchFamily="34" charset="-120"/>
-              </a:rPr>
-              <a:t>Pay less notice served</a:t>
-            </a:r>
-            <a:endParaRPr lang="en-US" sz="1300" dirty="0"/>
-          </a:p>
-        </p:txBody>
-      </p:sp>
-      <p:sp>
-        <p:nvSpPr>
-          <p:cNvPr id="10" name="Text 8"/>
-          <p:cNvSpPr txBox="1"/>
-          <p:nvPr/>
-        </p:nvSpPr>
-        <p:spPr>
-          <a:xfrm>
-            <a:off x="3977640" y="3712464"/>
-            <a:ext cx="1920240" cy="502920"/>
-          </a:xfrm>
-          <a:prstGeom prst="rect">
-            <a:avLst/>
-          </a:prstGeom>
-          <a:noFill/>
-          <a:ln/>
-        </p:spPr>
-        <p:txBody>
-          <a:bodyPr wrap="square" lIns="0" tIns="0" rIns="0" bIns="0" rtlCol="0" anchor="ctr"/>
-          <a:lstStyle/>
-          <a:p>
-            <a:pPr algn="r" indent="0" marL="0">
-              <a:buNone/>
-            </a:pPr>
-            <a:r>
-              <a:rPr lang="en-US" sz="1400" b="1" dirty="0">
-                <a:solidFill>
-                  <a:srgbClr val="4FB477"/>
-                </a:solidFill>
-                <a:latin typeface="Calibri" pitchFamily="34" charset="0"/>
-                <a:ea typeface="Calibri" pitchFamily="34" charset="-122"/>
-                <a:cs typeface="Calibri" pitchFamily="34" charset="-120"/>
-              </a:rPr>
-              <a:t>inside the window</a:t>
-            </a:r>
-            <a:endParaRPr lang="en-US" sz="1400" dirty="0"/>
-          </a:p>
-        </p:txBody>
-      </p:sp>
-      <p:sp>
-        <p:nvSpPr>
-          <p:cNvPr id="11" name="Text 9"/>
-          <p:cNvSpPr txBox="1"/>
-          <p:nvPr/>
-        </p:nvSpPr>
-        <p:spPr>
-          <a:xfrm>
-            <a:off x="1051560" y="4471416"/>
-            <a:ext cx="3017520" cy="411480"/>
-          </a:xfrm>
-          <a:prstGeom prst="rect">
-            <a:avLst/>
-          </a:prstGeom>
-          <a:noFill/>
-          <a:ln/>
-        </p:spPr>
-        <p:txBody>
-          <a:bodyPr wrap="square" lIns="0" tIns="0" rIns="0" bIns="0" rtlCol="0" anchor="ctr"/>
-          <a:lstStyle/>
-          <a:p>
-            <a:pPr indent="0" marL="0">
-              <a:buNone/>
-            </a:pPr>
-            <a:r>
-              <a:rPr lang="en-US" sz="1300" dirty="0">
-                <a:solidFill>
-                  <a:srgbClr val="A8B2BD"/>
-                </a:solidFill>
-                <a:latin typeface="Calibri" pitchFamily="34" charset="0"/>
-                <a:ea typeface="Calibri" pitchFamily="34" charset="-122"/>
-                <a:cs typeface="Calibri" pitchFamily="34" charset="-120"/>
-              </a:rPr>
-              <a:t>Notified sum</a:t>
-            </a:r>
-            <a:endParaRPr lang="en-US" sz="1300" dirty="0"/>
-          </a:p>
-        </p:txBody>
-      </p:sp>
-      <p:sp>
-        <p:nvSpPr>
-          <p:cNvPr id="12" name="Text 10"/>
-          <p:cNvSpPr txBox="1"/>
-          <p:nvPr/>
-        </p:nvSpPr>
-        <p:spPr>
-          <a:xfrm>
-            <a:off x="3977640" y="4425696"/>
-            <a:ext cx="1920240" cy="502920"/>
-          </a:xfrm>
-          <a:prstGeom prst="rect">
-            <a:avLst/>
-          </a:prstGeom>
-          <a:noFill/>
-          <a:ln/>
-        </p:spPr>
-        <p:txBody>
-          <a:bodyPr wrap="square" lIns="0" tIns="0" rIns="0" bIns="0" rtlCol="0" anchor="ctr"/>
-          <a:lstStyle/>
-          <a:p>
-            <a:pPr algn="r" indent="0" marL="0">
-              <a:buNone/>
-            </a:pPr>
-            <a:r>
-              <a:rPr lang="en-US" sz="1900" b="1" dirty="0">
-                <a:solidFill>
-                  <a:srgbClr val="FFFFFF"/>
-                </a:solidFill>
-                <a:latin typeface="Calibri" pitchFamily="34" charset="0"/>
-                <a:ea typeface="Calibri" pitchFamily="34" charset="-122"/>
-                <a:cs typeface="Calibri" pitchFamily="34" charset="-120"/>
-              </a:rPr>
-              <a:t>£2,129,000</a:t>
-            </a:r>
-            <a:endParaRPr lang="en-US" sz="1900" dirty="0"/>
-          </a:p>
-        </p:txBody>
-      </p:sp>
-      <p:sp>
-        <p:nvSpPr>
-          <p:cNvPr id="13" name="Text 11"/>
-          <p:cNvSpPr txBox="1"/>
-          <p:nvPr/>
-        </p:nvSpPr>
-        <p:spPr>
-          <a:xfrm>
-            <a:off x="6675120" y="2194560"/>
-            <a:ext cx="4800600" cy="731520"/>
-          </a:xfrm>
-          <a:prstGeom prst="rect">
-            <a:avLst/>
-          </a:prstGeom>
-          <a:noFill/>
-          <a:ln/>
-        </p:spPr>
-        <p:txBody>
-          <a:bodyPr wrap="square" lIns="0" tIns="0" rIns="0" bIns="0" rtlCol="0" anchor="ctr"/>
-          <a:lstStyle/>
-          <a:p>
-            <a:pPr indent="0" marL="0">
-              <a:buNone/>
-            </a:pPr>
-            <a:r>
-              <a:rPr lang="en-US" sz="2100" b="1" dirty="0">
-                <a:solidFill>
-                  <a:srgbClr val="FFFFFF"/>
                 </a:solidFill>
                 <a:latin typeface="Cambria" pitchFamily="34" charset="0"/>
                 <a:ea typeface="Cambria" pitchFamily="34" charset="-122"/>
                 <a:cs typeface="Cambria" pitchFamily="34" charset="-120"/>
               </a:rPr>
-              <a:t>Without the notice, the full £2,248,650 is payable.</a:t>
-            </a:r>
-            <a:endParaRPr lang="en-US" sz="2100" dirty="0"/>
+              <a:t>£2,248,650</a:t>
+            </a:r>
+            <a:endParaRPr lang="en-US" sz="2400" dirty="0"/>
+          </a:p>
+        </p:txBody>
+      </p:sp>
+      <p:sp>
+        <p:nvSpPr>
+          <p:cNvPr id="9" name="Text 7"/>
+          <p:cNvSpPr txBox="1"/>
+          <p:nvPr/>
+        </p:nvSpPr>
+        <p:spPr>
+          <a:xfrm>
+            <a:off x="7955280" y="2505456"/>
+            <a:ext cx="3200400" cy="274320"/>
+          </a:xfrm>
+          <a:prstGeom prst="rect">
+            <a:avLst/>
+          </a:prstGeom>
+          <a:noFill/>
+          <a:ln/>
+        </p:spPr>
+        <p:txBody>
+          <a:bodyPr wrap="square" lIns="0" tIns="0" rIns="0" bIns="0" rtlCol="0" anchor="ctr"/>
+          <a:lstStyle/>
+          <a:p>
+            <a:pPr indent="0" marL="0">
+              <a:buNone/>
+            </a:pPr>
+            <a:r>
+              <a:rPr lang="en-US" sz="1050" b="1" spc="150" kern="0" dirty="0">
+                <a:solidFill>
+                  <a:srgbClr val="A8B2BD"/>
+                </a:solidFill>
+                <a:latin typeface="Calibri" pitchFamily="34" charset="0"/>
+                <a:ea typeface="Calibri" pitchFamily="34" charset="-122"/>
+                <a:cs typeface="Calibri" pitchFamily="34" charset="-120"/>
+              </a:rPr>
+              <a:t>WITHHELD</a:t>
+            </a:r>
+            <a:endParaRPr lang="en-US" sz="1050" dirty="0"/>
+          </a:p>
+        </p:txBody>
+      </p:sp>
+      <p:sp>
+        <p:nvSpPr>
+          <p:cNvPr id="10" name="Text 8"/>
+          <p:cNvSpPr txBox="1"/>
+          <p:nvPr/>
+        </p:nvSpPr>
+        <p:spPr>
+          <a:xfrm>
+            <a:off x="7955280" y="2779776"/>
+            <a:ext cx="3200400" cy="475488"/>
+          </a:xfrm>
+          <a:prstGeom prst="rect">
+            <a:avLst/>
+          </a:prstGeom>
+          <a:noFill/>
+          <a:ln/>
+        </p:spPr>
+        <p:txBody>
+          <a:bodyPr wrap="square" lIns="0" tIns="0" rIns="0" bIns="0" rtlCol="0" anchor="ctr"/>
+          <a:lstStyle/>
+          <a:p>
+            <a:pPr indent="0" marL="0">
+              <a:buNone/>
+            </a:pPr>
+            <a:r>
+              <a:rPr lang="en-US" sz="2400" b="1" dirty="0">
+                <a:solidFill>
+                  <a:srgbClr val="F2A81D"/>
+                </a:solidFill>
+                <a:latin typeface="Cambria" pitchFamily="34" charset="0"/>
+                <a:ea typeface="Cambria" pitchFamily="34" charset="-122"/>
+                <a:cs typeface="Cambria" pitchFamily="34" charset="-120"/>
+              </a:rPr>
+              <a:t>−£119,650</a:t>
+            </a:r>
+            <a:endParaRPr lang="en-US" sz="2400" dirty="0"/>
+          </a:p>
+        </p:txBody>
+      </p:sp>
+      <p:sp>
+        <p:nvSpPr>
+          <p:cNvPr id="11" name="Text 9"/>
+          <p:cNvSpPr txBox="1"/>
+          <p:nvPr/>
+        </p:nvSpPr>
+        <p:spPr>
+          <a:xfrm>
+            <a:off x="7955280" y="3474720"/>
+            <a:ext cx="3200400" cy="274320"/>
+          </a:xfrm>
+          <a:prstGeom prst="rect">
+            <a:avLst/>
+          </a:prstGeom>
+          <a:noFill/>
+          <a:ln/>
+        </p:spPr>
+        <p:txBody>
+          <a:bodyPr wrap="square" lIns="0" tIns="0" rIns="0" bIns="0" rtlCol="0" anchor="ctr"/>
+          <a:lstStyle/>
+          <a:p>
+            <a:pPr indent="0" marL="0">
+              <a:buNone/>
+            </a:pPr>
+            <a:r>
+              <a:rPr lang="en-US" sz="1050" b="1" spc="150" kern="0" dirty="0">
+                <a:solidFill>
+                  <a:srgbClr val="A8B2BD"/>
+                </a:solidFill>
+                <a:latin typeface="Calibri" pitchFamily="34" charset="0"/>
+                <a:ea typeface="Calibri" pitchFamily="34" charset="-122"/>
+                <a:cs typeface="Calibri" pitchFamily="34" charset="-120"/>
+              </a:rPr>
+              <a:t>NOTICE</a:t>
+            </a:r>
+            <a:endParaRPr lang="en-US" sz="1050" dirty="0"/>
+          </a:p>
+        </p:txBody>
+      </p:sp>
+      <p:sp>
+        <p:nvSpPr>
+          <p:cNvPr id="12" name="Text 10"/>
+          <p:cNvSpPr txBox="1"/>
+          <p:nvPr/>
+        </p:nvSpPr>
+        <p:spPr>
+          <a:xfrm>
+            <a:off x="7955280" y="3749040"/>
+            <a:ext cx="3200400" cy="475488"/>
+          </a:xfrm>
+          <a:prstGeom prst="rect">
+            <a:avLst/>
+          </a:prstGeom>
+          <a:noFill/>
+          <a:ln/>
+        </p:spPr>
+        <p:txBody>
+          <a:bodyPr wrap="square" lIns="0" tIns="0" rIns="0" bIns="0" rtlCol="0" anchor="ctr"/>
+          <a:lstStyle/>
+          <a:p>
+            <a:pPr indent="0" marL="0">
+              <a:buNone/>
+            </a:pPr>
+            <a:r>
+              <a:rPr lang="en-US" sz="1700" b="1" dirty="0">
+                <a:solidFill>
+                  <a:srgbClr val="4FB477"/>
+                </a:solidFill>
+                <a:latin typeface="Cambria" pitchFamily="34" charset="0"/>
+                <a:ea typeface="Cambria" pitchFamily="34" charset="-122"/>
+                <a:cs typeface="Cambria" pitchFamily="34" charset="-120"/>
+              </a:rPr>
+              <a:t>in the window</a:t>
+            </a:r>
+            <a:endParaRPr lang="en-US" sz="1700" dirty="0"/>
+          </a:p>
+        </p:txBody>
+      </p:sp>
+      <p:sp>
+        <p:nvSpPr>
+          <p:cNvPr id="13" name="Text 11"/>
+          <p:cNvSpPr txBox="1"/>
+          <p:nvPr/>
+        </p:nvSpPr>
+        <p:spPr>
+          <a:xfrm>
+            <a:off x="7955280" y="4443984"/>
+            <a:ext cx="3200400" cy="274320"/>
+          </a:xfrm>
+          <a:prstGeom prst="rect">
+            <a:avLst/>
+          </a:prstGeom>
+          <a:noFill/>
+          <a:ln/>
+        </p:spPr>
+        <p:txBody>
+          <a:bodyPr wrap="square" lIns="0" tIns="0" rIns="0" bIns="0" rtlCol="0" anchor="ctr"/>
+          <a:lstStyle/>
+          <a:p>
+            <a:pPr indent="0" marL="0">
+              <a:buNone/>
+            </a:pPr>
+            <a:r>
+              <a:rPr lang="en-US" sz="1050" b="1" spc="150" kern="0" dirty="0">
+                <a:solidFill>
+                  <a:srgbClr val="A8B2BD"/>
+                </a:solidFill>
+                <a:latin typeface="Calibri" pitchFamily="34" charset="0"/>
+                <a:ea typeface="Calibri" pitchFamily="34" charset="-122"/>
+                <a:cs typeface="Calibri" pitchFamily="34" charset="-120"/>
+              </a:rPr>
+              <a:t>NOTIFIED SUM</a:t>
+            </a:r>
+            <a:endParaRPr lang="en-US" sz="1050" dirty="0"/>
           </a:p>
         </p:txBody>
       </p:sp>
@@ -3804,24 +4391,63 @@
         </p:nvSpPr>
         <p:spPr>
           <a:xfrm>
-            <a:off x="6675120" y="3063240"/>
-            <a:ext cx="4800600" cy="1737360"/>
-          </a:xfrm>
-          <a:prstGeom prst="rect">
-            <a:avLst/>
-          </a:prstGeom>
-          <a:noFill/>
-          <a:ln/>
-        </p:spPr>
-        <p:txBody>
-          <a:bodyPr wrap="square" lIns="0" tIns="0" rIns="0" bIns="0" rtlCol="0" anchor="ctr"/>
-          <a:lstStyle/>
-          <a:p>
-            <a:pPr indent="0" marL="0">
-              <a:buNone/>
-            </a:pPr>
-            <a:r>
-              <a:rPr lang="en-US" sz="1350" dirty="0">
+            <a:off x="7955280" y="4718304"/>
+            <a:ext cx="3200400" cy="475488"/>
+          </a:xfrm>
+          <a:prstGeom prst="rect">
+            <a:avLst/>
+          </a:prstGeom>
+          <a:noFill/>
+          <a:ln/>
+        </p:spPr>
+        <p:txBody>
+          <a:bodyPr wrap="square" lIns="0" tIns="0" rIns="0" bIns="0" rtlCol="0" anchor="ctr"/>
+          <a:lstStyle/>
+          <a:p>
+            <a:pPr indent="0" marL="0">
+              <a:buNone/>
+            </a:pPr>
+            <a:r>
+              <a:rPr lang="en-US" sz="2400" b="1" dirty="0">
+                <a:solidFill>
+                  <a:srgbClr val="FFFFFF"/>
+                </a:solidFill>
+                <a:latin typeface="Cambria" pitchFamily="34" charset="0"/>
+                <a:ea typeface="Cambria" pitchFamily="34" charset="-122"/>
+                <a:cs typeface="Cambria" pitchFamily="34" charset="-120"/>
+              </a:rPr>
+              <a:t>£2,129,000</a:t>
+            </a:r>
+            <a:endParaRPr lang="en-US" sz="2400" dirty="0"/>
+          </a:p>
+        </p:txBody>
+      </p:sp>
+      <p:sp>
+        <p:nvSpPr>
+          <p:cNvPr id="15" name="Text 13"/>
+          <p:cNvSpPr txBox="1"/>
+          <p:nvPr/>
+        </p:nvSpPr>
+        <p:spPr>
+          <a:xfrm>
+            <a:off x="685800" y="6309360"/>
+            <a:ext cx="10789920" cy="274320"/>
+          </a:xfrm>
+          <a:prstGeom prst="rect">
+            <a:avLst/>
+          </a:prstGeom>
+          <a:noFill/>
+          <a:ln/>
+        </p:spPr>
+        <p:txBody>
+          <a:bodyPr wrap="square" lIns="0" tIns="0" rIns="0" bIns="0" rtlCol="0" anchor="ctr"/>
+          <a:lstStyle/>
+          <a:p>
+            <a:pPr indent="0" marL="0">
+              <a:buNone/>
+            </a:pPr>
+            <a:r>
+              <a:rPr lang="en-US" sz="950" i="1" dirty="0">
                 <a:solidFill>
                   <a:srgbClr val="A8B2BD"/>
                 </a:solidFill>
@@ -3829,85 +4455,7 @@
                 <a:ea typeface="Calibri" pitchFamily="34" charset="-122"/>
                 <a:cs typeface="Calibri" pitchFamily="34" charset="-120"/>
               </a:rPr>
-              <a:t>The reasons sit on the record: handrail terminations not to detail, dewatering rates not agreed. The platform counted the window, drafted the notice, and priced the withholding from the valuation — on the day, from evidence already captured on site.</a:t>
-            </a:r>
-            <a:endParaRPr lang="en-US" sz="1350" dirty="0"/>
-          </a:p>
-        </p:txBody>
-      </p:sp>
-      <p:sp>
-        <p:nvSpPr>
-          <p:cNvPr id="15" name="Text 13"/>
-          <p:cNvSpPr txBox="1"/>
-          <p:nvPr/>
-        </p:nvSpPr>
-        <p:spPr>
-          <a:xfrm>
-            <a:off x="6675120" y="4709160"/>
-            <a:ext cx="4800600" cy="365760"/>
-          </a:xfrm>
-          <a:prstGeom prst="rect">
-            <a:avLst/>
-          </a:prstGeom>
-          <a:noFill/>
-          <a:ln/>
-        </p:spPr>
-        <p:txBody>
-          <a:bodyPr wrap="square" lIns="0" tIns="0" rIns="0" bIns="0" rtlCol="0" anchor="ctr"/>
-          <a:lstStyle/>
-          <a:p>
-            <a:pPr indent="0" marL="0">
-              <a:buNone/>
-            </a:pPr>
-            <a:r>
-              <a:rPr lang="en-US" sz="1400" b="1" dirty="0">
-                <a:solidFill>
-                  <a:srgbClr val="F2A81D"/>
-                </a:solidFill>
-                <a:latin typeface="Calibri" pitchFamily="34" charset="0"/>
-                <a:ea typeface="Calibri" pitchFamily="34" charset="-122"/>
-                <a:cs typeface="Calibri" pitchFamily="34" charset="-120"/>
-              </a:rPr>
-              <a:t>£119,650 protected, on one application.</a:t>
-            </a:r>
-            <a:endParaRPr lang="en-US" sz="1400" dirty="0"/>
-          </a:p>
-        </p:txBody>
-      </p:sp>
-      <p:sp>
-        <p:nvSpPr>
-          <p:cNvPr id="16" name="Text 14"/>
-          <p:cNvSpPr txBox="1"/>
-          <p:nvPr/>
-        </p:nvSpPr>
-        <p:spPr>
-          <a:xfrm>
-            <a:off x="685800" y="6291072"/>
-            <a:ext cx="10789920" cy="274320"/>
-          </a:xfrm>
-          <a:prstGeom prst="rect">
-            <a:avLst/>
-          </a:prstGeom>
-          <a:noFill/>
-          <a:ln/>
-        </p:spPr>
-        <p:txBody>
-          <a:bodyPr wrap="square" lIns="0" tIns="0" rIns="0" bIns="0" rtlCol="0" anchor="ctr"/>
-          <a:lstStyle/>
-          <a:p>
-            <a:pPr indent="0" marL="0">
-              <a:buNone/>
-            </a:pPr>
-            <a:r>
-              <a:rPr lang="en-US" sz="950" i="1" dirty="0">
-                <a:solidFill>
-                  <a:srgbClr val="A8B2BD"/>
-                </a:solidFill>
-                <a:latin typeface="Calibri" pitchFamily="34" charset="0"/>
-                <a:ea typeface="Calibri" pitchFamily="34" charset="-122"/>
-                <a:cs typeface="Calibri" pitchFamily="34" charset="-120"/>
-              </a:rPr>
-              <a:t>Figures are from the demonstration project you can walk through before signing up. They are a worked example, not a customer outcome.</a:t>
+              <a:t>From the demonstration project on our site, which you can walk through before you sign up. A worked example, not a customer outcome.</a:t>
             </a:r>
             <a:endParaRPr lang="en-US" sz="950" dirty="0"/>
           </a:p>
@@ -3978,7 +4526,7 @@
                 <a:ea typeface="Calibri" pitchFamily="34" charset="-122"/>
                 <a:cs typeface="Calibri" pitchFamily="34" charset="-120"/>
               </a:rPr>
-              <a:t>THE IDEA THE WHOLE PLATFORM RESTS ON</a:t>
+              <a:t>WHY NOBODY CATCHES IT IN TIME</a:t>
             </a:r>
             <a:endParaRPr lang="en-US" sz="1100" dirty="0"/>
           </a:p>
@@ -3992,24 +4540,24 @@
         </p:nvSpPr>
         <p:spPr>
           <a:xfrm>
-            <a:off x="685800" y="731520"/>
-            <a:ext cx="10789920" cy="914400"/>
-          </a:xfrm>
-          <a:prstGeom prst="rect">
-            <a:avLst/>
-          </a:prstGeom>
-          <a:noFill/>
-          <a:ln/>
-        </p:spPr>
-        <p:txBody>
-          <a:bodyPr wrap="square" lIns="0" tIns="0" rIns="0" bIns="0" rtlCol="0" anchor="ctr"/>
-          <a:lstStyle/>
-          <a:p>
-            <a:pPr indent="0" marL="0">
-              <a:buNone/>
-            </a:pPr>
-            <a:r>
-              <a:rPr lang="en-US" sz="3800" b="1" dirty="0">
+            <a:off x="685800" y="713232"/>
+            <a:ext cx="10789920" cy="1005840"/>
+          </a:xfrm>
+          <a:prstGeom prst="rect">
+            <a:avLst/>
+          </a:prstGeom>
+          <a:noFill/>
+          <a:ln/>
+        </p:spPr>
+        <p:txBody>
+          <a:bodyPr wrap="square" lIns="0" tIns="0" rIns="0" bIns="0" rtlCol="0" anchor="ctr"/>
+          <a:lstStyle/>
+          <a:p>
+            <a:pPr indent="0" marL="0">
+              <a:buNone/>
+            </a:pPr>
+            <a:r>
+              <a:rPr lang="en-US" sz="4000" b="1" dirty="0">
                 <a:solidFill>
                   <a:srgbClr val="1A1F26"/>
                 </a:solidFill>
@@ -4017,16 +4565,77 @@
                 <a:ea typeface="Cambria" pitchFamily="34" charset="-122"/>
                 <a:cs typeface="Cambria" pitchFamily="34" charset="-120"/>
               </a:rPr>
-              <a:t>Nothing is typed in twice,</a:t>
-            </a:r>
-            <a:endParaRPr lang="en-US" sz="3800" dirty="0"/>
-          </a:p>
-          <a:p>
-            <a:pPr indent="0" marL="0">
-              <a:buNone/>
-            </a:pPr>
-            <a:r>
-              <a:rPr lang="en-US" sz="3800" b="1" dirty="0">
+              <a:t>Your cost report is a rumour.</a:t>
+            </a:r>
+            <a:endParaRPr lang="en-US" sz="4000" dirty="0"/>
+          </a:p>
+        </p:txBody>
+      </p:sp>
+      <p:sp>
+        <p:nvSpPr>
+          <p:cNvPr id="4" name="Text 2"/>
+          <p:cNvSpPr txBox="1"/>
+          <p:nvPr/>
+        </p:nvSpPr>
+        <p:spPr>
+          <a:xfrm>
+            <a:off x="685800" y="1920240"/>
+            <a:ext cx="5303520" cy="1188720"/>
+          </a:xfrm>
+          <a:prstGeom prst="rect">
+            <a:avLst/>
+          </a:prstGeom>
+          <a:noFill/>
+          <a:ln/>
+        </p:spPr>
+        <p:txBody>
+          <a:bodyPr wrap="square" lIns="0" tIns="0" rIns="0" bIns="0" rtlCol="0" anchor="ctr"/>
+          <a:lstStyle/>
+          <a:p>
+            <a:pPr indent="0" marL="0">
+              <a:buNone/>
+            </a:pPr>
+            <a:r>
+              <a:rPr lang="en-US" sz="1500" dirty="0">
+                <a:solidFill>
+                  <a:srgbClr val="5A6572"/>
+                </a:solidFill>
+                <a:latin typeface="Calibri" pitchFamily="34" charset="0"/>
+                <a:ea typeface="Calibri" pitchFamily="34" charset="-122"/>
+                <a:cs typeface="Calibri" pitchFamily="34" charset="-120"/>
+              </a:rPr>
+              <a:t>A number somebody keyed in, from a spreadsheet somebody else keyed in, from a system that disagreed with the first one. By the time anyone reconciles it, the window has closed.</a:t>
+            </a:r>
+            <a:endParaRPr lang="en-US" sz="1500" dirty="0"/>
+          </a:p>
+        </p:txBody>
+      </p:sp>
+      <p:sp>
+        <p:nvSpPr>
+          <p:cNvPr id="5" name="Text 3"/>
+          <p:cNvSpPr txBox="1"/>
+          <p:nvPr/>
+        </p:nvSpPr>
+        <p:spPr>
+          <a:xfrm>
+            <a:off x="685800" y="3246120"/>
+            <a:ext cx="5303520" cy="502920"/>
+          </a:xfrm>
+          <a:prstGeom prst="rect">
+            <a:avLst/>
+          </a:prstGeom>
+          <a:noFill/>
+          <a:ln/>
+        </p:spPr>
+        <p:txBody>
+          <a:bodyPr wrap="square" lIns="0" tIns="0" rIns="0" bIns="0" rtlCol="0" anchor="ctr"/>
+          <a:lstStyle/>
+          <a:p>
+            <a:pPr indent="0" marL="0">
+              <a:buNone/>
+            </a:pPr>
+            <a:r>
+              <a:rPr lang="en-US" sz="2500" b="1" dirty="0">
                 <a:solidFill>
                   <a:srgbClr val="1A1F26"/>
                 </a:solidFill>
@@ -4034,22 +4643,22 @@
                 <a:ea typeface="Cambria" pitchFamily="34" charset="-122"/>
                 <a:cs typeface="Cambria" pitchFamily="34" charset="-120"/>
               </a:rPr>
-              <a:t>and nothing is typed in at all.</a:t>
-            </a:r>
-            <a:endParaRPr lang="en-US" sz="3800" dirty="0"/>
-          </a:p>
-        </p:txBody>
-      </p:sp>
-      <p:sp>
-        <p:nvSpPr>
-          <p:cNvPr id="4" name="Text 2"/>
-          <p:cNvSpPr txBox="1"/>
-          <p:nvPr/>
-        </p:nvSpPr>
-        <p:spPr>
-          <a:xfrm>
-            <a:off x="685800" y="2468880"/>
-            <a:ext cx="5120640" cy="1280160"/>
+              <a:t>CONSTRUX has nothing to reconcile.</a:t>
+            </a:r>
+            <a:endParaRPr lang="en-US" sz="2500" dirty="0"/>
+          </a:p>
+        </p:txBody>
+      </p:sp>
+      <p:sp>
+        <p:nvSpPr>
+          <p:cNvPr id="6" name="Text 4"/>
+          <p:cNvSpPr txBox="1"/>
+          <p:nvPr/>
+        </p:nvSpPr>
+        <p:spPr>
+          <a:xfrm>
+            <a:off x="685800" y="3840480"/>
+            <a:ext cx="5303520" cy="1737360"/>
           </a:xfrm>
           <a:prstGeom prst="rect">
             <a:avLst/>
@@ -4067,13 +4676,13 @@
             <a:r>
               <a:rPr lang="en-US" sz="1400" dirty="0">
                 <a:solidFill>
-                  <a:srgbClr val="5A6572"/>
-                </a:solidFill>
-                <a:latin typeface="Calibri" pitchFamily="34" charset="0"/>
-                <a:ea typeface="Calibri" pitchFamily="34" charset="-122"/>
-                <a:cs typeface="Calibri" pitchFamily="34" charset="-120"/>
-              </a:rPr>
-              <a:t>Most construction software is a set of filing cabinets that happen to share a login. A figure in the cost report is a figure somebody keyed in from somewhere else, and by the time anybody checks, the two have drifted.</a:t>
+                  <a:srgbClr val="1A1F26"/>
+                </a:solidFill>
+                <a:latin typeface="Calibri" pitchFamily="34" charset="0"/>
+                <a:ea typeface="Calibri" pitchFamily="34" charset="-122"/>
+                <a:cs typeface="Calibri" pitchFamily="34" charset="-120"/>
+              </a:rPr>
+              <a:t>One append-only record of everything that happened. Every figure on every screen is computed from it, so the numbers cannot disagree — and each one walks back to the photograph, the drawing revision or the signed instruction it came from.</a:t>
             </a:r>
             <a:endParaRPr lang="en-US" sz="1400" dirty="0"/>
           </a:p>
@@ -4081,57 +4690,18 @@
       </p:sp>
       <p:sp>
         <p:nvSpPr>
-          <p:cNvPr id="5" name="Text 3"/>
-          <p:cNvSpPr txBox="1"/>
-          <p:nvPr/>
-        </p:nvSpPr>
-        <p:spPr>
-          <a:xfrm>
-            <a:off x="685800" y="3703320"/>
-            <a:ext cx="5120640" cy="1737360"/>
-          </a:xfrm>
-          <a:prstGeom prst="rect">
-            <a:avLst/>
-          </a:prstGeom>
-          <a:noFill/>
-          <a:ln/>
-        </p:spPr>
-        <p:txBody>
-          <a:bodyPr wrap="square" lIns="0" tIns="0" rIns="0" bIns="0" rtlCol="0" anchor="ctr"/>
-          <a:lstStyle/>
-          <a:p>
-            <a:pPr indent="0" marL="0">
-              <a:buNone/>
-            </a:pPr>
-            <a:r>
-              <a:rPr lang="en-US" sz="1400" dirty="0">
-                <a:solidFill>
-                  <a:srgbClr val="1A1F26"/>
-                </a:solidFill>
-                <a:latin typeface="Calibri" pitchFamily="34" charset="0"/>
-                <a:ea typeface="Calibri" pitchFamily="34" charset="-122"/>
-                <a:cs typeface="Calibri" pitchFamily="34" charset="-120"/>
-              </a:rPr>
-              <a:t>CONSTRUX holds one append-only record of everything that happened. Every number on every screen is computed from that record, so it cannot disagree with itself — and every number can be walked back to the site photograph, the drawing revision or the signed instruction it came from.</a:t>
-            </a:r>
-            <a:endParaRPr lang="en-US" sz="1400" dirty="0"/>
-          </a:p>
-        </p:txBody>
-      </p:sp>
-      <p:sp>
-        <p:nvSpPr>
-          <p:cNvPr id="6" name="Shape 4"/>
+          <p:cNvPr id="7" name="Shape 5"/>
           <p:cNvSpPr/>
           <p:nvPr/>
         </p:nvSpPr>
         <p:spPr>
           <a:xfrm>
-            <a:off x="6172200" y="2468880"/>
-            <a:ext cx="5303520" cy="914400"/>
+            <a:off x="6309360" y="1920240"/>
+            <a:ext cx="5166360" cy="1024128"/>
           </a:xfrm>
           <a:prstGeom prst="roundRect">
             <a:avLst>
-              <a:gd name="adj" fmla="val 8000"/>
+              <a:gd name="adj" fmla="val 7143"/>
             </a:avLst>
           </a:prstGeom>
           <a:solidFill>
@@ -4149,13 +4719,13 @@
       </p:sp>
       <p:sp>
         <p:nvSpPr>
-          <p:cNvPr id="7" name="Shape 5"/>
+          <p:cNvPr id="8" name="Shape 6"/>
           <p:cNvSpPr/>
           <p:nvPr/>
         </p:nvSpPr>
         <p:spPr>
           <a:xfrm>
-            <a:off x="6446520" y="2770632"/>
+            <a:off x="6583680" y="2276856"/>
             <a:ext cx="310896" cy="310896"/>
           </a:xfrm>
           <a:prstGeom prst="ellipse">
@@ -4169,30 +4739,30 @@
       </p:sp>
       <p:sp>
         <p:nvSpPr>
-          <p:cNvPr id="8" name="Text 6"/>
-          <p:cNvSpPr txBox="1"/>
-          <p:nvPr/>
-        </p:nvSpPr>
-        <p:spPr>
-          <a:xfrm>
-            <a:off x="6903720" y="2587752"/>
-            <a:ext cx="4389120" cy="320040"/>
-          </a:xfrm>
-          <a:prstGeom prst="rect">
-            <a:avLst/>
-          </a:prstGeom>
-          <a:noFill/>
-          <a:ln/>
-        </p:spPr>
-        <p:txBody>
-          <a:bodyPr wrap="square" lIns="0" tIns="0" rIns="0" bIns="0" rtlCol="0" anchor="ctr"/>
-          <a:lstStyle/>
-          <a:p>
-            <a:pPr indent="0" marL="0">
-              <a:buNone/>
-            </a:pPr>
-            <a:r>
-              <a:rPr lang="en-US" sz="1400" b="1" dirty="0">
+          <p:cNvPr id="9" name="Text 7"/>
+          <p:cNvSpPr txBox="1"/>
+          <p:nvPr/>
+        </p:nvSpPr>
+        <p:spPr>
+          <a:xfrm>
+            <a:off x="7059168" y="2075688"/>
+            <a:ext cx="4206240" cy="320040"/>
+          </a:xfrm>
+          <a:prstGeom prst="rect">
+            <a:avLst/>
+          </a:prstGeom>
+          <a:noFill/>
+          <a:ln/>
+        </p:spPr>
+        <p:txBody>
+          <a:bodyPr wrap="square" lIns="0" tIns="0" rIns="0" bIns="0" rtlCol="0" anchor="ctr"/>
+          <a:lstStyle/>
+          <a:p>
+            <a:pPr indent="0" marL="0">
+              <a:buNone/>
+            </a:pPr>
+            <a:r>
+              <a:rPr lang="en-US" sz="1450" b="1" dirty="0">
                 <a:solidFill>
                   <a:srgbClr val="1A1F26"/>
                 </a:solidFill>
@@ -4202,20 +4772,20 @@
               </a:rPr>
               <a:t>Hash-chained</a:t>
             </a:r>
-            <a:endParaRPr lang="en-US" sz="1400" dirty="0"/>
-          </a:p>
-        </p:txBody>
-      </p:sp>
-      <p:sp>
-        <p:nvSpPr>
-          <p:cNvPr id="9" name="Text 7"/>
-          <p:cNvSpPr txBox="1"/>
-          <p:nvPr/>
-        </p:nvSpPr>
-        <p:spPr>
-          <a:xfrm>
-            <a:off x="6903720" y="2898648"/>
-            <a:ext cx="4389120" cy="411480"/>
+            <a:endParaRPr lang="en-US" sz="1450" dirty="0"/>
+          </a:p>
+        </p:txBody>
+      </p:sp>
+      <p:sp>
+        <p:nvSpPr>
+          <p:cNvPr id="10" name="Text 8"/>
+          <p:cNvSpPr txBox="1"/>
+          <p:nvPr/>
+        </p:nvSpPr>
+        <p:spPr>
+          <a:xfrm>
+            <a:off x="7059168" y="2404872"/>
+            <a:ext cx="4206240" cy="411480"/>
           </a:xfrm>
           <a:prstGeom prst="rect">
             <a:avLst/>
@@ -4239,7 +4809,7 @@
                 <a:ea typeface="Calibri" pitchFamily="34" charset="-122"/>
                 <a:cs typeface="Calibri" pitchFamily="34" charset="-120"/>
               </a:rPr>
-              <a:t>Every event links to the one before it. A changed record breaks the chain, visibly.</a:t>
+              <a:t>Change a record and the chain breaks, visibly. Nobody edits history here.</a:t>
             </a:r>
             <a:endParaRPr lang="en-US" sz="1150" dirty="0"/>
           </a:p>
@@ -4247,18 +4817,18 @@
       </p:sp>
       <p:sp>
         <p:nvSpPr>
-          <p:cNvPr id="10" name="Shape 8"/>
+          <p:cNvPr id="11" name="Shape 9"/>
           <p:cNvSpPr/>
           <p:nvPr/>
         </p:nvSpPr>
         <p:spPr>
           <a:xfrm>
-            <a:off x="6172200" y="3547872"/>
-            <a:ext cx="5303520" cy="914400"/>
+            <a:off x="6309360" y="3127248"/>
+            <a:ext cx="5166360" cy="1024128"/>
           </a:xfrm>
           <a:prstGeom prst="roundRect">
             <a:avLst>
-              <a:gd name="adj" fmla="val 8000"/>
+              <a:gd name="adj" fmla="val 7143"/>
             </a:avLst>
           </a:prstGeom>
           <a:solidFill>
@@ -4276,13 +4846,13 @@
       </p:sp>
       <p:sp>
         <p:nvSpPr>
-          <p:cNvPr id="11" name="Shape 9"/>
+          <p:cNvPr id="12" name="Shape 10"/>
           <p:cNvSpPr/>
           <p:nvPr/>
         </p:nvSpPr>
         <p:spPr>
           <a:xfrm>
-            <a:off x="6446520" y="3849624"/>
+            <a:off x="6583680" y="3483864"/>
             <a:ext cx="310896" cy="310896"/>
           </a:xfrm>
           <a:prstGeom prst="ellipse">
@@ -4296,30 +4866,30 @@
       </p:sp>
       <p:sp>
         <p:nvSpPr>
-          <p:cNvPr id="12" name="Text 10"/>
-          <p:cNvSpPr txBox="1"/>
-          <p:nvPr/>
-        </p:nvSpPr>
-        <p:spPr>
-          <a:xfrm>
-            <a:off x="6903720" y="3666744"/>
-            <a:ext cx="4389120" cy="320040"/>
-          </a:xfrm>
-          <a:prstGeom prst="rect">
-            <a:avLst/>
-          </a:prstGeom>
-          <a:noFill/>
-          <a:ln/>
-        </p:spPr>
-        <p:txBody>
-          <a:bodyPr wrap="square" lIns="0" tIns="0" rIns="0" bIns="0" rtlCol="0" anchor="ctr"/>
-          <a:lstStyle/>
-          <a:p>
-            <a:pPr indent="0" marL="0">
-              <a:buNone/>
-            </a:pPr>
-            <a:r>
-              <a:rPr lang="en-US" sz="1400" b="1" dirty="0">
+          <p:cNvPr id="13" name="Text 11"/>
+          <p:cNvSpPr txBox="1"/>
+          <p:nvPr/>
+        </p:nvSpPr>
+        <p:spPr>
+          <a:xfrm>
+            <a:off x="7059168" y="3282696"/>
+            <a:ext cx="4206240" cy="320040"/>
+          </a:xfrm>
+          <a:prstGeom prst="rect">
+            <a:avLst/>
+          </a:prstGeom>
+          <a:noFill/>
+          <a:ln/>
+        </p:spPr>
+        <p:txBody>
+          <a:bodyPr wrap="square" lIns="0" tIns="0" rIns="0" bIns="0" rtlCol="0" anchor="ctr"/>
+          <a:lstStyle/>
+          <a:p>
+            <a:pPr indent="0" marL="0">
+              <a:buNone/>
+            </a:pPr>
+            <a:r>
+              <a:rPr lang="en-US" sz="1450" b="1" dirty="0">
                 <a:solidFill>
                   <a:srgbClr val="1A1F26"/>
                 </a:solidFill>
@@ -4329,20 +4899,20 @@
               </a:rPr>
               <a:t>Append-only</a:t>
             </a:r>
-            <a:endParaRPr lang="en-US" sz="1400" dirty="0"/>
-          </a:p>
-        </p:txBody>
-      </p:sp>
-      <p:sp>
-        <p:nvSpPr>
-          <p:cNvPr id="13" name="Text 11"/>
-          <p:cNvSpPr txBox="1"/>
-          <p:nvPr/>
-        </p:nvSpPr>
-        <p:spPr>
-          <a:xfrm>
-            <a:off x="6903720" y="3977640"/>
-            <a:ext cx="4389120" cy="411480"/>
+            <a:endParaRPr lang="en-US" sz="1450" dirty="0"/>
+          </a:p>
+        </p:txBody>
+      </p:sp>
+      <p:sp>
+        <p:nvSpPr>
+          <p:cNvPr id="14" name="Text 12"/>
+          <p:cNvSpPr txBox="1"/>
+          <p:nvPr/>
+        </p:nvSpPr>
+        <p:spPr>
+          <a:xfrm>
+            <a:off x="7059168" y="3611880"/>
+            <a:ext cx="4206240" cy="411480"/>
           </a:xfrm>
           <a:prstGeom prst="rect">
             <a:avLst/>
@@ -4366,7 +4936,7 @@
                 <a:ea typeface="Calibri" pitchFamily="34" charset="-122"/>
                 <a:cs typeface="Calibri" pitchFamily="34" charset="-120"/>
               </a:rPr>
-              <a:t>Nothing is edited or deleted. A correction is a new event with a reason and an author.</a:t>
+              <a:t>A correction is a new entry, with a reason and a name against it.</a:t>
             </a:r>
             <a:endParaRPr lang="en-US" sz="1150" dirty="0"/>
           </a:p>
@@ -4374,18 +4944,18 @@
       </p:sp>
       <p:sp>
         <p:nvSpPr>
-          <p:cNvPr id="14" name="Shape 12"/>
+          <p:cNvPr id="15" name="Shape 13"/>
           <p:cNvSpPr/>
           <p:nvPr/>
         </p:nvSpPr>
         <p:spPr>
           <a:xfrm>
-            <a:off x="6172200" y="4626864"/>
-            <a:ext cx="5303520" cy="914400"/>
+            <a:off x="6309360" y="4334256"/>
+            <a:ext cx="5166360" cy="1024128"/>
           </a:xfrm>
           <a:prstGeom prst="roundRect">
             <a:avLst>
-              <a:gd name="adj" fmla="val 8000"/>
+              <a:gd name="adj" fmla="val 7143"/>
             </a:avLst>
           </a:prstGeom>
           <a:solidFill>
@@ -4403,13 +4973,13 @@
       </p:sp>
       <p:sp>
         <p:nvSpPr>
-          <p:cNvPr id="15" name="Shape 13"/>
+          <p:cNvPr id="16" name="Shape 14"/>
           <p:cNvSpPr/>
           <p:nvPr/>
         </p:nvSpPr>
         <p:spPr>
           <a:xfrm>
-            <a:off x="6446520" y="4928616"/>
+            <a:off x="6583680" y="4690872"/>
             <a:ext cx="310896" cy="310896"/>
           </a:xfrm>
           <a:prstGeom prst="ellipse">
@@ -4423,30 +4993,30 @@
       </p:sp>
       <p:sp>
         <p:nvSpPr>
-          <p:cNvPr id="16" name="Text 14"/>
-          <p:cNvSpPr txBox="1"/>
-          <p:nvPr/>
-        </p:nvSpPr>
-        <p:spPr>
-          <a:xfrm>
-            <a:off x="6903720" y="4745736"/>
-            <a:ext cx="4389120" cy="320040"/>
-          </a:xfrm>
-          <a:prstGeom prst="rect">
-            <a:avLst/>
-          </a:prstGeom>
-          <a:noFill/>
-          <a:ln/>
-        </p:spPr>
-        <p:txBody>
-          <a:bodyPr wrap="square" lIns="0" tIns="0" rIns="0" bIns="0" rtlCol="0" anchor="ctr"/>
-          <a:lstStyle/>
-          <a:p>
-            <a:pPr indent="0" marL="0">
-              <a:buNone/>
-            </a:pPr>
-            <a:r>
-              <a:rPr lang="en-US" sz="1400" b="1" dirty="0">
+          <p:cNvPr id="17" name="Text 15"/>
+          <p:cNvSpPr txBox="1"/>
+          <p:nvPr/>
+        </p:nvSpPr>
+        <p:spPr>
+          <a:xfrm>
+            <a:off x="7059168" y="4489704"/>
+            <a:ext cx="4206240" cy="320040"/>
+          </a:xfrm>
+          <a:prstGeom prst="rect">
+            <a:avLst/>
+          </a:prstGeom>
+          <a:noFill/>
+          <a:ln/>
+        </p:spPr>
+        <p:txBody>
+          <a:bodyPr wrap="square" lIns="0" tIns="0" rIns="0" bIns="0" rtlCol="0" anchor="ctr"/>
+          <a:lstStyle/>
+          <a:p>
+            <a:pPr indent="0" marL="0">
+              <a:buNone/>
+            </a:pPr>
+            <a:r>
+              <a:rPr lang="en-US" sz="1450" b="1" dirty="0">
                 <a:solidFill>
                   <a:srgbClr val="1A1F26"/>
                 </a:solidFill>
@@ -4456,20 +5026,20 @@
               </a:rPr>
               <a:t>Replayable</a:t>
             </a:r>
-            <a:endParaRPr lang="en-US" sz="1400" dirty="0"/>
-          </a:p>
-        </p:txBody>
-      </p:sp>
-      <p:sp>
-        <p:nvSpPr>
-          <p:cNvPr id="17" name="Text 15"/>
-          <p:cNvSpPr txBox="1"/>
-          <p:nvPr/>
-        </p:nvSpPr>
-        <p:spPr>
-          <a:xfrm>
-            <a:off x="6903720" y="5056632"/>
-            <a:ext cx="4389120" cy="411480"/>
+            <a:endParaRPr lang="en-US" sz="1450" dirty="0"/>
+          </a:p>
+        </p:txBody>
+      </p:sp>
+      <p:sp>
+        <p:nvSpPr>
+          <p:cNvPr id="18" name="Text 16"/>
+          <p:cNvSpPr txBox="1"/>
+          <p:nvPr/>
+        </p:nvSpPr>
+        <p:spPr>
+          <a:xfrm>
+            <a:off x="7059168" y="4818888"/>
+            <a:ext cx="4206240" cy="411480"/>
           </a:xfrm>
           <a:prstGeom prst="rect">
             <a:avLst/>
@@ -4493,7 +5063,7 @@
                 <a:ea typeface="Calibri" pitchFamily="34" charset="-122"/>
                 <a:cs typeface="Calibri" pitchFamily="34" charset="-120"/>
               </a:rPr>
-              <a:t>State is rebuilt from events, so "what did we know on the 14th?" is a question with an answer.</a:t>
+              <a:t>“What did we know on the 14th?” still has an answer two years later.</a:t>
             </a:r>
             <a:endParaRPr lang="en-US" sz="1150" dirty="0"/>
           </a:p>
@@ -4501,14 +5071,14 @@
       </p:sp>
       <p:sp>
         <p:nvSpPr>
-          <p:cNvPr id="18" name="Text 16"/>
-          <p:cNvSpPr txBox="1"/>
-          <p:nvPr/>
-        </p:nvSpPr>
-        <p:spPr>
-          <a:xfrm>
-            <a:off x="6172200" y="5742432"/>
-            <a:ext cx="5303520" cy="320040"/>
+          <p:cNvPr id="19" name="Text 17"/>
+          <p:cNvSpPr txBox="1"/>
+          <p:nvPr/>
+        </p:nvSpPr>
+        <p:spPr>
+          <a:xfrm>
+            <a:off x="6309360" y="5577840"/>
+            <a:ext cx="5166360" cy="320040"/>
           </a:xfrm>
           <a:prstGeom prst="rect">
             <a:avLst/>
@@ -4532,7 +5102,7 @@
                 <a:ea typeface="Cambria" pitchFamily="34" charset="-122"/>
                 <a:cs typeface="Cambria" pitchFamily="34" charset="-120"/>
               </a:rPr>
-              <a:t>This is what a Golden Thread actually is.</a:t>
+              <a:t>This is what a Golden Thread was always supposed to mean.</a:t>
             </a:r>
             <a:endParaRPr lang="en-US" sz="1500" dirty="0"/>
           </a:p>
@@ -4603,7 +5173,7 @@
                 <a:ea typeface="Calibri" pitchFamily="34" charset="-122"/>
                 <a:cs typeface="Calibri" pitchFamily="34" charset="-120"/>
               </a:rPr>
-              <a:t>ONE RECORD, EVERY STAGE, THIRTY YEARS</a:t>
+              <a:t>CONCEPT TO YEAR THIRTY, ONE RECORD</a:t>
             </a:r>
             <a:endParaRPr lang="en-US" sz="1100" dirty="0"/>
           </a:p>
@@ -4617,24 +5187,24 @@
         </p:nvSpPr>
         <p:spPr>
           <a:xfrm>
-            <a:off x="685800" y="731520"/>
-            <a:ext cx="10789920" cy="914400"/>
-          </a:xfrm>
-          <a:prstGeom prst="rect">
-            <a:avLst/>
-          </a:prstGeom>
-          <a:noFill/>
-          <a:ln/>
-        </p:spPr>
-        <p:txBody>
-          <a:bodyPr wrap="square" lIns="0" tIns="0" rIns="0" bIns="0" rtlCol="0" anchor="ctr"/>
-          <a:lstStyle/>
-          <a:p>
-            <a:pPr indent="0" marL="0">
-              <a:buNone/>
-            </a:pPr>
-            <a:r>
-              <a:rPr lang="en-US" sz="3800" b="1" dirty="0">
+            <a:off x="685800" y="713232"/>
+            <a:ext cx="10789920" cy="1005840"/>
+          </a:xfrm>
+          <a:prstGeom prst="rect">
+            <a:avLst/>
+          </a:prstGeom>
+          <a:noFill/>
+          <a:ln/>
+        </p:spPr>
+        <p:txBody>
+          <a:bodyPr wrap="square" lIns="0" tIns="0" rIns="0" bIns="0" rtlCol="0" anchor="ctr"/>
+          <a:lstStyle/>
+          <a:p>
+            <a:pPr indent="0" marL="0">
+              <a:buNone/>
+            </a:pPr>
+            <a:r>
+              <a:rPr lang="en-US" sz="4000" b="1" dirty="0">
                 <a:solidFill>
                   <a:srgbClr val="FFFFFF"/>
                 </a:solidFill>
@@ -4642,9 +5212,9 @@
                 <a:ea typeface="Cambria" pitchFamily="34" charset="-122"/>
                 <a:cs typeface="Cambria" pitchFamily="34" charset="-120"/>
               </a:rPr>
-              <a:t>It does not hand over. It carries on.</a:t>
-            </a:r>
-            <a:endParaRPr lang="en-US" sz="3800" dirty="0"/>
+              <a:t>Everyone else stops at handover.</a:t>
+            </a:r>
+            <a:endParaRPr lang="en-US" sz="4000" dirty="0"/>
           </a:p>
         </p:txBody>
       </p:sp>
@@ -4656,7 +5226,7 @@
         </p:nvSpPr>
         <p:spPr>
           <a:xfrm>
-            <a:off x="448056" y="2514600"/>
+            <a:off x="448056" y="2377440"/>
             <a:ext cx="1170432" cy="1051560"/>
           </a:xfrm>
           <a:prstGeom prst="roundRect">
@@ -4678,7 +5248,7 @@
         </p:nvSpPr>
         <p:spPr>
           <a:xfrm>
-            <a:off x="448056" y="2514600"/>
+            <a:off x="448056" y="2377440"/>
             <a:ext cx="1170432" cy="1051560"/>
           </a:xfrm>
           <a:prstGeom prst="rect">
@@ -4717,7 +5287,7 @@
         </p:nvSpPr>
         <p:spPr>
           <a:xfrm>
-            <a:off x="1709928" y="2514600"/>
+            <a:off x="1709928" y="2377440"/>
             <a:ext cx="1170432" cy="1051560"/>
           </a:xfrm>
           <a:prstGeom prst="roundRect">
@@ -4739,7 +5309,7 @@
         </p:nvSpPr>
         <p:spPr>
           <a:xfrm>
-            <a:off x="1709928" y="2514600"/>
+            <a:off x="1709928" y="2377440"/>
             <a:ext cx="1170432" cy="1051560"/>
           </a:xfrm>
           <a:prstGeom prst="rect">
@@ -4778,7 +5348,7 @@
         </p:nvSpPr>
         <p:spPr>
           <a:xfrm>
-            <a:off x="2971800" y="2514600"/>
+            <a:off x="2971800" y="2377440"/>
             <a:ext cx="1170432" cy="1051560"/>
           </a:xfrm>
           <a:prstGeom prst="roundRect">
@@ -4800,7 +5370,7 @@
         </p:nvSpPr>
         <p:spPr>
           <a:xfrm>
-            <a:off x="2971800" y="2514600"/>
+            <a:off x="2971800" y="2377440"/>
             <a:ext cx="1170432" cy="1051560"/>
           </a:xfrm>
           <a:prstGeom prst="rect">
@@ -4839,7 +5409,7 @@
         </p:nvSpPr>
         <p:spPr>
           <a:xfrm>
-            <a:off x="4233672" y="2514600"/>
+            <a:off x="4233672" y="2377440"/>
             <a:ext cx="1170432" cy="1051560"/>
           </a:xfrm>
           <a:prstGeom prst="roundRect">
@@ -4861,7 +5431,7 @@
         </p:nvSpPr>
         <p:spPr>
           <a:xfrm>
-            <a:off x="4233672" y="2514600"/>
+            <a:off x="4233672" y="2377440"/>
             <a:ext cx="1170432" cy="1051560"/>
           </a:xfrm>
           <a:prstGeom prst="rect">
@@ -4900,7 +5470,7 @@
         </p:nvSpPr>
         <p:spPr>
           <a:xfrm>
-            <a:off x="5495544" y="2514600"/>
+            <a:off x="5495544" y="2377440"/>
             <a:ext cx="1170432" cy="1051560"/>
           </a:xfrm>
           <a:prstGeom prst="roundRect">
@@ -4922,7 +5492,7 @@
         </p:nvSpPr>
         <p:spPr>
           <a:xfrm>
-            <a:off x="5495544" y="2514600"/>
+            <a:off x="5495544" y="2377440"/>
             <a:ext cx="1170432" cy="1051560"/>
           </a:xfrm>
           <a:prstGeom prst="rect">
@@ -4961,7 +5531,7 @@
         </p:nvSpPr>
         <p:spPr>
           <a:xfrm>
-            <a:off x="6757416" y="2514600"/>
+            <a:off x="6757416" y="2377440"/>
             <a:ext cx="1170432" cy="1051560"/>
           </a:xfrm>
           <a:prstGeom prst="roundRect">
@@ -4983,7 +5553,7 @@
         </p:nvSpPr>
         <p:spPr>
           <a:xfrm>
-            <a:off x="6757416" y="2514600"/>
+            <a:off x="6757416" y="2377440"/>
             <a:ext cx="1170432" cy="1051560"/>
           </a:xfrm>
           <a:prstGeom prst="rect">
@@ -5022,7 +5592,7 @@
         </p:nvSpPr>
         <p:spPr>
           <a:xfrm>
-            <a:off x="8019288" y="2514600"/>
+            <a:off x="8019288" y="2377440"/>
             <a:ext cx="1170432" cy="1051560"/>
           </a:xfrm>
           <a:prstGeom prst="roundRect">
@@ -5044,7 +5614,7 @@
         </p:nvSpPr>
         <p:spPr>
           <a:xfrm>
-            <a:off x="8019288" y="2514600"/>
+            <a:off x="8019288" y="2377440"/>
             <a:ext cx="1170432" cy="1051560"/>
           </a:xfrm>
           <a:prstGeom prst="rect">
@@ -5083,7 +5653,7 @@
         </p:nvSpPr>
         <p:spPr>
           <a:xfrm>
-            <a:off x="9281160" y="2514600"/>
+            <a:off x="9281160" y="2377440"/>
             <a:ext cx="1170432" cy="1051560"/>
           </a:xfrm>
           <a:prstGeom prst="roundRect">
@@ -5105,7 +5675,7 @@
         </p:nvSpPr>
         <p:spPr>
           <a:xfrm>
-            <a:off x="9281160" y="2514600"/>
+            <a:off x="9281160" y="2377440"/>
             <a:ext cx="1170432" cy="1051560"/>
           </a:xfrm>
           <a:prstGeom prst="rect">
@@ -5144,7 +5714,7 @@
         </p:nvSpPr>
         <p:spPr>
           <a:xfrm>
-            <a:off x="10543032" y="2514600"/>
+            <a:off x="10543032" y="2377440"/>
             <a:ext cx="1170432" cy="1051560"/>
           </a:xfrm>
           <a:prstGeom prst="roundRect">
@@ -5166,7 +5736,7 @@
         </p:nvSpPr>
         <p:spPr>
           <a:xfrm>
-            <a:off x="10543032" y="2514600"/>
+            <a:off x="10543032" y="2377440"/>
             <a:ext cx="1170432" cy="1051560"/>
           </a:xfrm>
           <a:prstGeom prst="rect">
@@ -5205,24 +5775,24 @@
         </p:nvSpPr>
         <p:spPr>
           <a:xfrm>
-            <a:off x="8082382" y="3675888"/>
-            <a:ext cx="3017520" cy="274320"/>
-          </a:xfrm>
-          <a:prstGeom prst="rect">
-            <a:avLst/>
-          </a:prstGeom>
-          <a:noFill/>
-          <a:ln/>
-        </p:spPr>
-        <p:txBody>
-          <a:bodyPr wrap="square" lIns="0" tIns="0" rIns="0" bIns="0" rtlCol="0" anchor="ctr"/>
-          <a:lstStyle/>
-          <a:p>
-            <a:pPr indent="0" marL="0">
-              <a:buNone/>
-            </a:pPr>
-            <a:r>
-              <a:rPr lang="en-US" sz="1050" i="1" dirty="0">
+            <a:off x="7325258" y="3566160"/>
+            <a:ext cx="3291840" cy="274320"/>
+          </a:xfrm>
+          <a:prstGeom prst="rect">
+            <a:avLst/>
+          </a:prstGeom>
+          <a:noFill/>
+          <a:ln/>
+        </p:spPr>
+        <p:txBody>
+          <a:bodyPr wrap="square" lIns="0" tIns="0" rIns="0" bIns="0" rtlCol="0" anchor="ctr"/>
+          <a:lstStyle/>
+          <a:p>
+            <a:pPr indent="0" marL="0">
+              <a:buNone/>
+            </a:pPr>
+            <a:r>
+              <a:rPr lang="en-US" sz="1100" b="1" i="1" dirty="0">
                 <a:solidFill>
                   <a:srgbClr val="F2A81D"/>
                 </a:solidFill>
@@ -5232,7 +5802,7 @@
               </a:rPr>
               <a:t>Every other toolchain breaks here</a:t>
             </a:r>
-            <a:endParaRPr lang="en-US" sz="1050" dirty="0"/>
+            <a:endParaRPr lang="en-US" sz="1100" dirty="0"/>
           </a:p>
         </p:txBody>
       </p:sp>
@@ -5244,34 +5814,34 @@
         </p:nvSpPr>
         <p:spPr>
           <a:xfrm>
-            <a:off x="685800" y="4343400"/>
-            <a:ext cx="3474720" cy="365760"/>
-          </a:xfrm>
-          <a:prstGeom prst="rect">
-            <a:avLst/>
-          </a:prstGeom>
-          <a:noFill/>
-          <a:ln/>
-        </p:spPr>
-        <p:txBody>
-          <a:bodyPr wrap="square" lIns="0" tIns="0" rIns="0" bIns="0" rtlCol="0" anchor="ctr"/>
-          <a:lstStyle/>
-          <a:p>
-            <a:pPr indent="0" marL="0">
-              <a:buNone/>
-            </a:pPr>
-            <a:r>
-              <a:rPr lang="en-US" sz="1500" b="1" dirty="0">
+            <a:off x="685800" y="4206240"/>
+            <a:ext cx="3474720" cy="411480"/>
+          </a:xfrm>
+          <a:prstGeom prst="rect">
+            <a:avLst/>
+          </a:prstGeom>
+          <a:noFill/>
+          <a:ln/>
+        </p:spPr>
+        <p:txBody>
+          <a:bodyPr wrap="square" lIns="0" tIns="0" rIns="0" bIns="0" rtlCol="0" anchor="ctr"/>
+          <a:lstStyle/>
+          <a:p>
+            <a:pPr indent="0" marL="0">
+              <a:buNone/>
+            </a:pPr>
+            <a:r>
+              <a:rPr lang="en-US" sz="2200" b="1" dirty="0">
                 <a:solidFill>
                   <a:srgbClr val="F2A81D"/>
                 </a:solidFill>
-                <a:latin typeface="Calibri" pitchFamily="34" charset="0"/>
-                <a:ea typeface="Calibri" pitchFamily="34" charset="-122"/>
-                <a:cs typeface="Calibri" pitchFamily="34" charset="-120"/>
-              </a:rPr>
-              <a:t>Win the work</a:t>
-            </a:r>
-            <a:endParaRPr lang="en-US" sz="1500" dirty="0"/>
+                <a:latin typeface="Cambria" pitchFamily="34" charset="0"/>
+                <a:ea typeface="Cambria" pitchFamily="34" charset="-122"/>
+                <a:cs typeface="Cambria" pitchFamily="34" charset="-120"/>
+              </a:rPr>
+              <a:t>Win it</a:t>
+            </a:r>
+            <a:endParaRPr lang="en-US" sz="2200" dirty="0"/>
           </a:p>
         </p:txBody>
       </p:sp>
@@ -5283,8 +5853,8 @@
         </p:nvSpPr>
         <p:spPr>
           <a:xfrm>
-            <a:off x="685800" y="4754880"/>
-            <a:ext cx="3474720" cy="1188720"/>
+            <a:off x="685800" y="4709160"/>
+            <a:ext cx="3474720" cy="1280160"/>
           </a:xfrm>
           <a:prstGeom prst="rect">
             <a:avLst/>
@@ -5308,7 +5878,7 @@
                 <a:ea typeface="Calibri" pitchFamily="34" charset="-122"/>
                 <a:cs typeface="Calibri" pitchFamily="34" charset="-120"/>
               </a:rPr>
-              <a:t>Tender take-off, bid/no-bid on ten factors, an adversarial review that attacks your own submission before the evaluator does.</a:t>
+              <a:t>Tender take-off, bid/no-bid on ten factors, and a red team that attacks your submission before the evaluator does.</a:t>
             </a:r>
             <a:endParaRPr lang="en-US" sz="1250" dirty="0"/>
           </a:p>
@@ -5322,34 +5892,34 @@
         </p:nvSpPr>
         <p:spPr>
           <a:xfrm>
-            <a:off x="4434840" y="4343400"/>
-            <a:ext cx="3474720" cy="365760"/>
-          </a:xfrm>
-          <a:prstGeom prst="rect">
-            <a:avLst/>
-          </a:prstGeom>
-          <a:noFill/>
-          <a:ln/>
-        </p:spPr>
-        <p:txBody>
-          <a:bodyPr wrap="square" lIns="0" tIns="0" rIns="0" bIns="0" rtlCol="0" anchor="ctr"/>
-          <a:lstStyle/>
-          <a:p>
-            <a:pPr indent="0" marL="0">
-              <a:buNone/>
-            </a:pPr>
-            <a:r>
-              <a:rPr lang="en-US" sz="1500" b="1" dirty="0">
+            <a:off x="4434840" y="4206240"/>
+            <a:ext cx="3474720" cy="411480"/>
+          </a:xfrm>
+          <a:prstGeom prst="rect">
+            <a:avLst/>
+          </a:prstGeom>
+          <a:noFill/>
+          <a:ln/>
+        </p:spPr>
+        <p:txBody>
+          <a:bodyPr wrap="square" lIns="0" tIns="0" rIns="0" bIns="0" rtlCol="0" anchor="ctr"/>
+          <a:lstStyle/>
+          <a:p>
+            <a:pPr indent="0" marL="0">
+              <a:buNone/>
+            </a:pPr>
+            <a:r>
+              <a:rPr lang="en-US" sz="2200" b="1" dirty="0">
                 <a:solidFill>
                   <a:srgbClr val="F2A81D"/>
                 </a:solidFill>
-                <a:latin typeface="Calibri" pitchFamily="34" charset="0"/>
-                <a:ea typeface="Calibri" pitchFamily="34" charset="-122"/>
-                <a:cs typeface="Calibri" pitchFamily="34" charset="-120"/>
-              </a:rPr>
-              <a:t>Run the work</a:t>
-            </a:r>
-            <a:endParaRPr lang="en-US" sz="1500" dirty="0"/>
+                <a:latin typeface="Cambria" pitchFamily="34" charset="0"/>
+                <a:ea typeface="Cambria" pitchFamily="34" charset="-122"/>
+                <a:cs typeface="Cambria" pitchFamily="34" charset="-120"/>
+              </a:rPr>
+              <a:t>Run it</a:t>
+            </a:r>
+            <a:endParaRPr lang="en-US" sz="2200" dirty="0"/>
           </a:p>
         </p:txBody>
       </p:sp>
@@ -5361,8 +5931,8 @@
         </p:nvSpPr>
         <p:spPr>
           <a:xfrm>
-            <a:off x="4434840" y="4754880"/>
-            <a:ext cx="3474720" cy="1188720"/>
+            <a:off x="4434840" y="4709160"/>
+            <a:ext cx="3474720" cy="1280160"/>
           </a:xfrm>
           <a:prstGeom prst="rect">
             <a:avLst/>
@@ -5386,7 +5956,7 @@
                 <a:ea typeface="Calibri" pitchFamily="34" charset="-122"/>
                 <a:cs typeface="Calibri" pitchFamily="34" charset="-120"/>
               </a:rPr>
-              <a:t>Cost, programme, quality, safety and the field app on one spine. Forecast final cost moves when reality does.</a:t>
+              <a:t>Cost, programme, quality, safety and the site app on one spine. The final cost forecast moves when reality does.</a:t>
             </a:r>
             <a:endParaRPr lang="en-US" sz="1250" dirty="0"/>
           </a:p>
@@ -5400,34 +5970,34 @@
         </p:nvSpPr>
         <p:spPr>
           <a:xfrm>
-            <a:off x="8183880" y="4343400"/>
-            <a:ext cx="3474720" cy="365760"/>
-          </a:xfrm>
-          <a:prstGeom prst="rect">
-            <a:avLst/>
-          </a:prstGeom>
-          <a:noFill/>
-          <a:ln/>
-        </p:spPr>
-        <p:txBody>
-          <a:bodyPr wrap="square" lIns="0" tIns="0" rIns="0" bIns="0" rtlCol="0" anchor="ctr"/>
-          <a:lstStyle/>
-          <a:p>
-            <a:pPr indent="0" marL="0">
-              <a:buNone/>
-            </a:pPr>
-            <a:r>
-              <a:rPr lang="en-US" sz="1500" b="1" dirty="0">
+            <a:off x="8183880" y="4206240"/>
+            <a:ext cx="3474720" cy="411480"/>
+          </a:xfrm>
+          <a:prstGeom prst="rect">
+            <a:avLst/>
+          </a:prstGeom>
+          <a:noFill/>
+          <a:ln/>
+        </p:spPr>
+        <p:txBody>
+          <a:bodyPr wrap="square" lIns="0" tIns="0" rIns="0" bIns="0" rtlCol="0" anchor="ctr"/>
+          <a:lstStyle/>
+          <a:p>
+            <a:pPr indent="0" marL="0">
+              <a:buNone/>
+            </a:pPr>
+            <a:r>
+              <a:rPr lang="en-US" sz="2200" b="1" dirty="0">
                 <a:solidFill>
                   <a:srgbClr val="F2A81D"/>
                 </a:solidFill>
-                <a:latin typeface="Calibri" pitchFamily="34" charset="0"/>
-                <a:ea typeface="Calibri" pitchFamily="34" charset="-122"/>
-                <a:cs typeface="Calibri" pitchFamily="34" charset="-120"/>
-              </a:rPr>
-              <a:t>Keep the asset</a:t>
-            </a:r>
-            <a:endParaRPr lang="en-US" sz="1500" dirty="0"/>
+                <a:latin typeface="Cambria" pitchFamily="34" charset="0"/>
+                <a:ea typeface="Cambria" pitchFamily="34" charset="-122"/>
+                <a:cs typeface="Cambria" pitchFamily="34" charset="-120"/>
+              </a:rPr>
+              <a:t>Keep it</a:t>
+            </a:r>
+            <a:endParaRPr lang="en-US" sz="2200" dirty="0"/>
           </a:p>
         </p:txBody>
       </p:sp>
@@ -5439,8 +6009,8 @@
         </p:nvSpPr>
         <p:spPr>
           <a:xfrm>
-            <a:off x="8183880" y="4754880"/>
-            <a:ext cx="3474720" cy="1188720"/>
+            <a:off x="8183880" y="4709160"/>
+            <a:ext cx="3474720" cy="1280160"/>
           </a:xfrm>
           <a:prstGeom prst="rect">
             <a:avLst/>
@@ -5464,7 +6034,7 @@
                 <a:ea typeface="Calibri" pitchFamily="34" charset="-122"/>
                 <a:cs typeface="Calibri" pitchFamily="34" charset="-120"/>
               </a:rPr>
-              <a:t>Handover packs, O&amp;M, lifecycle cost and the operating position — against the same record that built it.</a:t>
+              <a:t>Handover packs, O&amp;M and lifecycle cost — read off the same record that built the thing.</a:t>
             </a:r>
             <a:endParaRPr lang="en-US" sz="1250" dirty="0"/>
           </a:p>
@@ -5535,7 +6105,7 @@
                 <a:ea typeface="Calibri" pitchFamily="34" charset="-122"/>
                 <a:cs typeface="Calibri" pitchFamily="34" charset="-120"/>
               </a:rPr>
-              <a:t>IT KNOWS THE RULES YOU ARE JUDGED AGAINST</a:t>
+              <a:t>THE RULES YOU ARE JUDGED AGAINST</a:t>
             </a:r>
             <a:endParaRPr lang="en-US" sz="1100" dirty="0"/>
           </a:p>
@@ -5549,24 +6119,24 @@
         </p:nvSpPr>
         <p:spPr>
           <a:xfrm>
-            <a:off x="685800" y="731520"/>
-            <a:ext cx="10789920" cy="914400"/>
-          </a:xfrm>
-          <a:prstGeom prst="rect">
-            <a:avLst/>
-          </a:prstGeom>
-          <a:noFill/>
-          <a:ln/>
-        </p:spPr>
-        <p:txBody>
-          <a:bodyPr wrap="square" lIns="0" tIns="0" rIns="0" bIns="0" rtlCol="0" anchor="ctr"/>
-          <a:lstStyle/>
-          <a:p>
-            <a:pPr indent="0" marL="0">
-              <a:buNone/>
-            </a:pPr>
-            <a:r>
-              <a:rPr lang="en-US" sz="3800" b="1" dirty="0">
+            <a:off x="685800" y="713232"/>
+            <a:ext cx="10789920" cy="1005840"/>
+          </a:xfrm>
+          <a:prstGeom prst="rect">
+            <a:avLst/>
+          </a:prstGeom>
+          <a:noFill/>
+          <a:ln/>
+        </p:spPr>
+        <p:txBody>
+          <a:bodyPr wrap="square" lIns="0" tIns="0" rIns="0" bIns="0" rtlCol="0" anchor="ctr"/>
+          <a:lstStyle/>
+          <a:p>
+            <a:pPr indent="0" marL="0">
+              <a:buNone/>
+            </a:pPr>
+            <a:r>
+              <a:rPr lang="en-US" sz="4000" b="1" dirty="0">
                 <a:solidFill>
                   <a:srgbClr val="1A1F26"/>
                 </a:solidFill>
@@ -5574,9 +6144,9 @@
                 <a:ea typeface="Cambria" pitchFamily="34" charset="-122"/>
                 <a:cs typeface="Cambria" pitchFamily="34" charset="-120"/>
               </a:rPr>
-              <a:t>The law and the contract, computed.</a:t>
-            </a:r>
-            <a:endParaRPr lang="en-US" sz="3800" dirty="0"/>
+              <a:t>The Act does not care that you were busy.</a:t>
+            </a:r>
+            <a:endParaRPr lang="en-US" sz="4000" dirty="0"/>
           </a:p>
         </p:txBody>
       </p:sp>
@@ -5588,12 +6158,12 @@
         </p:nvSpPr>
         <p:spPr>
           <a:xfrm>
-            <a:off x="685800" y="2377440"/>
-            <a:ext cx="10789920" cy="1133856"/>
+            <a:off x="685800" y="2240280"/>
+            <a:ext cx="10789920" cy="1097280"/>
           </a:xfrm>
           <a:prstGeom prst="roundRect">
             <a:avLst>
-              <a:gd name="adj" fmla="val 6452"/>
+              <a:gd name="adj" fmla="val 6667"/>
             </a:avLst>
           </a:prstGeom>
           <a:solidFill>
@@ -5617,7 +6187,7 @@
         </p:nvSpPr>
         <p:spPr>
           <a:xfrm>
-            <a:off x="1005840" y="2752344"/>
+            <a:off x="1005840" y="2596896"/>
             <a:ext cx="384048" cy="384048"/>
           </a:xfrm>
           <a:prstGeom prst="ellipse">
@@ -5637,7 +6207,7 @@
         </p:nvSpPr>
         <p:spPr>
           <a:xfrm>
-            <a:off x="1005840" y="2752344"/>
+            <a:off x="1005840" y="2596896"/>
             <a:ext cx="384048" cy="384048"/>
           </a:xfrm>
           <a:prstGeom prst="rect">
@@ -5676,8 +6246,8 @@
         </p:nvSpPr>
         <p:spPr>
           <a:xfrm>
-            <a:off x="1600200" y="2560320"/>
-            <a:ext cx="2560320" cy="365760"/>
+            <a:off x="1600200" y="2404872"/>
+            <a:ext cx="2651760" cy="365760"/>
           </a:xfrm>
           <a:prstGeom prst="rect">
             <a:avLst/>
@@ -5715,8 +6285,8 @@
         </p:nvSpPr>
         <p:spPr>
           <a:xfrm>
-            <a:off x="1600200" y="2944368"/>
-            <a:ext cx="2560320" cy="320040"/>
+            <a:off x="1600200" y="2788920"/>
+            <a:ext cx="2651760" cy="320040"/>
           </a:xfrm>
           <a:prstGeom prst="rect">
             <a:avLst/>
@@ -5754,8 +6324,8 @@
         </p:nvSpPr>
         <p:spPr>
           <a:xfrm>
-            <a:off x="4343400" y="2578608"/>
-            <a:ext cx="6858000" cy="777240"/>
+            <a:off x="4434840" y="2423160"/>
+            <a:ext cx="6766560" cy="777240"/>
           </a:xfrm>
           <a:prstGeom prst="rect">
             <a:avLst/>
@@ -5779,7 +6349,7 @@
                 <a:ea typeface="Calibri" pitchFamily="34" charset="-122"/>
                 <a:cs typeface="Calibri" pitchFamily="34" charset="-120"/>
               </a:rPr>
-              <a:t>Payment and pay less notice windows counted from the contract's own dates. A missed window is an alarm before it is a loss, and s.108 adjudication is on the record.</a:t>
+              <a:t>Notice windows counted from your contract's own dates. A missed window becomes an alarm before it becomes a loss.</a:t>
             </a:r>
             <a:endParaRPr lang="en-US" sz="1250" dirty="0"/>
           </a:p>
@@ -5793,12 +6363,12 @@
         </p:nvSpPr>
         <p:spPr>
           <a:xfrm>
-            <a:off x="685800" y="3675888"/>
-            <a:ext cx="10789920" cy="1133856"/>
+            <a:off x="685800" y="3502152"/>
+            <a:ext cx="10789920" cy="1097280"/>
           </a:xfrm>
           <a:prstGeom prst="roundRect">
             <a:avLst>
-              <a:gd name="adj" fmla="val 6452"/>
+              <a:gd name="adj" fmla="val 6667"/>
             </a:avLst>
           </a:prstGeom>
           <a:solidFill>
@@ -5822,7 +6392,7 @@
         </p:nvSpPr>
         <p:spPr>
           <a:xfrm>
-            <a:off x="1005840" y="4050792"/>
+            <a:off x="1005840" y="3858768"/>
             <a:ext cx="384048" cy="384048"/>
           </a:xfrm>
           <a:prstGeom prst="ellipse">
@@ -5842,7 +6412,7 @@
         </p:nvSpPr>
         <p:spPr>
           <a:xfrm>
-            <a:off x="1005840" y="4050792"/>
+            <a:off x="1005840" y="3858768"/>
             <a:ext cx="384048" cy="384048"/>
           </a:xfrm>
           <a:prstGeom prst="rect">
@@ -5881,8 +6451,8 @@
         </p:nvSpPr>
         <p:spPr>
           <a:xfrm>
-            <a:off x="1600200" y="3858768"/>
-            <a:ext cx="2560320" cy="365760"/>
+            <a:off x="1600200" y="3666744"/>
+            <a:ext cx="2651760" cy="365760"/>
           </a:xfrm>
           <a:prstGeom prst="rect">
             <a:avLst/>
@@ -5920,8 +6490,8 @@
         </p:nvSpPr>
         <p:spPr>
           <a:xfrm>
-            <a:off x="1600200" y="4242816"/>
-            <a:ext cx="2560320" cy="320040"/>
+            <a:off x="1600200" y="4050792"/>
+            <a:ext cx="2651760" cy="320040"/>
           </a:xfrm>
           <a:prstGeom prst="rect">
             <a:avLst/>
@@ -5959,8 +6529,8 @@
         </p:nvSpPr>
         <p:spPr>
           <a:xfrm>
-            <a:off x="4343400" y="3877056"/>
-            <a:ext cx="6858000" cy="777240"/>
+            <a:off x="4434840" y="3685032"/>
+            <a:ext cx="6766560" cy="777240"/>
           </a:xfrm>
           <a:prstGeom prst="rect">
             <a:avLst/>
@@ -5984,7 +6554,7 @@
                 <a:ea typeface="Calibri" pitchFamily="34" charset="-122"/>
                 <a:cs typeface="Calibri" pitchFamily="34" charset="-120"/>
               </a:rPr>
-              <a:t>The duty set, the documents each duty needs, and who holds it. Generated from the project record, not a template somebody filled in.</a:t>
+              <a:t>The duty set, the documents each duty needs and who holds it — built from the project record, not a template.</a:t>
             </a:r>
             <a:endParaRPr lang="en-US" sz="1250" dirty="0"/>
           </a:p>
@@ -5998,12 +6568,12 @@
         </p:nvSpPr>
         <p:spPr>
           <a:xfrm>
-            <a:off x="685800" y="4974336"/>
-            <a:ext cx="10789920" cy="1133856"/>
+            <a:off x="685800" y="4764024"/>
+            <a:ext cx="10789920" cy="1097280"/>
           </a:xfrm>
           <a:prstGeom prst="roundRect">
             <a:avLst>
-              <a:gd name="adj" fmla="val 6452"/>
+              <a:gd name="adj" fmla="val 6667"/>
             </a:avLst>
           </a:prstGeom>
           <a:solidFill>
@@ -6027,7 +6597,7 @@
         </p:nvSpPr>
         <p:spPr>
           <a:xfrm>
-            <a:off x="1005840" y="5349240"/>
+            <a:off x="1005840" y="5120640"/>
             <a:ext cx="384048" cy="384048"/>
           </a:xfrm>
           <a:prstGeom prst="ellipse">
@@ -6047,7 +6617,7 @@
         </p:nvSpPr>
         <p:spPr>
           <a:xfrm>
-            <a:off x="1005840" y="5349240"/>
+            <a:off x="1005840" y="5120640"/>
             <a:ext cx="384048" cy="384048"/>
           </a:xfrm>
           <a:prstGeom prst="rect">
@@ -6086,8 +6656,8 @@
         </p:nvSpPr>
         <p:spPr>
           <a:xfrm>
-            <a:off x="1600200" y="5157216"/>
-            <a:ext cx="2560320" cy="365760"/>
+            <a:off x="1600200" y="4928616"/>
+            <a:ext cx="2651760" cy="365760"/>
           </a:xfrm>
           <a:prstGeom prst="rect">
             <a:avLst/>
@@ -6125,8 +6695,8 @@
         </p:nvSpPr>
         <p:spPr>
           <a:xfrm>
-            <a:off x="1600200" y="5541264"/>
-            <a:ext cx="2560320" cy="320040"/>
+            <a:off x="1600200" y="5312664"/>
+            <a:ext cx="2651760" cy="320040"/>
           </a:xfrm>
           <a:prstGeom prst="rect">
             <a:avLst/>
@@ -6150,7 +6720,7 @@
                 <a:ea typeface="Calibri" pitchFamily="34" charset="-122"/>
                 <a:cs typeface="Calibri" pitchFamily="34" charset="-120"/>
               </a:rPr>
-              <a:t>Clause-aware</a:t>
+              <a:t>As amended</a:t>
             </a:r>
             <a:endParaRPr lang="en-US" sz="1100" dirty="0"/>
           </a:p>
@@ -6164,8 +6734,8 @@
         </p:nvSpPr>
         <p:spPr>
           <a:xfrm>
-            <a:off x="4343400" y="5175504"/>
-            <a:ext cx="6858000" cy="777240"/>
+            <a:off x="4434840" y="4946904"/>
+            <a:ext cx="6766560" cy="777240"/>
           </a:xfrm>
           <a:prstGeom prst="rect">
             <a:avLst/>
@@ -6189,7 +6759,7 @@
                 <a:ea typeface="Calibri" pitchFamily="34" charset="-122"/>
                 <a:cs typeface="Calibri" pitchFamily="34" charset="-120"/>
               </a:rPr>
-              <a:t>Standard-form packages with an amendment overlay, so the platform reasons about your contract as amended rather than the published one.</a:t>
+              <a:t>It reasons about your contract with your amendments applied, not the published form somebody filed away.</a:t>
             </a:r>
             <a:endParaRPr lang="en-US" sz="1250" dirty="0"/>
           </a:p>
@@ -6203,34 +6773,34 @@
         </p:nvSpPr>
         <p:spPr>
           <a:xfrm>
-            <a:off x="685800" y="6291072"/>
-            <a:ext cx="10789920" cy="274320"/>
-          </a:xfrm>
-          <a:prstGeom prst="rect">
-            <a:avLst/>
-          </a:prstGeom>
-          <a:noFill/>
-          <a:ln/>
-        </p:spPr>
-        <p:txBody>
-          <a:bodyPr wrap="square" lIns="0" tIns="0" rIns="0" bIns="0" rtlCol="0" anchor="ctr"/>
-          <a:lstStyle/>
-          <a:p>
-            <a:pPr indent="0" marL="0">
-              <a:buNone/>
-            </a:pPr>
-            <a:r>
-              <a:rPr lang="en-US" sz="950" i="1" dirty="0">
-                <a:solidFill>
-                  <a:srgbClr val="5A6572"/>
-                </a:solidFill>
-                <a:latin typeface="Calibri" pitchFamily="34" charset="0"/>
-                <a:ea typeface="Calibri" pitchFamily="34" charset="-122"/>
-                <a:cs typeface="Calibri" pitchFamily="34" charset="-120"/>
-              </a:rPr>
-              <a:t>Jurisdiction, currency and tax are set per project and versioned, so an approval two years old can still say which rules it was made under.</a:t>
-            </a:r>
-            <a:endParaRPr lang="en-US" sz="950" dirty="0"/>
+            <a:off x="685800" y="6080760"/>
+            <a:ext cx="10789920" cy="365760"/>
+          </a:xfrm>
+          <a:prstGeom prst="rect">
+            <a:avLst/>
+          </a:prstGeom>
+          <a:noFill/>
+          <a:ln/>
+        </p:spPr>
+        <p:txBody>
+          <a:bodyPr wrap="square" lIns="0" tIns="0" rIns="0" bIns="0" rtlCol="0" anchor="ctr"/>
+          <a:lstStyle/>
+          <a:p>
+            <a:pPr indent="0" marL="0">
+              <a:buNone/>
+            </a:pPr>
+            <a:r>
+              <a:rPr lang="en-US" sz="1700" b="1" i="1" dirty="0">
+                <a:solidFill>
+                  <a:srgbClr val="1A1F26"/>
+                </a:solidFill>
+                <a:latin typeface="Cambria" pitchFamily="34" charset="0"/>
+                <a:ea typeface="Cambria" pitchFamily="34" charset="-122"/>
+                <a:cs typeface="Cambria" pitchFamily="34" charset="-120"/>
+              </a:rPr>
+              <a:t>Deadlines are arithmetic. Let the machine do the arithmetic.</a:t>
+            </a:r>
+            <a:endParaRPr lang="en-US" sz="1700" dirty="0"/>
           </a:p>
         </p:txBody>
       </p:sp>
@@ -6299,7 +6869,7 @@
                 <a:ea typeface="Calibri" pitchFamily="34" charset="-122"/>
                 <a:cs typeface="Calibri" pitchFamily="34" charset="-120"/>
               </a:rPr>
-              <a:t>AI YOU CAN PUT IN FRONT OF A CLIENT</a:t>
+              <a:t>THE QUESTION YOUR CLIENT WILL ASK</a:t>
             </a:r>
             <a:endParaRPr lang="en-US" sz="1100" dirty="0"/>
           </a:p>
@@ -6313,24 +6883,24 @@
         </p:nvSpPr>
         <p:spPr>
           <a:xfrm>
-            <a:off x="685800" y="731520"/>
-            <a:ext cx="10789920" cy="914400"/>
-          </a:xfrm>
-          <a:prstGeom prst="rect">
-            <a:avLst/>
-          </a:prstGeom>
-          <a:noFill/>
-          <a:ln/>
-        </p:spPr>
-        <p:txBody>
-          <a:bodyPr wrap="square" lIns="0" tIns="0" rIns="0" bIns="0" rtlCol="0" anchor="ctr"/>
-          <a:lstStyle/>
-          <a:p>
-            <a:pPr indent="0" marL="0">
-              <a:buNone/>
-            </a:pPr>
-            <a:r>
-              <a:rPr lang="en-US" sz="3800" b="1" dirty="0">
+            <a:off x="685800" y="713232"/>
+            <a:ext cx="10789920" cy="1005840"/>
+          </a:xfrm>
+          <a:prstGeom prst="rect">
+            <a:avLst/>
+          </a:prstGeom>
+          <a:noFill/>
+          <a:ln/>
+        </p:spPr>
+        <p:txBody>
+          <a:bodyPr wrap="square" lIns="0" tIns="0" rIns="0" bIns="0" rtlCol="0" anchor="ctr"/>
+          <a:lstStyle/>
+          <a:p>
+            <a:pPr indent="0" marL="0">
+              <a:buNone/>
+            </a:pPr>
+            <a:r>
+              <a:rPr lang="en-US" sz="3600" b="1" dirty="0">
                 <a:solidFill>
                   <a:srgbClr val="FFFFFF"/>
                 </a:solidFill>
@@ -6338,9 +6908,9 @@
                 <a:ea typeface="Cambria" pitchFamily="34" charset="-122"/>
                 <a:cs typeface="Cambria" pitchFamily="34" charset="-120"/>
               </a:rPr>
-              <a:t>Agents propose. People decide.</a:t>
-            </a:r>
-            <a:endParaRPr lang="en-US" sz="3800" dirty="0"/>
+              <a:t>AI you could put in front of an adjudicator.</a:t>
+            </a:r>
+            <a:endParaRPr lang="en-US" sz="3600" dirty="0"/>
           </a:p>
         </p:txBody>
       </p:sp>
@@ -6352,7 +6922,7 @@
         </p:nvSpPr>
         <p:spPr>
           <a:xfrm>
-            <a:off x="685800" y="2203704"/>
+            <a:off x="685800" y="2167128"/>
             <a:ext cx="292608" cy="292608"/>
           </a:xfrm>
           <a:prstGeom prst="ellipse">
@@ -6372,24 +6942,24 @@
         </p:nvSpPr>
         <p:spPr>
           <a:xfrm>
-            <a:off x="1143000" y="2148840"/>
-            <a:ext cx="5852160" cy="329184"/>
-          </a:xfrm>
-          <a:prstGeom prst="rect">
-            <a:avLst/>
-          </a:prstGeom>
-          <a:noFill/>
-          <a:ln/>
-        </p:spPr>
-        <p:txBody>
-          <a:bodyPr wrap="square" lIns="0" tIns="0" rIns="0" bIns="0" rtlCol="0" anchor="ctr"/>
-          <a:lstStyle/>
-          <a:p>
-            <a:pPr indent="0" marL="0">
-              <a:buNone/>
-            </a:pPr>
-            <a:r>
-              <a:rPr lang="en-US" sz="1450" b="1" dirty="0">
+            <a:off x="1161288" y="2103120"/>
+            <a:ext cx="5943600" cy="329184"/>
+          </a:xfrm>
+          <a:prstGeom prst="rect">
+            <a:avLst/>
+          </a:prstGeom>
+          <a:noFill/>
+          <a:ln/>
+        </p:spPr>
+        <p:txBody>
+          <a:bodyPr wrap="square" lIns="0" tIns="0" rIns="0" bIns="0" rtlCol="0" anchor="ctr"/>
+          <a:lstStyle/>
+          <a:p>
+            <a:pPr indent="0" marL="0">
+              <a:buNone/>
+            </a:pPr>
+            <a:r>
+              <a:rPr lang="en-US" sz="1500" b="1" dirty="0">
                 <a:solidFill>
                   <a:srgbClr val="FFFFFF"/>
                 </a:solidFill>
@@ -6397,9 +6967,9 @@
                 <a:ea typeface="Calibri" pitchFamily="34" charset="-122"/>
                 <a:cs typeface="Calibri" pitchFamily="34" charset="-120"/>
               </a:rPr>
-              <a:t>No agent acts unattended</a:t>
-            </a:r>
-            <a:endParaRPr lang="en-US" sz="1450" dirty="0"/>
+              <a:t>No agent acts on its own</a:t>
+            </a:r>
+            <a:endParaRPr lang="en-US" sz="1500" dirty="0"/>
           </a:p>
         </p:txBody>
       </p:sp>
@@ -6411,8 +6981,8 @@
         </p:nvSpPr>
         <p:spPr>
           <a:xfrm>
-            <a:off x="1143000" y="2478024"/>
-            <a:ext cx="5852160" cy="502920"/>
+            <a:off x="1161288" y="2441448"/>
+            <a:ext cx="5943600" cy="530352"/>
           </a:xfrm>
           <a:prstGeom prst="rect">
             <a:avLst/>
@@ -6436,7 +7006,7 @@
                 <a:ea typeface="Calibri" pitchFamily="34" charset="-122"/>
                 <a:cs typeface="Calibri" pitchFamily="34" charset="-120"/>
               </a:rPr>
-              <a:t>Every mandate caps at propose. A test fails if an agent grants itself more.</a:t>
+              <a:t>Every mandate stops at propose. A test fails if an agent ever grants itself more.</a:t>
             </a:r>
             <a:endParaRPr lang="en-US" sz="1200" dirty="0"/>
           </a:p>
@@ -6450,7 +7020,7 @@
         </p:nvSpPr>
         <p:spPr>
           <a:xfrm>
-            <a:off x="685800" y="3136392"/>
+            <a:off x="685800" y="3127248"/>
             <a:ext cx="292608" cy="292608"/>
           </a:xfrm>
           <a:prstGeom prst="ellipse">
@@ -6470,24 +7040,24 @@
         </p:nvSpPr>
         <p:spPr>
           <a:xfrm>
-            <a:off x="1143000" y="3081528"/>
-            <a:ext cx="5852160" cy="329184"/>
-          </a:xfrm>
-          <a:prstGeom prst="rect">
-            <a:avLst/>
-          </a:prstGeom>
-          <a:noFill/>
-          <a:ln/>
-        </p:spPr>
-        <p:txBody>
-          <a:bodyPr wrap="square" lIns="0" tIns="0" rIns="0" bIns="0" rtlCol="0" anchor="ctr"/>
-          <a:lstStyle/>
-          <a:p>
-            <a:pPr indent="0" marL="0">
-              <a:buNone/>
-            </a:pPr>
-            <a:r>
-              <a:rPr lang="en-US" sz="1450" b="1" dirty="0">
+            <a:off x="1161288" y="3063240"/>
+            <a:ext cx="5943600" cy="329184"/>
+          </a:xfrm>
+          <a:prstGeom prst="rect">
+            <a:avLst/>
+          </a:prstGeom>
+          <a:noFill/>
+          <a:ln/>
+        </p:spPr>
+        <p:txBody>
+          <a:bodyPr wrap="square" lIns="0" tIns="0" rIns="0" bIns="0" rtlCol="0" anchor="ctr"/>
+          <a:lstStyle/>
+          <a:p>
+            <a:pPr indent="0" marL="0">
+              <a:buNone/>
+            </a:pPr>
+            <a:r>
+              <a:rPr lang="en-US" sz="1500" b="1" dirty="0">
                 <a:solidFill>
                   <a:srgbClr val="FFFFFF"/>
                 </a:solidFill>
@@ -6497,7 +7067,7 @@
               </a:rPr>
               <a:t>Every output is attributed</a:t>
             </a:r>
-            <a:endParaRPr lang="en-US" sz="1450" dirty="0"/>
+            <a:endParaRPr lang="en-US" sz="1500" dirty="0"/>
           </a:p>
         </p:txBody>
       </p:sp>
@@ -6509,8 +7079,8 @@
         </p:nvSpPr>
         <p:spPr>
           <a:xfrm>
-            <a:off x="1143000" y="3410712"/>
-            <a:ext cx="5852160" cy="502920"/>
+            <a:off x="1161288" y="3401568"/>
+            <a:ext cx="5943600" cy="530352"/>
           </a:xfrm>
           <a:prstGeom prst="rect">
             <a:avLst/>
@@ -6534,7 +7104,7 @@
                 <a:ea typeface="Calibri" pitchFamily="34" charset="-122"/>
                 <a:cs typeface="Calibri" pitchFamily="34" charset="-120"/>
               </a:rPr>
-              <a:t>Which model, which prompt, which evidence, whose approval, and what changed.</a:t>
+              <a:t>Which model, which evidence, whose approval, and exactly what changed.</a:t>
             </a:r>
             <a:endParaRPr lang="en-US" sz="1200" dirty="0"/>
           </a:p>
@@ -6548,7 +7118,7 @@
         </p:nvSpPr>
         <p:spPr>
           <a:xfrm>
-            <a:off x="685800" y="4069080"/>
+            <a:off x="685800" y="4087368"/>
             <a:ext cx="292608" cy="292608"/>
           </a:xfrm>
           <a:prstGeom prst="ellipse">
@@ -6568,24 +7138,24 @@
         </p:nvSpPr>
         <p:spPr>
           <a:xfrm>
-            <a:off x="1143000" y="4014216"/>
-            <a:ext cx="5852160" cy="329184"/>
-          </a:xfrm>
-          <a:prstGeom prst="rect">
-            <a:avLst/>
-          </a:prstGeom>
-          <a:noFill/>
-          <a:ln/>
-        </p:spPr>
-        <p:txBody>
-          <a:bodyPr wrap="square" lIns="0" tIns="0" rIns="0" bIns="0" rtlCol="0" anchor="ctr"/>
-          <a:lstStyle/>
-          <a:p>
-            <a:pPr indent="0" marL="0">
-              <a:buNone/>
-            </a:pPr>
-            <a:r>
-              <a:rPr lang="en-US" sz="1450" b="1" dirty="0">
+            <a:off x="1161288" y="4023360"/>
+            <a:ext cx="5943600" cy="329184"/>
+          </a:xfrm>
+          <a:prstGeom prst="rect">
+            <a:avLst/>
+          </a:prstGeom>
+          <a:noFill/>
+          <a:ln/>
+        </p:spPr>
+        <p:txBody>
+          <a:bodyPr wrap="square" lIns="0" tIns="0" rIns="0" bIns="0" rtlCol="0" anchor="ctr"/>
+          <a:lstStyle/>
+          <a:p>
+            <a:pPr indent="0" marL="0">
+              <a:buNone/>
+            </a:pPr>
+            <a:r>
+              <a:rPr lang="en-US" sz="1500" b="1" dirty="0">
                 <a:solidFill>
                   <a:srgbClr val="FFFFFF"/>
                 </a:solidFill>
@@ -6593,9 +7163,9 @@
                 <a:ea typeface="Calibri" pitchFamily="34" charset="-122"/>
                 <a:cs typeface="Calibri" pitchFamily="34" charset="-120"/>
               </a:rPr>
-              <a:t>Refusal beats invention</a:t>
-            </a:r>
-            <a:endParaRPr lang="en-US" sz="1450" dirty="0"/>
+              <a:t>It refuses rather than invents</a:t>
+            </a:r>
+            <a:endParaRPr lang="en-US" sz="1500" dirty="0"/>
           </a:p>
         </p:txBody>
       </p:sp>
@@ -6607,8 +7177,8 @@
         </p:nvSpPr>
         <p:spPr>
           <a:xfrm>
-            <a:off x="1143000" y="4343400"/>
-            <a:ext cx="5852160" cy="502920"/>
+            <a:off x="1161288" y="4361688"/>
+            <a:ext cx="5943600" cy="530352"/>
           </a:xfrm>
           <a:prstGeom prst="rect">
             <a:avLst/>
@@ -6632,7 +7202,7 @@
                 <a:ea typeface="Calibri" pitchFamily="34" charset="-122"/>
                 <a:cs typeface="Calibri" pitchFamily="34" charset="-120"/>
               </a:rPr>
-              <a:t>Asked for a number the record cannot support, it says so instead of producing one.</a:t>
+              <a:t>Ask for a number the record cannot support and it says so. That is the feature.</a:t>
             </a:r>
             <a:endParaRPr lang="en-US" sz="1200" dirty="0"/>
           </a:p>
@@ -6646,7 +7216,7 @@
         </p:nvSpPr>
         <p:spPr>
           <a:xfrm>
-            <a:off x="685800" y="5001768"/>
+            <a:off x="685800" y="5047488"/>
             <a:ext cx="292608" cy="292608"/>
           </a:xfrm>
           <a:prstGeom prst="ellipse">
@@ -6666,24 +7236,24 @@
         </p:nvSpPr>
         <p:spPr>
           <a:xfrm>
-            <a:off x="1143000" y="4946904"/>
-            <a:ext cx="5852160" cy="329184"/>
-          </a:xfrm>
-          <a:prstGeom prst="rect">
-            <a:avLst/>
-          </a:prstGeom>
-          <a:noFill/>
-          <a:ln/>
-        </p:spPr>
-        <p:txBody>
-          <a:bodyPr wrap="square" lIns="0" tIns="0" rIns="0" bIns="0" rtlCol="0" anchor="ctr"/>
-          <a:lstStyle/>
-          <a:p>
-            <a:pPr indent="0" marL="0">
-              <a:buNone/>
-            </a:pPr>
-            <a:r>
-              <a:rPr lang="en-US" sz="1450" b="1" dirty="0">
+            <a:off x="1161288" y="4983480"/>
+            <a:ext cx="5943600" cy="329184"/>
+          </a:xfrm>
+          <a:prstGeom prst="rect">
+            <a:avLst/>
+          </a:prstGeom>
+          <a:noFill/>
+          <a:ln/>
+        </p:spPr>
+        <p:txBody>
+          <a:bodyPr wrap="square" lIns="0" tIns="0" rIns="0" bIns="0" rtlCol="0" anchor="ctr"/>
+          <a:lstStyle/>
+          <a:p>
+            <a:pPr indent="0" marL="0">
+              <a:buNone/>
+            </a:pPr>
+            <a:r>
+              <a:rPr lang="en-US" sz="1500" b="1" dirty="0">
                 <a:solidFill>
                   <a:srgbClr val="FFFFFF"/>
                 </a:solidFill>
@@ -6691,9 +7261,9 @@
                 <a:ea typeface="Calibri" pitchFamily="34" charset="-122"/>
                 <a:cs typeface="Calibri" pitchFamily="34" charset="-120"/>
               </a:rPr>
-              <a:t>Metered before it runs</a:t>
-            </a:r>
-            <a:endParaRPr lang="en-US" sz="1450" dirty="0"/>
+              <a:t>Priced before it runs</a:t>
+            </a:r>
+            <a:endParaRPr lang="en-US" sz="1500" dirty="0"/>
           </a:p>
         </p:txBody>
       </p:sp>
@@ -6705,8 +7275,8 @@
         </p:nvSpPr>
         <p:spPr>
           <a:xfrm>
-            <a:off x="1143000" y="5276088"/>
-            <a:ext cx="5852160" cy="502920"/>
+            <a:off x="1161288" y="5321808"/>
+            <a:ext cx="5943600" cy="530352"/>
           </a:xfrm>
           <a:prstGeom prst="rect">
             <a:avLst/>
@@ -6730,7 +7300,7 @@
                 <a:ea typeface="Calibri" pitchFamily="34" charset="-122"/>
                 <a:cs typeface="Calibri" pitchFamily="34" charset="-120"/>
               </a:rPr>
-              <a:t>The cost of an AI run is shown before you commit to it, and charged to a wallet you cap.</a:t>
+              <a:t>You see what a run costs before you commit, and it draws on a wallet you cap.</a:t>
             </a:r>
             <a:endParaRPr lang="en-US" sz="1200" dirty="0"/>
           </a:p>
@@ -6744,12 +7314,12 @@
         </p:nvSpPr>
         <p:spPr>
           <a:xfrm>
-            <a:off x="7223760" y="2103120"/>
-            <a:ext cx="4251960" cy="3291840"/>
+            <a:off x="7315200" y="2057400"/>
+            <a:ext cx="4160520" cy="3383280"/>
           </a:xfrm>
           <a:prstGeom prst="roundRect">
             <a:avLst>
-              <a:gd name="adj" fmla="val 2222"/>
+              <a:gd name="adj" fmla="val 2162"/>
             </a:avLst>
           </a:prstGeom>
           <a:solidFill>
@@ -6773,34 +7343,34 @@
         </p:nvSpPr>
         <p:spPr>
           <a:xfrm>
-            <a:off x="7543800" y="2377440"/>
-            <a:ext cx="3657600" cy="365760"/>
-          </a:xfrm>
-          <a:prstGeom prst="rect">
-            <a:avLst/>
-          </a:prstGeom>
-          <a:noFill/>
-          <a:ln/>
-        </p:spPr>
-        <p:txBody>
-          <a:bodyPr wrap="square" lIns="0" tIns="0" rIns="0" bIns="0" rtlCol="0" anchor="ctr"/>
-          <a:lstStyle/>
-          <a:p>
-            <a:pPr indent="0" marL="0">
-              <a:buNone/>
-            </a:pPr>
-            <a:r>
-              <a:rPr lang="en-US" sz="1300" b="1" dirty="0">
+            <a:off x="7635240" y="2377440"/>
+            <a:ext cx="3566160" cy="457200"/>
+          </a:xfrm>
+          <a:prstGeom prst="rect">
+            <a:avLst/>
+          </a:prstGeom>
+          <a:noFill/>
+          <a:ln/>
+        </p:spPr>
+        <p:txBody>
+          <a:bodyPr wrap="square" lIns="0" tIns="0" rIns="0" bIns="0" rtlCol="0" anchor="ctr"/>
+          <a:lstStyle/>
+          <a:p>
+            <a:pPr indent="0" marL="0">
+              <a:buNone/>
+            </a:pPr>
+            <a:r>
+              <a:rPr lang="en-US" sz="2100" b="1" dirty="0">
                 <a:solidFill>
                   <a:srgbClr val="F2A81D"/>
                 </a:solidFill>
-                <a:latin typeface="Calibri" pitchFamily="34" charset="0"/>
-                <a:ea typeface="Calibri" pitchFamily="34" charset="-122"/>
-                <a:cs typeface="Calibri" pitchFamily="34" charset="-120"/>
-              </a:rPr>
-              <a:t>Why it matters</a:t>
-            </a:r>
-            <a:endParaRPr lang="en-US" sz="1300" dirty="0"/>
+                <a:latin typeface="Cambria" pitchFamily="34" charset="0"/>
+                <a:ea typeface="Cambria" pitchFamily="34" charset="-122"/>
+                <a:cs typeface="Cambria" pitchFamily="34" charset="-120"/>
+              </a:rPr>
+              <a:t>“Who decided this?”</a:t>
+            </a:r>
+            <a:endParaRPr lang="en-US" sz="2100" dirty="0"/>
           </a:p>
         </p:txBody>
       </p:sp>
@@ -6812,8 +7382,8 @@
         </p:nvSpPr>
         <p:spPr>
           <a:xfrm>
-            <a:off x="7543800" y="2834640"/>
-            <a:ext cx="3657600" cy="2377440"/>
+            <a:off x="7635240" y="2971800"/>
+            <a:ext cx="3566160" cy="2194560"/>
           </a:xfrm>
           <a:prstGeom prst="rect">
             <a:avLst/>
@@ -6837,7 +7407,7 @@
                 <a:ea typeface="Calibri" pitchFamily="34" charset="-122"/>
                 <a:cs typeface="Calibri" pitchFamily="34" charset="-120"/>
               </a:rPr>
-              <a:t>A governance decision made by a machine nobody can question is a decision you cannot defend — to a client, an adjudicator or an insurer.</a:t>
+              <a:t>A decision no human can defend is a decision you lose — to a client, an adjudicator or an insurer.</a:t>
             </a:r>
             <a:endParaRPr lang="en-US" sz="1250" dirty="0"/>
           </a:p>
@@ -6860,7 +7430,7 @@
                 <a:ea typeface="Calibri" pitchFamily="34" charset="-122"/>
                 <a:cs typeface="Calibri" pitchFamily="34" charset="-120"/>
               </a:rPr>
-              <a:t>So decisions are human by construction here. The agents do the reading, the drafting and the arithmetic; the authority stays with the person whose name is against it.</a:t>
+              <a:t>So the agents read, draft and calculate. The authority stays with the person whose name goes against it. Governance decisions are human here by construction, not by policy.</a:t>
             </a:r>
             <a:endParaRPr lang="en-US" sz="1250" dirty="0"/>
           </a:p>
@@ -6877,6 +7447,739 @@
 <file path=ppt/slides/slide8.xml><?xml version="1.0" encoding="utf-8"?>
 <p:sld xmlns:a="http://schemas.openxmlformats.org/drawingml/2006/main" xmlns:r="http://schemas.openxmlformats.org/officeDocument/2006/relationships" xmlns:p="http://schemas.openxmlformats.org/presentationml/2006/main">
   <p:cSld name="Slide 8">
+    <p:bg>
+      <p:bgPr>
+        <a:solidFill>
+          <a:srgbClr val="1A1F26"/>
+        </a:solidFill>
+      </p:bgPr>
+    </p:bg>
+    <p:spTree>
+      <p:nvGrpSpPr>
+        <p:cNvPr id="1" name=""/>
+        <p:cNvGrpSpPr/>
+        <p:nvPr/>
+      </p:nvGrpSpPr>
+      <p:grpSpPr>
+        <a:xfrm>
+          <a:off x="0" y="0"/>
+          <a:ext cx="0" cy="0"/>
+          <a:chOff x="0" y="0"/>
+          <a:chExt cx="0" cy="0"/>
+        </a:xfrm>
+      </p:grpSpPr>
+      <p:sp>
+        <p:nvSpPr>
+          <p:cNvPr id="2" name="Text 0"/>
+          <p:cNvSpPr txBox="1"/>
+          <p:nvPr/>
+        </p:nvSpPr>
+        <p:spPr>
+          <a:xfrm>
+            <a:off x="685800" y="384048"/>
+            <a:ext cx="10789920" cy="274320"/>
+          </a:xfrm>
+          <a:prstGeom prst="rect">
+            <a:avLst/>
+          </a:prstGeom>
+          <a:noFill/>
+          <a:ln/>
+        </p:spPr>
+        <p:txBody>
+          <a:bodyPr wrap="square" lIns="0" tIns="0" rIns="0" bIns="0" rtlCol="0" anchor="ctr"/>
+          <a:lstStyle/>
+          <a:p>
+            <a:pPr indent="0" marL="0">
+              <a:buNone/>
+            </a:pPr>
+            <a:r>
+              <a:rPr lang="en-US" sz="1100" b="1" spc="200" kern="0" dirty="0">
+                <a:solidFill>
+                  <a:srgbClr val="F2A81D"/>
+                </a:solidFill>
+                <a:latin typeface="Calibri" pitchFamily="34" charset="0"/>
+                <a:ea typeface="Calibri" pitchFamily="34" charset="-122"/>
+                <a:cs typeface="Calibri" pitchFamily="34" charset="-120"/>
+              </a:rPr>
+              <a:t>BEFORE YOUR IT REVIEW ASKS</a:t>
+            </a:r>
+            <a:endParaRPr lang="en-US" sz="1100" dirty="0"/>
+          </a:p>
+        </p:txBody>
+      </p:sp>
+      <p:sp>
+        <p:nvSpPr>
+          <p:cNvPr id="3" name="Text 1"/>
+          <p:cNvSpPr txBox="1"/>
+          <p:nvPr/>
+        </p:nvSpPr>
+        <p:spPr>
+          <a:xfrm>
+            <a:off x="685800" y="713232"/>
+            <a:ext cx="10789920" cy="1005840"/>
+          </a:xfrm>
+          <a:prstGeom prst="rect">
+            <a:avLst/>
+          </a:prstGeom>
+          <a:noFill/>
+          <a:ln/>
+        </p:spPr>
+        <p:txBody>
+          <a:bodyPr wrap="square" lIns="0" tIns="0" rIns="0" bIns="0" rtlCol="0" anchor="ctr"/>
+          <a:lstStyle/>
+          <a:p>
+            <a:pPr indent="0" marL="0">
+              <a:buNone/>
+            </a:pPr>
+            <a:r>
+              <a:rPr lang="en-US" sz="3400" b="1" dirty="0">
+                <a:solidFill>
+                  <a:srgbClr val="FFFFFF"/>
+                </a:solidFill>
+                <a:latin typeface="Cambria" pitchFamily="34" charset="0"/>
+                <a:ea typeface="Cambria" pitchFamily="34" charset="-122"/>
+                <a:cs typeface="Cambria" pitchFamily="34" charset="-120"/>
+              </a:rPr>
+              <a:t>Built like something you have to trust.</a:t>
+            </a:r>
+            <a:endParaRPr lang="en-US" sz="3400" dirty="0"/>
+          </a:p>
+        </p:txBody>
+      </p:sp>
+      <p:sp>
+        <p:nvSpPr>
+          <p:cNvPr id="4" name="Shape 2"/>
+          <p:cNvSpPr/>
+          <p:nvPr/>
+        </p:nvSpPr>
+        <p:spPr>
+          <a:xfrm>
+            <a:off x="685800" y="2148840"/>
+            <a:ext cx="2606040" cy="3063240"/>
+          </a:xfrm>
+          <a:prstGeom prst="roundRect">
+            <a:avLst>
+              <a:gd name="adj" fmla="val 2807"/>
+            </a:avLst>
+          </a:prstGeom>
+          <a:solidFill>
+            <a:srgbClr val="2E3944"/>
+          </a:solidFill>
+          <a:ln/>
+          <a:effectLst>
+            <a:outerShdw sx="100000" sy="100000" kx="0" ky="0" algn="bl" rotWithShape="0" blurRad="127000" dist="25400" dir="5400000">
+              <a:srgbClr val="000000">
+                <a:alpha val="12000"/>
+              </a:srgbClr>
+            </a:outerShdw>
+          </a:effectLst>
+        </p:spPr>
+      </p:sp>
+      <p:sp>
+        <p:nvSpPr>
+          <p:cNvPr id="5" name="Text 3"/>
+          <p:cNvSpPr txBox="1"/>
+          <p:nvPr/>
+        </p:nvSpPr>
+        <p:spPr>
+          <a:xfrm>
+            <a:off x="960120" y="2359152"/>
+            <a:ext cx="2057400" cy="914400"/>
+          </a:xfrm>
+          <a:prstGeom prst="rect">
+            <a:avLst/>
+          </a:prstGeom>
+          <a:noFill/>
+          <a:ln/>
+        </p:spPr>
+        <p:txBody>
+          <a:bodyPr wrap="square" lIns="0" tIns="0" rIns="0" bIns="0" rtlCol="0" anchor="ctr"/>
+          <a:lstStyle/>
+          <a:p>
+            <a:pPr indent="0" marL="0">
+              <a:buNone/>
+            </a:pPr>
+            <a:r>
+              <a:rPr lang="en-US" sz="4400" b="1" dirty="0">
+                <a:solidFill>
+                  <a:srgbClr val="F2A81D"/>
+                </a:solidFill>
+                <a:latin typeface="Cambria" pitchFamily="34" charset="0"/>
+                <a:ea typeface="Cambria" pitchFamily="34" charset="-122"/>
+                <a:cs typeface="Cambria" pitchFamily="34" charset="-120"/>
+              </a:rPr>
+              <a:t>0</a:t>
+            </a:r>
+            <a:endParaRPr lang="en-US" sz="4400" dirty="0"/>
+          </a:p>
+        </p:txBody>
+      </p:sp>
+      <p:sp>
+        <p:nvSpPr>
+          <p:cNvPr id="6" name="Text 4"/>
+          <p:cNvSpPr txBox="1"/>
+          <p:nvPr/>
+        </p:nvSpPr>
+        <p:spPr>
+          <a:xfrm>
+            <a:off x="960120" y="3291840"/>
+            <a:ext cx="2057400" cy="411480"/>
+          </a:xfrm>
+          <a:prstGeom prst="rect">
+            <a:avLst/>
+          </a:prstGeom>
+          <a:noFill/>
+          <a:ln/>
+        </p:spPr>
+        <p:txBody>
+          <a:bodyPr wrap="square" lIns="0" tIns="0" rIns="0" bIns="0" rtlCol="0" anchor="ctr"/>
+          <a:lstStyle/>
+          <a:p>
+            <a:pPr indent="0" marL="0">
+              <a:buNone/>
+            </a:pPr>
+            <a:r>
+              <a:rPr lang="en-US" sz="1250" b="1" dirty="0">
+                <a:solidFill>
+                  <a:srgbClr val="FFFFFF"/>
+                </a:solidFill>
+                <a:latin typeface="Calibri" pitchFamily="34" charset="0"/>
+                <a:ea typeface="Calibri" pitchFamily="34" charset="-122"/>
+                <a:cs typeface="Calibri" pitchFamily="34" charset="-120"/>
+              </a:rPr>
+              <a:t>runtime dependencies</a:t>
+            </a:r>
+            <a:endParaRPr lang="en-US" sz="1250" dirty="0"/>
+          </a:p>
+        </p:txBody>
+      </p:sp>
+      <p:sp>
+        <p:nvSpPr>
+          <p:cNvPr id="7" name="Text 5"/>
+          <p:cNvSpPr txBox="1"/>
+          <p:nvPr/>
+        </p:nvSpPr>
+        <p:spPr>
+          <a:xfrm>
+            <a:off x="960120" y="3767328"/>
+            <a:ext cx="2057400" cy="1234440"/>
+          </a:xfrm>
+          <a:prstGeom prst="rect">
+            <a:avLst/>
+          </a:prstGeom>
+          <a:noFill/>
+          <a:ln/>
+        </p:spPr>
+        <p:txBody>
+          <a:bodyPr wrap="square" lIns="0" tIns="0" rIns="0" bIns="0" rtlCol="0" anchor="ctr"/>
+          <a:lstStyle/>
+          <a:p>
+            <a:pPr indent="0" marL="0">
+              <a:buNone/>
+            </a:pPr>
+            <a:r>
+              <a:rPr lang="en-US" sz="1150" dirty="0">
+                <a:solidFill>
+                  <a:srgbClr val="A8B2BD"/>
+                </a:solidFill>
+                <a:latin typeface="Calibri" pitchFamily="34" charset="0"/>
+                <a:ea typeface="Calibri" pitchFamily="34" charset="-122"/>
+                <a:cs typeface="Calibri" pitchFamily="34" charset="-120"/>
+              </a:rPr>
+              <a:t>Nothing third-party to patch at 3am. Your security review will be a short one.</a:t>
+            </a:r>
+            <a:endParaRPr lang="en-US" sz="1150" dirty="0"/>
+          </a:p>
+        </p:txBody>
+      </p:sp>
+      <p:sp>
+        <p:nvSpPr>
+          <p:cNvPr id="8" name="Shape 6"/>
+          <p:cNvSpPr/>
+          <p:nvPr/>
+        </p:nvSpPr>
+        <p:spPr>
+          <a:xfrm>
+            <a:off x="3584448" y="2148840"/>
+            <a:ext cx="2606040" cy="3063240"/>
+          </a:xfrm>
+          <a:prstGeom prst="roundRect">
+            <a:avLst>
+              <a:gd name="adj" fmla="val 2807"/>
+            </a:avLst>
+          </a:prstGeom>
+          <a:solidFill>
+            <a:srgbClr val="2E3944"/>
+          </a:solidFill>
+          <a:ln/>
+          <a:effectLst>
+            <a:outerShdw sx="100000" sy="100000" kx="0" ky="0" algn="bl" rotWithShape="0" blurRad="127000" dist="25400" dir="5400000">
+              <a:srgbClr val="000000">
+                <a:alpha val="12000"/>
+              </a:srgbClr>
+            </a:outerShdw>
+          </a:effectLst>
+        </p:spPr>
+      </p:sp>
+      <p:sp>
+        <p:nvSpPr>
+          <p:cNvPr id="9" name="Text 7"/>
+          <p:cNvSpPr txBox="1"/>
+          <p:nvPr/>
+        </p:nvSpPr>
+        <p:spPr>
+          <a:xfrm>
+            <a:off x="3858768" y="2359152"/>
+            <a:ext cx="2057400" cy="914400"/>
+          </a:xfrm>
+          <a:prstGeom prst="rect">
+            <a:avLst/>
+          </a:prstGeom>
+          <a:noFill/>
+          <a:ln/>
+        </p:spPr>
+        <p:txBody>
+          <a:bodyPr wrap="square" lIns="0" tIns="0" rIns="0" bIns="0" rtlCol="0" anchor="ctr"/>
+          <a:lstStyle/>
+          <a:p>
+            <a:pPr indent="0" marL="0">
+              <a:buNone/>
+            </a:pPr>
+            <a:r>
+              <a:rPr lang="en-US" sz="4400" b="1" dirty="0">
+                <a:solidFill>
+                  <a:srgbClr val="F2A81D"/>
+                </a:solidFill>
+                <a:latin typeface="Cambria" pitchFamily="34" charset="0"/>
+                <a:ea typeface="Cambria" pitchFamily="34" charset="-122"/>
+                <a:cs typeface="Cambria" pitchFamily="34" charset="-120"/>
+              </a:rPr>
+              <a:t>6,721</a:t>
+            </a:r>
+            <a:endParaRPr lang="en-US" sz="4400" dirty="0"/>
+          </a:p>
+        </p:txBody>
+      </p:sp>
+      <p:sp>
+        <p:nvSpPr>
+          <p:cNvPr id="10" name="Text 8"/>
+          <p:cNvSpPr txBox="1"/>
+          <p:nvPr/>
+        </p:nvSpPr>
+        <p:spPr>
+          <a:xfrm>
+            <a:off x="3858768" y="3291840"/>
+            <a:ext cx="2057400" cy="411480"/>
+          </a:xfrm>
+          <a:prstGeom prst="rect">
+            <a:avLst/>
+          </a:prstGeom>
+          <a:noFill/>
+          <a:ln/>
+        </p:spPr>
+        <p:txBody>
+          <a:bodyPr wrap="square" lIns="0" tIns="0" rIns="0" bIns="0" rtlCol="0" anchor="ctr"/>
+          <a:lstStyle/>
+          <a:p>
+            <a:pPr indent="0" marL="0">
+              <a:buNone/>
+            </a:pPr>
+            <a:r>
+              <a:rPr lang="en-US" sz="1250" b="1" dirty="0">
+                <a:solidFill>
+                  <a:srgbClr val="FFFFFF"/>
+                </a:solidFill>
+                <a:latin typeface="Calibri" pitchFamily="34" charset="0"/>
+                <a:ea typeface="Calibri" pitchFamily="34" charset="-122"/>
+                <a:cs typeface="Calibri" pitchFamily="34" charset="-120"/>
+              </a:rPr>
+              <a:t>automated tests</a:t>
+            </a:r>
+            <a:endParaRPr lang="en-US" sz="1250" dirty="0"/>
+          </a:p>
+        </p:txBody>
+      </p:sp>
+      <p:sp>
+        <p:nvSpPr>
+          <p:cNvPr id="11" name="Text 9"/>
+          <p:cNvSpPr txBox="1"/>
+          <p:nvPr/>
+        </p:nvSpPr>
+        <p:spPr>
+          <a:xfrm>
+            <a:off x="3858768" y="3767328"/>
+            <a:ext cx="2057400" cy="1234440"/>
+          </a:xfrm>
+          <a:prstGeom prst="rect">
+            <a:avLst/>
+          </a:prstGeom>
+          <a:noFill/>
+          <a:ln/>
+        </p:spPr>
+        <p:txBody>
+          <a:bodyPr wrap="square" lIns="0" tIns="0" rIns="0" bIns="0" rtlCol="0" anchor="ctr"/>
+          <a:lstStyle/>
+          <a:p>
+            <a:pPr indent="0" marL="0">
+              <a:buNone/>
+            </a:pPr>
+            <a:r>
+              <a:rPr lang="en-US" sz="1150" dirty="0">
+                <a:solidFill>
+                  <a:srgbClr val="A8B2BD"/>
+                </a:solidFill>
+                <a:latin typeface="Calibri" pitchFamily="34" charset="0"/>
+                <a:ea typeface="Calibri" pitchFamily="34" charset="-122"/>
+                <a:cs typeface="Calibri" pitchFamily="34" charset="-120"/>
+              </a:rPr>
+              <a:t>Every rule proved before it ships, not after a customer finds it.</a:t>
+            </a:r>
+            <a:endParaRPr lang="en-US" sz="1150" dirty="0"/>
+          </a:p>
+        </p:txBody>
+      </p:sp>
+      <p:sp>
+        <p:nvSpPr>
+          <p:cNvPr id="12" name="Shape 10"/>
+          <p:cNvSpPr/>
+          <p:nvPr/>
+        </p:nvSpPr>
+        <p:spPr>
+          <a:xfrm>
+            <a:off x="6483096" y="2148840"/>
+            <a:ext cx="2606040" cy="3063240"/>
+          </a:xfrm>
+          <a:prstGeom prst="roundRect">
+            <a:avLst>
+              <a:gd name="adj" fmla="val 2807"/>
+            </a:avLst>
+          </a:prstGeom>
+          <a:solidFill>
+            <a:srgbClr val="2E3944"/>
+          </a:solidFill>
+          <a:ln/>
+          <a:effectLst>
+            <a:outerShdw sx="100000" sy="100000" kx="0" ky="0" algn="bl" rotWithShape="0" blurRad="127000" dist="25400" dir="5400000">
+              <a:srgbClr val="000000">
+                <a:alpha val="12000"/>
+              </a:srgbClr>
+            </a:outerShdw>
+          </a:effectLst>
+        </p:spPr>
+      </p:sp>
+      <p:sp>
+        <p:nvSpPr>
+          <p:cNvPr id="13" name="Text 11"/>
+          <p:cNvSpPr txBox="1"/>
+          <p:nvPr/>
+        </p:nvSpPr>
+        <p:spPr>
+          <a:xfrm>
+            <a:off x="6757416" y="2359152"/>
+            <a:ext cx="2057400" cy="914400"/>
+          </a:xfrm>
+          <a:prstGeom prst="rect">
+            <a:avLst/>
+          </a:prstGeom>
+          <a:noFill/>
+          <a:ln/>
+        </p:spPr>
+        <p:txBody>
+          <a:bodyPr wrap="square" lIns="0" tIns="0" rIns="0" bIns="0" rtlCol="0" anchor="ctr"/>
+          <a:lstStyle/>
+          <a:p>
+            <a:pPr indent="0" marL="0">
+              <a:buNone/>
+            </a:pPr>
+            <a:r>
+              <a:rPr lang="en-US" sz="4400" b="1" dirty="0">
+                <a:solidFill>
+                  <a:srgbClr val="F2A81D"/>
+                </a:solidFill>
+                <a:latin typeface="Cambria" pitchFamily="34" charset="0"/>
+                <a:ea typeface="Cambria" pitchFamily="34" charset="-122"/>
+                <a:cs typeface="Cambria" pitchFamily="34" charset="-120"/>
+              </a:rPr>
+              <a:t>785</a:t>
+            </a:r>
+            <a:endParaRPr lang="en-US" sz="4400" dirty="0"/>
+          </a:p>
+        </p:txBody>
+      </p:sp>
+      <p:sp>
+        <p:nvSpPr>
+          <p:cNvPr id="14" name="Text 12"/>
+          <p:cNvSpPr txBox="1"/>
+          <p:nvPr/>
+        </p:nvSpPr>
+        <p:spPr>
+          <a:xfrm>
+            <a:off x="6757416" y="3291840"/>
+            <a:ext cx="2057400" cy="411480"/>
+          </a:xfrm>
+          <a:prstGeom prst="rect">
+            <a:avLst/>
+          </a:prstGeom>
+          <a:noFill/>
+          <a:ln/>
+        </p:spPr>
+        <p:txBody>
+          <a:bodyPr wrap="square" lIns="0" tIns="0" rIns="0" bIns="0" rtlCol="0" anchor="ctr"/>
+          <a:lstStyle/>
+          <a:p>
+            <a:pPr indent="0" marL="0">
+              <a:buNone/>
+            </a:pPr>
+            <a:r>
+              <a:rPr lang="en-US" sz="1250" b="1" dirty="0">
+                <a:solidFill>
+                  <a:srgbClr val="FFFFFF"/>
+                </a:solidFill>
+                <a:latin typeface="Calibri" pitchFamily="34" charset="0"/>
+                <a:ea typeface="Calibri" pitchFamily="34" charset="-122"/>
+                <a:cs typeface="Calibri" pitchFamily="34" charset="-120"/>
+              </a:rPr>
+              <a:t>event types, closed</a:t>
+            </a:r>
+            <a:endParaRPr lang="en-US" sz="1250" dirty="0"/>
+          </a:p>
+        </p:txBody>
+      </p:sp>
+      <p:sp>
+        <p:nvSpPr>
+          <p:cNvPr id="15" name="Text 13"/>
+          <p:cNvSpPr txBox="1"/>
+          <p:nvPr/>
+        </p:nvSpPr>
+        <p:spPr>
+          <a:xfrm>
+            <a:off x="6757416" y="3767328"/>
+            <a:ext cx="2057400" cy="1234440"/>
+          </a:xfrm>
+          <a:prstGeom prst="rect">
+            <a:avLst/>
+          </a:prstGeom>
+          <a:noFill/>
+          <a:ln/>
+        </p:spPr>
+        <p:txBody>
+          <a:bodyPr wrap="square" lIns="0" tIns="0" rIns="0" bIns="0" rtlCol="0" anchor="ctr"/>
+          <a:lstStyle/>
+          <a:p>
+            <a:pPr indent="0" marL="0">
+              <a:buNone/>
+            </a:pPr>
+            <a:r>
+              <a:rPr lang="en-US" sz="1150" dirty="0">
+                <a:solidFill>
+                  <a:srgbClr val="A8B2BD"/>
+                </a:solidFill>
+                <a:latin typeface="Calibri" pitchFamily="34" charset="0"/>
+                <a:ea typeface="Calibri" pitchFamily="34" charset="-122"/>
+                <a:cs typeface="Calibri" pitchFamily="34" charset="-120"/>
+              </a:rPr>
+              <a:t>Nothing happens on your job that the record cannot name.</a:t>
+            </a:r>
+            <a:endParaRPr lang="en-US" sz="1150" dirty="0"/>
+          </a:p>
+        </p:txBody>
+      </p:sp>
+      <p:sp>
+        <p:nvSpPr>
+          <p:cNvPr id="16" name="Shape 14"/>
+          <p:cNvSpPr/>
+          <p:nvPr/>
+        </p:nvSpPr>
+        <p:spPr>
+          <a:xfrm>
+            <a:off x="9381744" y="2148840"/>
+            <a:ext cx="2606040" cy="3063240"/>
+          </a:xfrm>
+          <a:prstGeom prst="roundRect">
+            <a:avLst>
+              <a:gd name="adj" fmla="val 2807"/>
+            </a:avLst>
+          </a:prstGeom>
+          <a:solidFill>
+            <a:srgbClr val="2E3944"/>
+          </a:solidFill>
+          <a:ln/>
+          <a:effectLst>
+            <a:outerShdw sx="100000" sy="100000" kx="0" ky="0" algn="bl" rotWithShape="0" blurRad="127000" dist="25400" dir="5400000">
+              <a:srgbClr val="000000">
+                <a:alpha val="12000"/>
+              </a:srgbClr>
+            </a:outerShdw>
+          </a:effectLst>
+        </p:spPr>
+      </p:sp>
+      <p:sp>
+        <p:nvSpPr>
+          <p:cNvPr id="17" name="Text 15"/>
+          <p:cNvSpPr txBox="1"/>
+          <p:nvPr/>
+        </p:nvSpPr>
+        <p:spPr>
+          <a:xfrm>
+            <a:off x="9656064" y="2359152"/>
+            <a:ext cx="2057400" cy="914400"/>
+          </a:xfrm>
+          <a:prstGeom prst="rect">
+            <a:avLst/>
+          </a:prstGeom>
+          <a:noFill/>
+          <a:ln/>
+        </p:spPr>
+        <p:txBody>
+          <a:bodyPr wrap="square" lIns="0" tIns="0" rIns="0" bIns="0" rtlCol="0" anchor="ctr"/>
+          <a:lstStyle/>
+          <a:p>
+            <a:pPr indent="0" marL="0">
+              <a:buNone/>
+            </a:pPr>
+            <a:r>
+              <a:rPr lang="en-US" sz="4400" b="1" dirty="0">
+                <a:solidFill>
+                  <a:srgbClr val="F2A81D"/>
+                </a:solidFill>
+                <a:latin typeface="Cambria" pitchFamily="34" charset="0"/>
+                <a:ea typeface="Cambria" pitchFamily="34" charset="-122"/>
+                <a:cs typeface="Cambria" pitchFamily="34" charset="-120"/>
+              </a:rPr>
+              <a:t>1,185</a:t>
+            </a:r>
+            <a:endParaRPr lang="en-US" sz="4400" dirty="0"/>
+          </a:p>
+        </p:txBody>
+      </p:sp>
+      <p:sp>
+        <p:nvSpPr>
+          <p:cNvPr id="18" name="Text 16"/>
+          <p:cNvSpPr txBox="1"/>
+          <p:nvPr/>
+        </p:nvSpPr>
+        <p:spPr>
+          <a:xfrm>
+            <a:off x="9656064" y="3291840"/>
+            <a:ext cx="2057400" cy="411480"/>
+          </a:xfrm>
+          <a:prstGeom prst="rect">
+            <a:avLst/>
+          </a:prstGeom>
+          <a:noFill/>
+          <a:ln/>
+        </p:spPr>
+        <p:txBody>
+          <a:bodyPr wrap="square" lIns="0" tIns="0" rIns="0" bIns="0" rtlCol="0" anchor="ctr"/>
+          <a:lstStyle/>
+          <a:p>
+            <a:pPr indent="0" marL="0">
+              <a:buNone/>
+            </a:pPr>
+            <a:r>
+              <a:rPr lang="en-US" sz="1250" b="1" dirty="0">
+                <a:solidFill>
+                  <a:srgbClr val="FFFFFF"/>
+                </a:solidFill>
+                <a:latin typeface="Calibri" pitchFamily="34" charset="0"/>
+                <a:ea typeface="Calibri" pitchFamily="34" charset="-122"/>
+                <a:cs typeface="Calibri" pitchFamily="34" charset="-120"/>
+              </a:rPr>
+              <a:t>API endpoints</a:t>
+            </a:r>
+            <a:endParaRPr lang="en-US" sz="1250" dirty="0"/>
+          </a:p>
+        </p:txBody>
+      </p:sp>
+      <p:sp>
+        <p:nvSpPr>
+          <p:cNvPr id="19" name="Text 17"/>
+          <p:cNvSpPr txBox="1"/>
+          <p:nvPr/>
+        </p:nvSpPr>
+        <p:spPr>
+          <a:xfrm>
+            <a:off x="9656064" y="3767328"/>
+            <a:ext cx="2057400" cy="1234440"/>
+          </a:xfrm>
+          <a:prstGeom prst="rect">
+            <a:avLst/>
+          </a:prstGeom>
+          <a:noFill/>
+          <a:ln/>
+        </p:spPr>
+        <p:txBody>
+          <a:bodyPr wrap="square" lIns="0" tIns="0" rIns="0" bIns="0" rtlCol="0" anchor="ctr"/>
+          <a:lstStyle/>
+          <a:p>
+            <a:pPr indent="0" marL="0">
+              <a:buNone/>
+            </a:pPr>
+            <a:r>
+              <a:rPr lang="en-US" sz="1150" dirty="0">
+                <a:solidFill>
+                  <a:srgbClr val="A8B2BD"/>
+                </a:solidFill>
+                <a:latin typeface="Calibri" pitchFamily="34" charset="0"/>
+                <a:ea typeface="Calibri" pitchFamily="34" charset="-122"/>
+                <a:cs typeface="Calibri" pitchFamily="34" charset="-120"/>
+              </a:rPr>
+              <a:t>Your data stays yours. Read all of it from your own systems.</a:t>
+            </a:r>
+            <a:endParaRPr lang="en-US" sz="1150" dirty="0"/>
+          </a:p>
+        </p:txBody>
+      </p:sp>
+      <p:sp>
+        <p:nvSpPr>
+          <p:cNvPr id="20" name="Text 18"/>
+          <p:cNvSpPr txBox="1"/>
+          <p:nvPr/>
+        </p:nvSpPr>
+        <p:spPr>
+          <a:xfrm>
+            <a:off x="685800" y="5486400"/>
+            <a:ext cx="10789920" cy="365760"/>
+          </a:xfrm>
+          <a:prstGeom prst="rect">
+            <a:avLst/>
+          </a:prstGeom>
+          <a:noFill/>
+          <a:ln/>
+        </p:spPr>
+        <p:txBody>
+          <a:bodyPr wrap="square" lIns="0" tIns="0" rIns="0" bIns="0" rtlCol="0" anchor="ctr"/>
+          <a:lstStyle/>
+          <a:p>
+            <a:pPr indent="0" marL="0">
+              <a:buNone/>
+            </a:pPr>
+            <a:r>
+              <a:rPr lang="en-US" sz="1300" b="1" dirty="0">
+                <a:solidFill>
+                  <a:srgbClr val="FFFFFF"/>
+                </a:solidFill>
+                <a:latin typeface="Calibri" pitchFamily="34" charset="0"/>
+                <a:ea typeface="Calibri" pitchFamily="34" charset="-122"/>
+                <a:cs typeface="Calibri" pitchFamily="34" charset="-120"/>
+              </a:rPr>
+              <a:t>Encrypted at rest, per customer. Second factor on every administrator. Your tenancy cannot see anybody else’s.</a:t>
+            </a:r>
+            <a:endParaRPr lang="en-US" sz="1300" dirty="0"/>
+          </a:p>
+        </p:txBody>
+      </p:sp>
+    </p:spTree>
+  </p:cSld>
+  <p:clrMapOvr>
+    <a:masterClrMapping/>
+  </p:clrMapOvr>
+</p:sld>
+</file>
+
+<file path=ppt/slides/slide9.xml><?xml version="1.0" encoding="utf-8"?>
+<p:sld xmlns:a="http://schemas.openxmlformats.org/drawingml/2006/main" xmlns:r="http://schemas.openxmlformats.org/officeDocument/2006/relationships" xmlns:p="http://schemas.openxmlformats.org/presentationml/2006/main">
+  <p:cSld name="Slide 9">
     <p:bg>
       <p:bgPr>
         <a:solidFill>
@@ -6931,7 +8234,7 @@
                 <a:ea typeface="Calibri" pitchFamily="34" charset="-122"/>
                 <a:cs typeface="Calibri" pitchFamily="34" charset="-120"/>
               </a:rPr>
-              <a:t>EVERY SIZE, SAME RECORD</a:t>
+              <a:t>ONE PERSON, OR TEN THOUSAND</a:t>
             </a:r>
             <a:endParaRPr lang="en-US" sz="1100" dirty="0"/>
           </a:p>
@@ -6945,24 +8248,24 @@
         </p:nvSpPr>
         <p:spPr>
           <a:xfrm>
-            <a:off x="685800" y="731520"/>
-            <a:ext cx="10789920" cy="914400"/>
-          </a:xfrm>
-          <a:prstGeom prst="rect">
-            <a:avLst/>
-          </a:prstGeom>
-          <a:noFill/>
-          <a:ln/>
-        </p:spPr>
-        <p:txBody>
-          <a:bodyPr wrap="square" lIns="0" tIns="0" rIns="0" bIns="0" rtlCol="0" anchor="ctr"/>
-          <a:lstStyle/>
-          <a:p>
-            <a:pPr indent="0" marL="0">
-              <a:buNone/>
-            </a:pPr>
-            <a:r>
-              <a:rPr lang="en-US" sz="3800" b="1" dirty="0">
+            <a:off x="685800" y="713232"/>
+            <a:ext cx="10789920" cy="1005840"/>
+          </a:xfrm>
+          <a:prstGeom prst="rect">
+            <a:avLst/>
+          </a:prstGeom>
+          <a:noFill/>
+          <a:ln/>
+        </p:spPr>
+        <p:txBody>
+          <a:bodyPr wrap="square" lIns="0" tIns="0" rIns="0" bIns="0" rtlCol="0" anchor="ctr"/>
+          <a:lstStyle/>
+          <a:p>
+            <a:pPr indent="0" marL="0">
+              <a:buNone/>
+            </a:pPr>
+            <a:r>
+              <a:rPr lang="en-US" sz="4000" b="1" dirty="0">
                 <a:solidFill>
                   <a:srgbClr val="1A1F26"/>
                 </a:solidFill>
@@ -6970,9 +8273,9 @@
                 <a:ea typeface="Cambria" pitchFamily="34" charset="-122"/>
                 <a:cs typeface="Cambria" pitchFamily="34" charset="-120"/>
               </a:rPr>
-              <a:t>From one person to a Tier 1 portfolio.</a:t>
-            </a:r>
-            <a:endParaRPr lang="en-US" sz="3800" dirty="0"/>
+              <a:t>From £100 a month. Same record.</a:t>
+            </a:r>
+            <a:endParaRPr lang="en-US" sz="4000" dirty="0"/>
           </a:p>
         </p:txBody>
       </p:sp>
@@ -6984,8 +8287,8 @@
         </p:nvSpPr>
         <p:spPr>
           <a:xfrm>
-            <a:off x="685800" y="2377440"/>
-            <a:ext cx="2121408" cy="2880360"/>
+            <a:off x="685800" y="2148840"/>
+            <a:ext cx="2121408" cy="2788920"/>
           </a:xfrm>
           <a:prstGeom prst="roundRect">
             <a:avLst>
@@ -7013,7 +8316,7 @@
         </p:nvSpPr>
         <p:spPr>
           <a:xfrm>
-            <a:off x="886968" y="2606040"/>
+            <a:off x="886968" y="2340864"/>
             <a:ext cx="1719072" cy="320040"/>
           </a:xfrm>
           <a:prstGeom prst="rect">
@@ -7052,7 +8355,7 @@
         </p:nvSpPr>
         <p:spPr>
           <a:xfrm>
-            <a:off x="886968" y="2971800"/>
+            <a:off x="886968" y="2688336"/>
             <a:ext cx="1719072" cy="640080"/>
           </a:xfrm>
           <a:prstGeom prst="rect">
@@ -7091,7 +8394,7 @@
         </p:nvSpPr>
         <p:spPr>
           <a:xfrm>
-            <a:off x="886968" y="3611880"/>
+            <a:off x="886968" y="3319272"/>
             <a:ext cx="1719072" cy="256032"/>
           </a:xfrm>
           <a:prstGeom prst="rect">
@@ -7130,7 +8433,7 @@
         </p:nvSpPr>
         <p:spPr>
           <a:xfrm>
-            <a:off x="886968" y="3950208"/>
+            <a:off x="886968" y="3639312"/>
             <a:ext cx="1719072" cy="274320"/>
           </a:xfrm>
           <a:prstGeom prst="rect">
@@ -7169,8 +8472,8 @@
         </p:nvSpPr>
         <p:spPr>
           <a:xfrm>
-            <a:off x="886968" y="4279392"/>
-            <a:ext cx="1719072" cy="868680"/>
+            <a:off x="886968" y="3959352"/>
+            <a:ext cx="1719072" cy="822960"/>
           </a:xfrm>
           <a:prstGeom prst="rect">
             <a:avLst/>
@@ -7194,7 +8497,7 @@
                 <a:ea typeface="Calibri" pitchFamily="34" charset="-122"/>
                 <a:cs typeface="Calibri" pitchFamily="34" charset="-120"/>
               </a:rPr>
-              <a:t>Evaluate it on a real job</a:t>
+              <a:t>Prove it on a real job</a:t>
             </a:r>
             <a:endParaRPr lang="en-US" sz="1100" dirty="0"/>
           </a:p>
@@ -7208,8 +8511,8 @@
         </p:nvSpPr>
         <p:spPr>
           <a:xfrm>
-            <a:off x="2971800" y="2377440"/>
-            <a:ext cx="2121408" cy="2880360"/>
+            <a:off x="2971800" y="2148840"/>
+            <a:ext cx="2121408" cy="2788920"/>
           </a:xfrm>
           <a:prstGeom prst="roundRect">
             <a:avLst>
@@ -7237,7 +8540,7 @@
         </p:nvSpPr>
         <p:spPr>
           <a:xfrm>
-            <a:off x="3172968" y="2606040"/>
+            <a:off x="3172968" y="2340864"/>
             <a:ext cx="1719072" cy="320040"/>
           </a:xfrm>
           <a:prstGeom prst="rect">
@@ -7276,7 +8579,7 @@
         </p:nvSpPr>
         <p:spPr>
           <a:xfrm>
-            <a:off x="3172968" y="2971800"/>
+            <a:off x="3172968" y="2688336"/>
             <a:ext cx="1719072" cy="640080"/>
           </a:xfrm>
           <a:prstGeom prst="rect">
@@ -7315,7 +8618,7 @@
         </p:nvSpPr>
         <p:spPr>
           <a:xfrm>
-            <a:off x="3172968" y="3611880"/>
+            <a:off x="3172968" y="3319272"/>
             <a:ext cx="1719072" cy="256032"/>
           </a:xfrm>
           <a:prstGeom prst="rect">
@@ -7354,7 +8657,7 @@
         </p:nvSpPr>
         <p:spPr>
           <a:xfrm>
-            <a:off x="3172968" y="3950208"/>
+            <a:off x="3172968" y="3639312"/>
             <a:ext cx="1719072" cy="274320"/>
           </a:xfrm>
           <a:prstGeom prst="rect">
@@ -7393,8 +8696,8 @@
         </p:nvSpPr>
         <p:spPr>
           <a:xfrm>
-            <a:off x="3172968" y="4279392"/>
-            <a:ext cx="1719072" cy="868680"/>
+            <a:off x="3172968" y="3959352"/>
+            <a:ext cx="1719072" cy="822960"/>
           </a:xfrm>
           <a:prstGeom prst="rect">
             <a:avLst/>
@@ -7418,7 +8721,7 @@
                 <a:ea typeface="Calibri" pitchFamily="34" charset="-122"/>
                 <a:cs typeface="Calibri" pitchFamily="34" charset="-120"/>
               </a:rPr>
-              <a:t>Sole traders, single-project consultants</a:t>
+              <a:t>Sole traders and consultants</a:t>
             </a:r>
             <a:endParaRPr lang="en-US" sz="1100" dirty="0"/>
           </a:p>
@@ -7432,8 +8735,8 @@
         </p:nvSpPr>
         <p:spPr>
           <a:xfrm>
-            <a:off x="5257800" y="2377440"/>
-            <a:ext cx="2121408" cy="2880360"/>
+            <a:off x="5257800" y="2148840"/>
+            <a:ext cx="2121408" cy="2788920"/>
           </a:xfrm>
           <a:prstGeom prst="roundRect">
             <a:avLst>
@@ -7461,7 +8764,7 @@
         </p:nvSpPr>
         <p:spPr>
           <a:xfrm>
-            <a:off x="5458968" y="2606040"/>
+            <a:off x="5458968" y="2340864"/>
             <a:ext cx="1719072" cy="320040"/>
           </a:xfrm>
           <a:prstGeom prst="rect">
@@ -7500,7 +8803,7 @@
         </p:nvSpPr>
         <p:spPr>
           <a:xfrm>
-            <a:off x="5458968" y="2971800"/>
+            <a:off x="5458968" y="2688336"/>
             <a:ext cx="1719072" cy="640080"/>
           </a:xfrm>
           <a:prstGeom prst="rect">
@@ -7539,7 +8842,7 @@
         </p:nvSpPr>
         <p:spPr>
           <a:xfrm>
-            <a:off x="5458968" y="3611880"/>
+            <a:off x="5458968" y="3319272"/>
             <a:ext cx="1719072" cy="256032"/>
           </a:xfrm>
           <a:prstGeom prst="rect">
@@ -7578,7 +8881,7 @@
         </p:nvSpPr>
         <p:spPr>
           <a:xfrm>
-            <a:off x="5458968" y="3950208"/>
+            <a:off x="5458968" y="3639312"/>
             <a:ext cx="1719072" cy="274320"/>
           </a:xfrm>
           <a:prstGeom prst="rect">
@@ -7617,8 +8920,8 @@
         </p:nvSpPr>
         <p:spPr>
           <a:xfrm>
-            <a:off x="5458968" y="4279392"/>
-            <a:ext cx="1719072" cy="868680"/>
+            <a:off x="5458968" y="3959352"/>
+            <a:ext cx="1719072" cy="822960"/>
           </a:xfrm>
           <a:prstGeom prst="rect">
             <a:avLst/>
@@ -7642,7 +8945,7 @@
                 <a:ea typeface="Calibri" pitchFamily="34" charset="-122"/>
                 <a:cs typeface="Calibri" pitchFamily="34" charset="-120"/>
               </a:rPr>
-              <a:t>SME contractors and pilot projects</a:t>
+              <a:t>SME contractors, first projects</a:t>
             </a:r>
             <a:endParaRPr lang="en-US" sz="1100" dirty="0"/>
           </a:p>
@@ -7656,8 +8959,8 @@
         </p:nvSpPr>
         <p:spPr>
           <a:xfrm>
-            <a:off x="7543800" y="2377440"/>
-            <a:ext cx="2121408" cy="2880360"/>
+            <a:off x="7543800" y="2148840"/>
+            <a:ext cx="2121408" cy="2788920"/>
           </a:xfrm>
           <a:prstGeom prst="roundRect">
             <a:avLst>
@@ -7685,7 +8988,7 @@
         </p:nvSpPr>
         <p:spPr>
           <a:xfrm>
-            <a:off x="7744968" y="2606040"/>
+            <a:off x="7744968" y="2340864"/>
             <a:ext cx="1719072" cy="320040"/>
           </a:xfrm>
           <a:prstGeom prst="rect">
@@ -7724,7 +9027,7 @@
         </p:nvSpPr>
         <p:spPr>
           <a:xfrm>
-            <a:off x="7744968" y="2971800"/>
+            <a:off x="7744968" y="2688336"/>
             <a:ext cx="1719072" cy="640080"/>
           </a:xfrm>
           <a:prstGeom prst="rect">
@@ -7763,7 +9066,7 @@
         </p:nvSpPr>
         <p:spPr>
           <a:xfrm>
-            <a:off x="7744968" y="3611880"/>
+            <a:off x="7744968" y="3319272"/>
             <a:ext cx="1719072" cy="256032"/>
           </a:xfrm>
           <a:prstGeom prst="rect">
@@ -7802,7 +9105,7 @@
         </p:nvSpPr>
         <p:spPr>
           <a:xfrm>
-            <a:off x="7744968" y="3950208"/>
+            <a:off x="7744968" y="3639312"/>
             <a:ext cx="1719072" cy="274320"/>
           </a:xfrm>
           <a:prstGeom prst="rect">
@@ -7841,8 +9144,8 @@
         </p:nvSpPr>
         <p:spPr>
           <a:xfrm>
-            <a:off x="7744968" y="4279392"/>
-            <a:ext cx="1719072" cy="868680"/>
+            <a:off x="7744968" y="3959352"/>
+            <a:ext cx="1719072" cy="822960"/>
           </a:xfrm>
           <a:prstGeom prst="rect">
             <a:avLst/>
@@ -7866,7 +9169,7 @@
                 <a:ea typeface="Calibri" pitchFamily="34" charset="-122"/>
                 <a:cs typeface="Calibri" pitchFamily="34" charset="-120"/>
               </a:rPr>
-              <a:t>Multiple live packages, API access</a:t>
+              <a:t>Multiple live packages, API</a:t>
             </a:r>
             <a:endParaRPr lang="en-US" sz="1100" dirty="0"/>
           </a:p>
@@ -7880,8 +9183,8 @@
         </p:nvSpPr>
         <p:spPr>
           <a:xfrm>
-            <a:off x="9829800" y="2377440"/>
-            <a:ext cx="2121408" cy="2880360"/>
+            <a:off x="9829800" y="2148840"/>
+            <a:ext cx="2121408" cy="2788920"/>
           </a:xfrm>
           <a:prstGeom prst="roundRect">
             <a:avLst>
@@ -7909,7 +9212,7 @@
         </p:nvSpPr>
         <p:spPr>
           <a:xfrm>
-            <a:off x="10030968" y="2606040"/>
+            <a:off x="10030968" y="2340864"/>
             <a:ext cx="1719072" cy="320040"/>
           </a:xfrm>
           <a:prstGeom prst="rect">
@@ -7948,7 +9251,7 @@
         </p:nvSpPr>
         <p:spPr>
           <a:xfrm>
-            <a:off x="10030968" y="2971800"/>
+            <a:off x="10030968" y="2688336"/>
             <a:ext cx="1719072" cy="640080"/>
           </a:xfrm>
           <a:prstGeom prst="rect">
@@ -7987,7 +9290,7 @@
         </p:nvSpPr>
         <p:spPr>
           <a:xfrm>
-            <a:off x="10030968" y="3611880"/>
+            <a:off x="10030968" y="3319272"/>
             <a:ext cx="1719072" cy="256032"/>
           </a:xfrm>
           <a:prstGeom prst="rect">
@@ -8026,7 +9329,7 @@
         </p:nvSpPr>
         <p:spPr>
           <a:xfrm>
-            <a:off x="10030968" y="3950208"/>
+            <a:off x="10030968" y="3639312"/>
             <a:ext cx="1719072" cy="274320"/>
           </a:xfrm>
           <a:prstGeom prst="rect">
@@ -8065,8 +9368,8 @@
         </p:nvSpPr>
         <p:spPr>
           <a:xfrm>
-            <a:off x="10030968" y="4279392"/>
-            <a:ext cx="1719072" cy="868680"/>
+            <a:off x="10030968" y="3959352"/>
+            <a:ext cx="1719072" cy="822960"/>
           </a:xfrm>
           <a:prstGeom prst="rect">
             <a:avLst/>
@@ -8090,7 +9393,7 @@
                 <a:ea typeface="Calibri" pitchFamily="34" charset="-122"/>
                 <a:cs typeface="Calibri" pitchFamily="34" charset="-120"/>
               </a:rPr>
-              <a:t>Tier 1, multi-portfolio, isolated tenancy</a:t>
+              <a:t>Tier 1, isolated tenancy</a:t>
             </a:r>
             <a:endParaRPr lang="en-US" sz="1100" dirty="0"/>
           </a:p>
@@ -8098,162 +9401,13 @@
       </p:sp>
       <p:sp>
         <p:nvSpPr>
-          <p:cNvPr id="34" name="Text 32"/>
-          <p:cNvSpPr txBox="1"/>
-          <p:nvPr/>
-        </p:nvSpPr>
-        <p:spPr>
-          <a:xfrm>
-            <a:off x="685800" y="5486400"/>
-            <a:ext cx="10789920" cy="640080"/>
-          </a:xfrm>
-          <a:prstGeom prst="rect">
-            <a:avLst/>
-          </a:prstGeom>
-          <a:noFill/>
-          <a:ln/>
-        </p:spPr>
-        <p:txBody>
-          <a:bodyPr wrap="square" lIns="0" tIns="0" rIns="0" bIns="0" rtlCol="0" anchor="ctr"/>
-          <a:lstStyle/>
-          <a:p>
-            <a:pPr indent="0" marL="0">
-              <a:buNone/>
-            </a:pPr>
-            <a:r>
-              <a:rPr lang="en-US" sz="1250" dirty="0">
-                <a:solidFill>
-                  <a:srgbClr val="5A6572"/>
-                </a:solidFill>
-                <a:latin typeface="Calibri" pitchFamily="34" charset="0"/>
-                <a:ea typeface="Calibri" pitchFamily="34" charset="-122"/>
-                <a:cs typeface="Calibri" pitchFamily="34" charset="-120"/>
-              </a:rPr>
-              <a:t>Invite the whole job, pay only for the roles that decide. Site, quality, design and supply-chain participants are admitted without a seat. Every package includes an AI allowance worth 20% of its monthly price.</a:t>
-            </a:r>
-            <a:endParaRPr lang="en-US" sz="1250" dirty="0"/>
-          </a:p>
-        </p:txBody>
-      </p:sp>
-    </p:spTree>
-  </p:cSld>
-  <p:clrMapOvr>
-    <a:masterClrMapping/>
-  </p:clrMapOvr>
-</p:sld>
-</file>
-
-<file path=ppt/slides/slide9.xml><?xml version="1.0" encoding="utf-8"?>
-<p:sld xmlns:a="http://schemas.openxmlformats.org/drawingml/2006/main" xmlns:r="http://schemas.openxmlformats.org/officeDocument/2006/relationships" xmlns:p="http://schemas.openxmlformats.org/presentationml/2006/main">
-  <p:cSld name="Slide 9">
-    <p:bg>
-      <p:bgPr>
-        <a:solidFill>
-          <a:srgbClr val="1A1F26"/>
-        </a:solidFill>
-      </p:bgPr>
-    </p:bg>
-    <p:spTree>
-      <p:nvGrpSpPr>
-        <p:cNvPr id="1" name=""/>
-        <p:cNvGrpSpPr/>
-        <p:nvPr/>
-      </p:nvGrpSpPr>
-      <p:grpSpPr>
-        <a:xfrm>
-          <a:off x="0" y="0"/>
-          <a:ext cx="0" cy="0"/>
-          <a:chOff x="0" y="0"/>
-          <a:chExt cx="0" cy="0"/>
-        </a:xfrm>
-      </p:grpSpPr>
-      <p:sp>
-        <p:nvSpPr>
-          <p:cNvPr id="2" name="Text 0"/>
-          <p:cNvSpPr txBox="1"/>
-          <p:nvPr/>
-        </p:nvSpPr>
-        <p:spPr>
-          <a:xfrm>
-            <a:off x="685800" y="384048"/>
-            <a:ext cx="10789920" cy="274320"/>
-          </a:xfrm>
-          <a:prstGeom prst="rect">
-            <a:avLst/>
-          </a:prstGeom>
-          <a:noFill/>
-          <a:ln/>
-        </p:spPr>
-        <p:txBody>
-          <a:bodyPr wrap="square" lIns="0" tIns="0" rIns="0" bIns="0" rtlCol="0" anchor="ctr"/>
-          <a:lstStyle/>
-          <a:p>
-            <a:pPr indent="0" marL="0">
-              <a:buNone/>
-            </a:pPr>
-            <a:r>
-              <a:rPr lang="en-US" sz="1100" b="1" spc="200" kern="0" dirty="0">
-                <a:solidFill>
-                  <a:srgbClr val="F2A81D"/>
-                </a:solidFill>
-                <a:latin typeface="Calibri" pitchFamily="34" charset="0"/>
-                <a:ea typeface="Calibri" pitchFamily="34" charset="-122"/>
-                <a:cs typeface="Calibri" pitchFamily="34" charset="-120"/>
-              </a:rPr>
-              <a:t>SO YOU CAN PLAN AROUND IT</a:t>
-            </a:r>
-            <a:endParaRPr lang="en-US" sz="1100" dirty="0"/>
-          </a:p>
-        </p:txBody>
-      </p:sp>
-      <p:sp>
-        <p:nvSpPr>
-          <p:cNvPr id="3" name="Text 1"/>
-          <p:cNvSpPr txBox="1"/>
-          <p:nvPr/>
-        </p:nvSpPr>
-        <p:spPr>
-          <a:xfrm>
-            <a:off x="685800" y="731520"/>
-            <a:ext cx="10789920" cy="914400"/>
-          </a:xfrm>
-          <a:prstGeom prst="rect">
-            <a:avLst/>
-          </a:prstGeom>
-          <a:noFill/>
-          <a:ln/>
-        </p:spPr>
-        <p:txBody>
-          <a:bodyPr wrap="square" lIns="0" tIns="0" rIns="0" bIns="0" rtlCol="0" anchor="ctr"/>
-          <a:lstStyle/>
-          <a:p>
-            <a:pPr indent="0" marL="0">
-              <a:buNone/>
-            </a:pPr>
-            <a:r>
-              <a:rPr lang="en-US" sz="3800" b="1" dirty="0">
-                <a:solidFill>
-                  <a:srgbClr val="FFFFFF"/>
-                </a:solidFill>
-                <a:latin typeface="Cambria" pitchFamily="34" charset="0"/>
-                <a:ea typeface="Cambria" pitchFamily="34" charset="-122"/>
-                <a:cs typeface="Cambria" pitchFamily="34" charset="-120"/>
-              </a:rPr>
-              <a:t>What we do not claim.</a:t>
-            </a:r>
-            <a:endParaRPr lang="en-US" sz="3800" dirty="0"/>
-          </a:p>
-        </p:txBody>
-      </p:sp>
-      <p:sp>
-        <p:nvSpPr>
-          <p:cNvPr id="4" name="Shape 2"/>
+          <p:cNvPr id="34" name="Shape 32"/>
           <p:cNvSpPr/>
           <p:nvPr/>
         </p:nvSpPr>
         <p:spPr>
           <a:xfrm>
-            <a:off x="685800" y="2148840"/>
+            <a:off x="685800" y="5138928"/>
             <a:ext cx="10789920" cy="1024128"/>
           </a:xfrm>
           <a:prstGeom prst="roundRect">
@@ -8262,346 +9416,86 @@
             </a:avLst>
           </a:prstGeom>
           <a:solidFill>
-            <a:srgbClr val="2E3944"/>
+            <a:srgbClr val="1A1F26"/>
           </a:solidFill>
           <a:ln/>
-          <a:effectLst>
-            <a:outerShdw sx="100000" sy="100000" kx="0" ky="0" algn="bl" rotWithShape="0" blurRad="127000" dist="25400" dir="5400000">
-              <a:srgbClr val="000000">
-                <a:alpha val="12000"/>
-              </a:srgbClr>
-            </a:outerShdw>
-          </a:effectLst>
-        </p:spPr>
-      </p:sp>
-      <p:sp>
-        <p:nvSpPr>
-          <p:cNvPr id="5" name="Text 3"/>
-          <p:cNvSpPr txBox="1"/>
-          <p:nvPr/>
-        </p:nvSpPr>
-        <p:spPr>
-          <a:xfrm>
-            <a:off x="1051560" y="2304288"/>
-            <a:ext cx="4023360" cy="731520"/>
-          </a:xfrm>
-          <a:prstGeom prst="rect">
-            <a:avLst/>
-          </a:prstGeom>
-          <a:noFill/>
-          <a:ln/>
-        </p:spPr>
-        <p:txBody>
-          <a:bodyPr wrap="square" lIns="0" tIns="0" rIns="0" bIns="0" rtlCol="0" anchor="ctr"/>
-          <a:lstStyle/>
-          <a:p>
-            <a:pPr indent="0" marL="0">
-              <a:buNone/>
-            </a:pPr>
-            <a:r>
-              <a:rPr lang="en-US" sz="1400" b="1" dirty="0">
-                <a:solidFill>
-                  <a:srgbClr val="F2A81D"/>
-                </a:solidFill>
-                <a:latin typeface="Calibri" pitchFamily="34" charset="0"/>
-                <a:ea typeface="Calibri" pitchFamily="34" charset="-122"/>
-                <a:cs typeface="Calibri" pitchFamily="34" charset="-120"/>
-              </a:rPr>
-              <a:t>No independent penetration test yet</a:t>
-            </a:r>
-            <a:endParaRPr lang="en-US" sz="1400" dirty="0"/>
-          </a:p>
-        </p:txBody>
-      </p:sp>
-      <p:sp>
-        <p:nvSpPr>
-          <p:cNvPr id="6" name="Text 4"/>
-          <p:cNvSpPr txBox="1"/>
-          <p:nvPr/>
-        </p:nvSpPr>
-        <p:spPr>
-          <a:xfrm>
-            <a:off x="5257800" y="2304288"/>
-            <a:ext cx="5943600" cy="777240"/>
-          </a:xfrm>
-          <a:prstGeom prst="rect">
-            <a:avLst/>
-          </a:prstGeom>
-          <a:noFill/>
-          <a:ln/>
-        </p:spPr>
-        <p:txBody>
-          <a:bodyPr wrap="square" lIns="0" tIns="0" rIns="0" bIns="0" rtlCol="0" anchor="ctr"/>
-          <a:lstStyle/>
-          <a:p>
-            <a:pPr indent="0" marL="0">
-              <a:buNone/>
-            </a:pPr>
-            <a:r>
-              <a:rPr lang="en-US" sz="1200" dirty="0">
+        </p:spPr>
+      </p:sp>
+      <p:sp>
+        <p:nvSpPr>
+          <p:cNvPr id="35" name="Text 33"/>
+          <p:cNvSpPr txBox="1"/>
+          <p:nvPr/>
+        </p:nvSpPr>
+        <p:spPr>
+          <a:xfrm>
+            <a:off x="1143000" y="5321808"/>
+            <a:ext cx="9875520" cy="384048"/>
+          </a:xfrm>
+          <a:prstGeom prst="rect">
+            <a:avLst/>
+          </a:prstGeom>
+          <a:noFill/>
+          <a:ln/>
+        </p:spPr>
+        <p:txBody>
+          <a:bodyPr wrap="square" lIns="0" tIns="0" rIns="0" bIns="0" rtlCol="0" anchor="ctr"/>
+          <a:lstStyle/>
+          <a:p>
+            <a:pPr indent="0" marL="0">
+              <a:buNone/>
+            </a:pPr>
+            <a:r>
+              <a:rPr lang="en-US" sz="1800" b="1" dirty="0">
                 <a:solidFill>
                   <a:srgbClr val="FFFFFF"/>
-                </a:solidFill>
-                <a:latin typeface="Calibri" pitchFamily="34" charset="0"/>
-                <a:ea typeface="Calibri" pitchFamily="34" charset="-122"/>
-                <a:cs typeface="Calibri" pitchFamily="34" charset="-120"/>
-              </a:rPr>
-              <a:t>The controls are built and tested — encryption at rest, second factor, device binding, tenant isolation. An external test is not yet done, and we will not imply otherwise.</a:t>
-            </a:r>
-            <a:endParaRPr lang="en-US" sz="1200" dirty="0"/>
-          </a:p>
-        </p:txBody>
-      </p:sp>
-      <p:sp>
-        <p:nvSpPr>
-          <p:cNvPr id="7" name="Shape 5"/>
-          <p:cNvSpPr/>
-          <p:nvPr/>
-        </p:nvSpPr>
-        <p:spPr>
-          <a:xfrm>
-            <a:off x="685800" y="3319272"/>
-            <a:ext cx="10789920" cy="1024128"/>
-          </a:xfrm>
-          <a:prstGeom prst="roundRect">
-            <a:avLst>
-              <a:gd name="adj" fmla="val 7143"/>
-            </a:avLst>
-          </a:prstGeom>
-          <a:solidFill>
-            <a:srgbClr val="2E3944"/>
-          </a:solidFill>
-          <a:ln/>
-          <a:effectLst>
-            <a:outerShdw sx="100000" sy="100000" kx="0" ky="0" algn="bl" rotWithShape="0" blurRad="127000" dist="25400" dir="5400000">
-              <a:srgbClr val="000000">
-                <a:alpha val="12000"/>
-              </a:srgbClr>
-            </a:outerShdw>
-          </a:effectLst>
-        </p:spPr>
-      </p:sp>
-      <p:sp>
-        <p:nvSpPr>
-          <p:cNvPr id="8" name="Text 6"/>
-          <p:cNvSpPr txBox="1"/>
-          <p:nvPr/>
-        </p:nvSpPr>
-        <p:spPr>
-          <a:xfrm>
-            <a:off x="1051560" y="3474720"/>
-            <a:ext cx="4023360" cy="731520"/>
-          </a:xfrm>
-          <a:prstGeom prst="rect">
-            <a:avLst/>
-          </a:prstGeom>
-          <a:noFill/>
-          <a:ln/>
-        </p:spPr>
-        <p:txBody>
-          <a:bodyPr wrap="square" lIns="0" tIns="0" rIns="0" bIns="0" rtlCol="0" anchor="ctr"/>
-          <a:lstStyle/>
-          <a:p>
-            <a:pPr indent="0" marL="0">
-              <a:buNone/>
-            </a:pPr>
-            <a:r>
-              <a:rPr lang="en-US" sz="1400" b="1" dirty="0">
-                <a:solidFill>
-                  <a:srgbClr val="F2A81D"/>
-                </a:solidFill>
-                <a:latin typeface="Calibri" pitchFamily="34" charset="0"/>
-                <a:ea typeface="Calibri" pitchFamily="34" charset="-122"/>
-                <a:cs typeface="Calibri" pitchFamily="34" charset="-120"/>
-              </a:rPr>
-              <a:t>Single region, manual failover</a:t>
-            </a:r>
-            <a:endParaRPr lang="en-US" sz="1400" dirty="0"/>
-          </a:p>
-        </p:txBody>
-      </p:sp>
-      <p:sp>
-        <p:nvSpPr>
-          <p:cNvPr id="9" name="Text 7"/>
-          <p:cNvSpPr txBox="1"/>
-          <p:nvPr/>
-        </p:nvSpPr>
-        <p:spPr>
-          <a:xfrm>
-            <a:off x="5257800" y="3474720"/>
-            <a:ext cx="5943600" cy="777240"/>
-          </a:xfrm>
-          <a:prstGeom prst="rect">
-            <a:avLst/>
-          </a:prstGeom>
-          <a:noFill/>
-          <a:ln/>
-        </p:spPr>
-        <p:txBody>
-          <a:bodyPr wrap="square" lIns="0" tIns="0" rIns="0" bIns="0" rtlCol="0" anchor="ctr"/>
-          <a:lstStyle/>
-          <a:p>
-            <a:pPr indent="0" marL="0">
-              <a:buNone/>
-            </a:pPr>
-            <a:r>
-              <a:rPr lang="en-US" sz="1200" dirty="0">
-                <a:solidFill>
-                  <a:srgbClr val="FFFFFF"/>
-                </a:solidFill>
-                <a:latin typeface="Calibri" pitchFamily="34" charset="0"/>
-                <a:ea typeface="Calibri" pitchFamily="34" charset="-122"/>
-                <a:cs typeface="Calibri" pitchFamily="34" charset="-120"/>
-              </a:rPr>
-              <a:t>The record is backed up off the host and a new host comes up from it, but somebody starts it. We do not sell an uptime guarantee we cannot yet hold.</a:t>
-            </a:r>
-            <a:endParaRPr lang="en-US" sz="1200" dirty="0"/>
-          </a:p>
-        </p:txBody>
-      </p:sp>
-      <p:sp>
-        <p:nvSpPr>
-          <p:cNvPr id="10" name="Shape 8"/>
-          <p:cNvSpPr/>
-          <p:nvPr/>
-        </p:nvSpPr>
-        <p:spPr>
-          <a:xfrm>
-            <a:off x="685800" y="4489704"/>
-            <a:ext cx="10789920" cy="1024128"/>
-          </a:xfrm>
-          <a:prstGeom prst="roundRect">
-            <a:avLst>
-              <a:gd name="adj" fmla="val 7143"/>
-            </a:avLst>
-          </a:prstGeom>
-          <a:solidFill>
-            <a:srgbClr val="2E3944"/>
-          </a:solidFill>
-          <a:ln/>
-          <a:effectLst>
-            <a:outerShdw sx="100000" sy="100000" kx="0" ky="0" algn="bl" rotWithShape="0" blurRad="127000" dist="25400" dir="5400000">
-              <a:srgbClr val="000000">
-                <a:alpha val="12000"/>
-              </a:srgbClr>
-            </a:outerShdw>
-          </a:effectLst>
-        </p:spPr>
-      </p:sp>
-      <p:sp>
-        <p:nvSpPr>
-          <p:cNvPr id="11" name="Text 9"/>
-          <p:cNvSpPr txBox="1"/>
-          <p:nvPr/>
-        </p:nvSpPr>
-        <p:spPr>
-          <a:xfrm>
-            <a:off x="1051560" y="4645152"/>
-            <a:ext cx="4023360" cy="731520"/>
-          </a:xfrm>
-          <a:prstGeom prst="rect">
-            <a:avLst/>
-          </a:prstGeom>
-          <a:noFill/>
-          <a:ln/>
-        </p:spPr>
-        <p:txBody>
-          <a:bodyPr wrap="square" lIns="0" tIns="0" rIns="0" bIns="0" rtlCol="0" anchor="ctr"/>
-          <a:lstStyle/>
-          <a:p>
-            <a:pPr indent="0" marL="0">
-              <a:buNone/>
-            </a:pPr>
-            <a:r>
-              <a:rPr lang="en-US" sz="1400" b="1" dirty="0">
-                <a:solidFill>
-                  <a:srgbClr val="F2A81D"/>
-                </a:solidFill>
-                <a:latin typeface="Calibri" pitchFamily="34" charset="0"/>
-                <a:ea typeface="Calibri" pitchFamily="34" charset="-122"/>
-                <a:cs typeface="Calibri" pitchFamily="34" charset="-120"/>
-              </a:rPr>
-              <a:t>No native mobile app</a:t>
-            </a:r>
-            <a:endParaRPr lang="en-US" sz="1400" dirty="0"/>
-          </a:p>
-        </p:txBody>
-      </p:sp>
-      <p:sp>
-        <p:nvSpPr>
-          <p:cNvPr id="12" name="Text 10"/>
-          <p:cNvSpPr txBox="1"/>
-          <p:nvPr/>
-        </p:nvSpPr>
-        <p:spPr>
-          <a:xfrm>
-            <a:off x="5257800" y="4645152"/>
-            <a:ext cx="5943600" cy="777240"/>
-          </a:xfrm>
-          <a:prstGeom prst="rect">
-            <a:avLst/>
-          </a:prstGeom>
-          <a:noFill/>
-          <a:ln/>
-        </p:spPr>
-        <p:txBody>
-          <a:bodyPr wrap="square" lIns="0" tIns="0" rIns="0" bIns="0" rtlCol="0" anchor="ctr"/>
-          <a:lstStyle/>
-          <a:p>
-            <a:pPr indent="0" marL="0">
-              <a:buNone/>
-            </a:pPr>
-            <a:r>
-              <a:rPr lang="en-US" sz="1200" dirty="0">
-                <a:solidFill>
-                  <a:srgbClr val="FFFFFF"/>
-                </a:solidFill>
-                <a:latin typeface="Calibri" pitchFamily="34" charset="0"/>
-                <a:ea typeface="Calibri" pitchFamily="34" charset="-122"/>
-                <a:cs typeface="Calibri" pitchFamily="34" charset="-120"/>
-              </a:rPr>
-              <a:t>The field app is an installable progressive web app and works offline. There is no App Store build, and none is claimed.</a:t>
-            </a:r>
-            <a:endParaRPr lang="en-US" sz="1200" dirty="0"/>
-          </a:p>
-        </p:txBody>
-      </p:sp>
-      <p:sp>
-        <p:nvSpPr>
-          <p:cNvPr id="13" name="Text 11"/>
-          <p:cNvSpPr txBox="1"/>
-          <p:nvPr/>
-        </p:nvSpPr>
-        <p:spPr>
-          <a:xfrm>
-            <a:off x="685800" y="5806440"/>
-            <a:ext cx="10789920" cy="365760"/>
-          </a:xfrm>
-          <a:prstGeom prst="rect">
-            <a:avLst/>
-          </a:prstGeom>
-          <a:noFill/>
-          <a:ln/>
-        </p:spPr>
-        <p:txBody>
-          <a:bodyPr wrap="square" lIns="0" tIns="0" rIns="0" bIns="0" rtlCol="0" anchor="ctr"/>
-          <a:lstStyle/>
-          <a:p>
-            <a:pPr indent="0" marL="0">
-              <a:buNone/>
-            </a:pPr>
-            <a:r>
-              <a:rPr lang="en-US" sz="1600" b="1" i="1" dirty="0">
-                <a:solidFill>
-                  <a:srgbClr val="A8B2BD"/>
                 </a:solidFill>
                 <a:latin typeface="Cambria" pitchFamily="34" charset="0"/>
                 <a:ea typeface="Cambria" pitchFamily="34" charset="-122"/>
                 <a:cs typeface="Cambria" pitchFamily="34" charset="-120"/>
               </a:rPr>
-              <a:t>Anyone who names the limits before you sign will name the problem when it happens.</a:t>
-            </a:r>
-            <a:endParaRPr lang="en-US" sz="1600" dirty="0"/>
+              <a:t>Put the whole supply chain on it. Pay only for the people who decide.</a:t>
+            </a:r>
+            <a:endParaRPr lang="en-US" sz="1800" dirty="0"/>
+          </a:p>
+        </p:txBody>
+      </p:sp>
+      <p:sp>
+        <p:nvSpPr>
+          <p:cNvPr id="36" name="Text 34"/>
+          <p:cNvSpPr txBox="1"/>
+          <p:nvPr/>
+        </p:nvSpPr>
+        <p:spPr>
+          <a:xfrm>
+            <a:off x="1143000" y="5705856"/>
+            <a:ext cx="9875520" cy="320040"/>
+          </a:xfrm>
+          <a:prstGeom prst="rect">
+            <a:avLst/>
+          </a:prstGeom>
+          <a:noFill/>
+          <a:ln/>
+        </p:spPr>
+        <p:txBody>
+          <a:bodyPr wrap="square" lIns="0" tIns="0" rIns="0" bIns="0" rtlCol="0" anchor="ctr"/>
+          <a:lstStyle/>
+          <a:p>
+            <a:pPr indent="0" marL="0">
+              <a:buNone/>
+            </a:pPr>
+            <a:r>
+              <a:rPr lang="en-US" sz="1150" dirty="0">
+                <a:solidFill>
+                  <a:srgbClr val="A8B2BD"/>
+                </a:solidFill>
+                <a:latin typeface="Calibri" pitchFamily="34" charset="0"/>
+                <a:ea typeface="Calibri" pitchFamily="34" charset="-122"/>
+                <a:cs typeface="Calibri" pitchFamily="34" charset="-120"/>
+              </a:rPr>
+              <a:t>Site, quality, design and trade participants are admitted without a seat. Every package includes AI credit worth 20% of its price.</a:t>
+            </a:r>
+            <a:endParaRPr lang="en-US" sz="1150" dirty="0"/>
           </a:p>
         </p:txBody>
       </p:sp>
